--- a/doc/InfoCAC-vision-automatisation-IA.pptx
+++ b/doc/InfoCAC-vision-automatisation-IA.pptx
@@ -16,9 +16,13 @@
     <p:sldId id="264" r:id="rId10"/>
     <p:sldId id="265" r:id="rId11"/>
     <p:sldId id="266" r:id="rId12"/>
+    <p:sldId id="267" r:id="rId13"/>
+    <p:sldId id="268" r:id="rId14"/>
+    <p:sldId id="269" r:id="rId15"/>
+    <p:sldId id="270" r:id="rId16"/>
   </p:sldIdLst>
   <p:notesMasterIdLst>
-    <p:notesMasterId r:id="rId13"/>
+    <p:notesMasterId r:id="rId17"/>
   </p:notesMasterIdLst>
   <p:sldSz cx="12192000" cy="6858000"/>
   <p:notesSz cx="6858000" cy="12192000"/>
@@ -117,7 +121,7 @@
   <p:extLst>
     <p:ext uri="{521415D9-36F7-43E2-AB2F-B90AF26B5E84}">
       <p14:sectionLst xmlns:p14="http://schemas.microsoft.com/office/powerpoint/2010/main">
-        <p14:section name="Vision" id="{0636d700-7dbc-90c8-d334-cf64bd4f50ce}">
+        <p14:section name="Vision" id="{cefea057-16d0-129f-a57d-b5b2498603d1}">
           <p14:sldIdLst>
             <p14:sldId id="256"/>
             <p14:sldId id="257"/>
@@ -130,7 +134,14 @@
             <p14:sldId id="264"/>
             <p14:sldId id="265"/>
             <p14:sldId id="266"/>
+            <p14:sldId id="267"/>
+            <p14:sldId id="268"/>
+            <p14:sldId id="269"/>
+            <p14:sldId id="270"/>
           </p14:sldIdLst>
+        </p14:section>
+        <p14:section name="Annexes" id="{c14562ff-cb6c-4890-0e9d-ecb95baff36b}">
+          <p14:sldIdLst/>
         </p14:section>
       </p14:sectionLst>
     </p:ext>
@@ -712,7 +723,7 @@
           <a:p>
             <a:r>
               <a:rPr lang="en-US" dirty="0"/>
-              <a:t>Calendrier aligné sur la roadmap review et développement présentée par le projet : 11 sprints (S1 du 07/09 à S11 qui se termine début février), test QC à chaque sprint à partir de S4, test métiers de S6 à S8 puis de S9 à S11. Côté développement : rôles et accès, création et liste des demandes, description du mandat en S1 à S3 ; formulaires mandat bleu en S4 à S6 ; gestion d'entité, multi-millésime et statut révision en S6 et S7 ; validation et flux, tableau de bord, documents en S7 et S8 ; formulaires mandat vert, import, export en S9 à S11. Principe : une fonctionnalité s'évalue pour l'automatisation au plus tôt un sprint après sa livraison, une fois passée en test QC, parce qu'avant elle bouge encore. À mi-octobre, aucun développement n'est encore livré en ITG : les dates des tests dépendent des premières livraisons. Conséquence à dire franchement : à la passation de fin décembre (fin S8), la suite sera encore courte ; d'où un propriétaire nommé, qui porte les barres grises, et des conventions écrites dans le dépôt.</a:t>
+              <a:t>Pourquoi pas « 60 % de la régression automatisée » comme dans beaucoup de modèles de stratégie : ces cibles supposent un produit qui évolue pendant des années. Sur InfoCAC, il reste 8 sprints, aucune évolution n'est prévue après mars, et la suite vise dix scénarios au plus : un pourcentage serait soit trivial, soit intenable. On mesure donc la confiance. Smoke : critère d'entrée de chaque campagne dans la stratégie, il doit tourner à chaque déploiement, sinon il ne protège rien. Instabilité : un test qui échoue au hasard est ignoré, puis il masque une vraie régression ; le seuil de 2 % est une proposition, à durcir si la suite reste petite (un seul test instable sur dix suffit à le dépasser). Défauts trouvés : c'est le seul bénéfice réel (slide du ROI) ; si la suite ne trouve rien pendant plusieurs sprints, on le dit et on réoriente l'effort. Défauts échappés : une régression sur une règle couverte qui n'est vue qu'en recette métier signifie que le test ne vérifie pas ce qu'on croit. Temps de diagnostic et maintenance : mesurés pendant le pilote, ils remplacent les chiffres fictifs de l'exemple du ROI. Traçabilité : la recette sait ce qu'elle n'a plus à rejouer. Sources consultées pour la structure : modèles de stratégie Inflectra et TinyCTO, article de Julia Pottinger sur la stratégie d'automatisation à l'ère de l'IA ; les cibles sont adaptées à InfoCAC.</a:t>
             </a:r>
             <a:endParaRPr lang="en-US" dirty="0"/>
           </a:p>
@@ -736,6 +747,358 @@
             <a:fld id="{F7021451-1387-4CA6-816F-3879F97B5CBC}" type="slidenum">
               <a:rPr lang="en-US"/>
               <a:t>11</a:t>
+            </a:fld>
+            <a:endParaRPr lang="en-US"/>
+          </a:p>
+        </p:txBody>
+      </p:sp>
+    </p:spTree>
+    <p:extLst>
+      <p:ext uri="{BB962C8B-B14F-4D97-AF65-F5344CB8AC3E}">
+        <p14:creationId xmlns:p14="http://schemas.microsoft.com/office/powerpoint/2010/main" val="1024086991"/>
+      </p:ext>
+    </p:extLst>
+  </p:cSld>
+  <p:clrMapOvr>
+    <a:masterClrMapping/>
+  </p:clrMapOvr>
+</p:notes>
+</file>
+
+<file path=ppt/notesSlides/notesSlide12.xml><?xml version="1.0" encoding="utf-8"?>
+<p:notes xmlns:a="http://schemas.openxmlformats.org/drawingml/2006/main" xmlns:r="http://schemas.openxmlformats.org/officeDocument/2006/relationships" xmlns:p="http://schemas.openxmlformats.org/presentationml/2006/main">
+  <p:cSld>
+    <p:spTree>
+      <p:nvGrpSpPr>
+        <p:cNvPr id="1" name=""/>
+        <p:cNvGrpSpPr/>
+        <p:nvPr/>
+      </p:nvGrpSpPr>
+      <p:grpSpPr>
+        <a:xfrm>
+          <a:off x="0" y="0"/>
+          <a:ext cx="0" cy="0"/>
+          <a:chOff x="0" y="0"/>
+          <a:chExt cx="0" cy="0"/>
+        </a:xfrm>
+      </p:grpSpPr>
+      <p:sp>
+        <p:nvSpPr>
+          <p:cNvPr id="2" name="Slide Image Placeholder 1"/>
+          <p:cNvSpPr>
+            <a:spLocks noGrp="1" noRot="1" noChangeAspect="1"/>
+          </p:cNvSpPr>
+          <p:nvPr>
+            <p:ph type="sldImg"/>
+          </p:nvPr>
+        </p:nvSpPr>
+        <p:spPr/>
+      </p:sp>
+      <p:sp>
+        <p:nvSpPr>
+          <p:cNvPr id="3" name="Notes Placeholder 2"/>
+          <p:cNvSpPr>
+            <a:spLocks noGrp="1"/>
+          </p:cNvSpPr>
+          <p:nvPr>
+            <p:ph type="body" idx="1"/>
+          </p:nvPr>
+        </p:nvSpPr>
+        <p:spPr/>
+        <p:txBody>
+          <a:bodyPr/>
+          <a:lstStyle/>
+          <a:p>
+            <a:r>
+              <a:rPr lang="en-US" dirty="0"/>
+              <a:t>Calendrier aligné sur la roadmap review et développement présentée par le projet : 11 sprints (S1 du 07/09 à S11 qui se termine début février), test QC à chaque sprint à partir de S4, test métiers de S6 à S8 puis de S9 à S11. Côté développement : rôles et accès, création et liste des demandes, description du mandat en S1 à S3 ; formulaires mandat bleu en S4 à S6 ; gestion d'entité, multi-millésime et statut révision en S6 et S7 ; validation et flux, tableau de bord, documents en S7 et S8 ; formulaires mandat vert, import, export en S9 à S11. Principe : une fonctionnalité s'évalue pour l'automatisation au plus tôt un sprint après sa livraison, une fois passée en test QC, parce qu'avant elle bouge encore. À mi-octobre, aucun développement n'est encore livré en ITG : les dates des tests dépendent des premières livraisons. Conséquence à dire franchement : à la passation de fin décembre (fin S8), la suite sera encore courte ; d'où un propriétaire nommé, qui porte les barres grises, et des conventions écrites dans le dépôt.</a:t>
+            </a:r>
+            <a:endParaRPr lang="en-US" dirty="0"/>
+          </a:p>
+        </p:txBody>
+      </p:sp>
+      <p:sp>
+        <p:nvSpPr>
+          <p:cNvPr id="4" name="Slide Number Placeholder 3"/>
+          <p:cNvSpPr>
+            <a:spLocks noGrp="1"/>
+          </p:cNvSpPr>
+          <p:nvPr>
+            <p:ph type="sldNum" sz="quarter" idx="10"/>
+          </p:nvPr>
+        </p:nvSpPr>
+        <p:spPr/>
+        <p:txBody>
+          <a:bodyPr/>
+          <a:lstStyle/>
+          <a:p>
+            <a:fld id="{F7021451-1387-4CA6-816F-3879F97B5CBC}" type="slidenum">
+              <a:rPr lang="en-US"/>
+              <a:t>12</a:t>
+            </a:fld>
+            <a:endParaRPr lang="en-US"/>
+          </a:p>
+        </p:txBody>
+      </p:sp>
+    </p:spTree>
+    <p:extLst>
+      <p:ext uri="{BB962C8B-B14F-4D97-AF65-F5344CB8AC3E}">
+        <p14:creationId xmlns:p14="http://schemas.microsoft.com/office/powerpoint/2010/main" val="1024086991"/>
+      </p:ext>
+    </p:extLst>
+  </p:cSld>
+  <p:clrMapOvr>
+    <a:masterClrMapping/>
+  </p:clrMapOvr>
+</p:notes>
+</file>
+
+<file path=ppt/notesSlides/notesSlide13.xml><?xml version="1.0" encoding="utf-8"?>
+<p:notes xmlns:a="http://schemas.openxmlformats.org/drawingml/2006/main" xmlns:r="http://schemas.openxmlformats.org/officeDocument/2006/relationships" xmlns:p="http://schemas.openxmlformats.org/presentationml/2006/main">
+  <p:cSld>
+    <p:spTree>
+      <p:nvGrpSpPr>
+        <p:cNvPr id="1" name=""/>
+        <p:cNvGrpSpPr/>
+        <p:nvPr/>
+      </p:nvGrpSpPr>
+      <p:grpSpPr>
+        <a:xfrm>
+          <a:off x="0" y="0"/>
+          <a:ext cx="0" cy="0"/>
+          <a:chOff x="0" y="0"/>
+          <a:chExt cx="0" cy="0"/>
+        </a:xfrm>
+      </p:grpSpPr>
+      <p:sp>
+        <p:nvSpPr>
+          <p:cNvPr id="2" name="Slide Image Placeholder 1"/>
+          <p:cNvSpPr>
+            <a:spLocks noGrp="1" noRot="1" noChangeAspect="1"/>
+          </p:cNvSpPr>
+          <p:nvPr>
+            <p:ph type="sldImg"/>
+          </p:nvPr>
+        </p:nvSpPr>
+        <p:spPr/>
+      </p:sp>
+      <p:sp>
+        <p:nvSpPr>
+          <p:cNvPr id="3" name="Notes Placeholder 2"/>
+          <p:cNvSpPr>
+            <a:spLocks noGrp="1"/>
+          </p:cNvSpPr>
+          <p:nvPr>
+            <p:ph type="body" idx="1"/>
+          </p:nvPr>
+        </p:nvSpPr>
+        <p:spPr/>
+        <p:txBody>
+          <a:bodyPr/>
+          <a:lstStyle/>
+          <a:p>
+            <a:r>
+              <a:rPr lang="en-US" dirty="0"/>
+              <a:t>Structure reprise de la stratégie de test produit que j'ai produite sur une mission précédente, adaptée aux outils d'InfoCAC : Azure DevOps et Test Plans à la place de Jira et Xray, tests API Playwright à la place de collections Postman. Ces activités complètent la stratégie validée, elles ne la remplacent pas. À nommer : qui suit et approuve chaque tâche.</a:t>
+            </a:r>
+            <a:endParaRPr lang="en-US" dirty="0"/>
+          </a:p>
+        </p:txBody>
+      </p:sp>
+      <p:sp>
+        <p:nvSpPr>
+          <p:cNvPr id="4" name="Slide Number Placeholder 3"/>
+          <p:cNvSpPr>
+            <a:spLocks noGrp="1"/>
+          </p:cNvSpPr>
+          <p:nvPr>
+            <p:ph type="sldNum" sz="quarter" idx="10"/>
+          </p:nvPr>
+        </p:nvSpPr>
+        <p:spPr/>
+        <p:txBody>
+          <a:bodyPr/>
+          <a:lstStyle/>
+          <a:p>
+            <a:fld id="{F7021451-1387-4CA6-816F-3879F97B5CBC}" type="slidenum">
+              <a:rPr lang="en-US"/>
+              <a:t>13</a:t>
+            </a:fld>
+            <a:endParaRPr lang="en-US"/>
+          </a:p>
+        </p:txBody>
+      </p:sp>
+    </p:spTree>
+    <p:extLst>
+      <p:ext uri="{BB962C8B-B14F-4D97-AF65-F5344CB8AC3E}">
+        <p14:creationId xmlns:p14="http://schemas.microsoft.com/office/powerpoint/2010/main" val="1024086991"/>
+      </p:ext>
+    </p:extLst>
+  </p:cSld>
+  <p:clrMapOvr>
+    <a:masterClrMapping/>
+  </p:clrMapOvr>
+</p:notes>
+</file>
+
+<file path=ppt/notesSlides/notesSlide14.xml><?xml version="1.0" encoding="utf-8"?>
+<p:notes xmlns:a="http://schemas.openxmlformats.org/drawingml/2006/main" xmlns:r="http://schemas.openxmlformats.org/officeDocument/2006/relationships" xmlns:p="http://schemas.openxmlformats.org/presentationml/2006/main">
+  <p:cSld>
+    <p:spTree>
+      <p:nvGrpSpPr>
+        <p:cNvPr id="1" name=""/>
+        <p:cNvGrpSpPr/>
+        <p:nvPr/>
+      </p:nvGrpSpPr>
+      <p:grpSpPr>
+        <a:xfrm>
+          <a:off x="0" y="0"/>
+          <a:ext cx="0" cy="0"/>
+          <a:chOff x="0" y="0"/>
+          <a:chExt cx="0" cy="0"/>
+        </a:xfrm>
+      </p:grpSpPr>
+      <p:sp>
+        <p:nvSpPr>
+          <p:cNvPr id="2" name="Slide Image Placeholder 1"/>
+          <p:cNvSpPr>
+            <a:spLocks noGrp="1" noRot="1" noChangeAspect="1"/>
+          </p:cNvSpPr>
+          <p:nvPr>
+            <p:ph type="sldImg"/>
+          </p:nvPr>
+        </p:nvSpPr>
+        <p:spPr/>
+      </p:sp>
+      <p:sp>
+        <p:nvSpPr>
+          <p:cNvPr id="3" name="Notes Placeholder 2"/>
+          <p:cNvSpPr>
+            <a:spLocks noGrp="1"/>
+          </p:cNvSpPr>
+          <p:nvPr>
+            <p:ph type="body" idx="1"/>
+          </p:nvPr>
+        </p:nvSpPr>
+        <p:spPr/>
+        <p:txBody>
+          <a:bodyPr/>
+          <a:lstStyle/>
+          <a:p>
+            <a:r>
+              <a:rPr lang="en-US" dirty="0"/>
+              <a:t>Liste des types non fonctionnels et des critères de suspension reprise de ma stratégie de test produit précédente, adaptée à InfoCAC à partir de la stratégie validée (intrusion en PREPROD, performance non retenue, seuils Sonar). Compatibilité et accessibilité restent à confirmer. La fiabilité est le seul type non fonctionnel qui se prête bien à l'automatisation : Playwright peut simuler une API qui ne répond pas et vérifier le comportement de l'écran.</a:t>
+            </a:r>
+            <a:endParaRPr lang="en-US" dirty="0"/>
+          </a:p>
+        </p:txBody>
+      </p:sp>
+      <p:sp>
+        <p:nvSpPr>
+          <p:cNvPr id="4" name="Slide Number Placeholder 3"/>
+          <p:cNvSpPr>
+            <a:spLocks noGrp="1"/>
+          </p:cNvSpPr>
+          <p:nvPr>
+            <p:ph type="sldNum" sz="quarter" idx="10"/>
+          </p:nvPr>
+        </p:nvSpPr>
+        <p:spPr/>
+        <p:txBody>
+          <a:bodyPr/>
+          <a:lstStyle/>
+          <a:p>
+            <a:fld id="{F7021451-1387-4CA6-816F-3879F97B5CBC}" type="slidenum">
+              <a:rPr lang="en-US"/>
+              <a:t>14</a:t>
+            </a:fld>
+            <a:endParaRPr lang="en-US"/>
+          </a:p>
+        </p:txBody>
+      </p:sp>
+    </p:spTree>
+    <p:extLst>
+      <p:ext uri="{BB962C8B-B14F-4D97-AF65-F5344CB8AC3E}">
+        <p14:creationId xmlns:p14="http://schemas.microsoft.com/office/powerpoint/2010/main" val="1024086991"/>
+      </p:ext>
+    </p:extLst>
+  </p:cSld>
+  <p:clrMapOvr>
+    <a:masterClrMapping/>
+  </p:clrMapOvr>
+</p:notes>
+</file>
+
+<file path=ppt/notesSlides/notesSlide15.xml><?xml version="1.0" encoding="utf-8"?>
+<p:notes xmlns:a="http://schemas.openxmlformats.org/drawingml/2006/main" xmlns:r="http://schemas.openxmlformats.org/officeDocument/2006/relationships" xmlns:p="http://schemas.openxmlformats.org/presentationml/2006/main">
+  <p:cSld>
+    <p:spTree>
+      <p:nvGrpSpPr>
+        <p:cNvPr id="1" name=""/>
+        <p:cNvGrpSpPr/>
+        <p:nvPr/>
+      </p:nvGrpSpPr>
+      <p:grpSpPr>
+        <a:xfrm>
+          <a:off x="0" y="0"/>
+          <a:ext cx="0" cy="0"/>
+          <a:chOff x="0" y="0"/>
+          <a:chExt cx="0" cy="0"/>
+        </a:xfrm>
+      </p:grpSpPr>
+      <p:sp>
+        <p:nvSpPr>
+          <p:cNvPr id="2" name="Slide Image Placeholder 1"/>
+          <p:cNvSpPr>
+            <a:spLocks noGrp="1" noRot="1" noChangeAspect="1"/>
+          </p:cNvSpPr>
+          <p:nvPr>
+            <p:ph type="sldImg"/>
+          </p:nvPr>
+        </p:nvSpPr>
+        <p:spPr/>
+      </p:sp>
+      <p:sp>
+        <p:nvSpPr>
+          <p:cNvPr id="3" name="Notes Placeholder 2"/>
+          <p:cNvSpPr>
+            <a:spLocks noGrp="1"/>
+          </p:cNvSpPr>
+          <p:nvPr>
+            <p:ph type="body" idx="1"/>
+          </p:nvPr>
+        </p:nvSpPr>
+        <p:spPr/>
+        <p:txBody>
+          <a:bodyPr/>
+          <a:lstStyle/>
+          <a:p>
+            <a:r>
+              <a:rPr lang="en-US" dirty="0"/>
+              <a:t>Pourquoi cette annexe : la slide des dix scénarios dit ce qu'on automatise ; elle ne dit pas ce que la recette rejoue à la main dans Test Plans à chaque livraison. Sans règle, on rejoue tout (trop long) ou au hasard (risqué). La règle : un socle rejoué à chaque livraison, puis des lots rejoués seulement si leur module a changé. Les lots suivent les zones du périmètre de la stratégie validée ; les exemples sont à confirmer US par US. Mise en œuvre dans Test Plans : un tag par lot (par exemple Regression-Socle, Regression-Statuts), une requête par tag, et la campagne de la livraison assemble le socle et les lots concernés. Le marquage « automatisé » évite de rejouer à la main ce que la suite couvre déjà. Structure inspirée d'un guide public de sélection de la régression (dépôt qa-test-strategy-samples), adaptée à InfoCAC.</a:t>
+            </a:r>
+            <a:endParaRPr lang="en-US" dirty="0"/>
+          </a:p>
+        </p:txBody>
+      </p:sp>
+      <p:sp>
+        <p:nvSpPr>
+          <p:cNvPr id="4" name="Slide Number Placeholder 3"/>
+          <p:cNvSpPr>
+            <a:spLocks noGrp="1"/>
+          </p:cNvSpPr>
+          <p:nvPr>
+            <p:ph type="sldNum" sz="quarter" idx="10"/>
+          </p:nvPr>
+        </p:nvSpPr>
+        <p:spPr/>
+        <p:txBody>
+          <a:bodyPr/>
+          <a:lstStyle/>
+          <a:p>
+            <a:fld id="{F7021451-1387-4CA6-816F-3879F97B5CBC}" type="slidenum">
+              <a:rPr lang="en-US"/>
+              <a:t>15</a:t>
             </a:fld>
             <a:endParaRPr lang="en-US"/>
           </a:p>
@@ -976,7 +1339,7 @@
           <a:p>
             <a:r>
               <a:rPr lang="en-US" dirty="0"/>
-              <a:t>Exemple aux chiffres fictifs, pour montrer le mécanisme (à remplacer par les mesures du pilote). Un scénario API sur une règle de statut : écriture 6 h, maintenance 1 h par sprint tant que l'US bouge, soit 8 h sur les 8 sprints restants (S4 à S11), total 14 h. Temps manuel évité : 20 min par passe de non-régression, une passe par sprint, soit environ 2,7 h. En temps seul, le test coûte bien plus qu'il ne rapporte. Les exécutions de nuit ne comptent pas comme gain de temps : on ne compte que les passes qu'on aurait faites à la main de toute façon. Ce qui peut rembourser le test : trouver une régression le lendemain au lieu de la fin du sprint ou de la recette métier, sur une règle coûteuse à rater. Une suite sans propriétaire après le 31/12 n'est plus exécutée ni maintenue : son ROI tombe à zéro.</a:t>
+              <a:t>Message à faire passer : sur InfoCAC, l'automatisation n'est pas un gain de productivité, c'est une assurance ciblée contre les régressions critiques, rien de plus pour l'instant. La frise montre pourquoi : la même régression coûte de plus en plus cher selon qu'on la voit le lendemain, en fin de sprint ou pendant le test métiers (S6 à S8 puis S9 à S11 dans la roadmap projet). Exemple aux chiffres fictifs, pour montrer le mécanisme (à remplacer par les mesures du pilote). Un scénario API sur une règle de statut : écriture 6 h, maintenance 1 h par sprint tant que l'US bouge, soit 8 h sur les 8 sprints restants (S4 à S11), total 14 h. Temps manuel évité : 20 min par passe de non-régression, une passe par sprint, soit environ 2,7 h. En temps seul, le test coûte bien plus qu'il ne rapporte. Les exécutions de nuit ne comptent pas comme gain de temps : on ne compte que les passes qu'on aurait faites à la main de toute façon. Ce qui peut rembourser le test : trouver une régression le lendemain au lieu de la fin du sprint ou de la recette métier, sur une règle coûteuse à rater. Une suite sans propriétaire après le 31/12 n'est plus exécutée ni maintenue : son ROI tombe à zéro.</a:t>
             </a:r>
             <a:endParaRPr lang="en-US" dirty="0"/>
           </a:p>
@@ -1416,7 +1779,7 @@
           <a:p>
             <a:r>
               <a:rPr lang="en-US" dirty="0"/>
-              <a:t>Agent QC : son Gherkin produisait des cas même quand l'US était ambiguë. Correction : la porte de rédaction calculée par script, puis une couverture obligatoire (nominal, négatif, valeurs limites, cas aux bords) avec les techniques ISTQB, vérifiée par un script ; l'agent écrit les cas, il ne les propose pas. L'agent ne crée jamais de plan de test par US : la création de plan lui est interdite par sa configuration, les cas vont dans la suite indiquée. Agent anomalies, repris du module Bug Analysis de Kalisto (qualité du ticket reçu, rédaction sans invention avec « à préciser par le rapporteur », triage avec causes probables et périmètre de non-régression) et adapté à InfoCAC : la QC lui donne la capture d'écran, le cas de test en échec et le modèle de fiche ; il rédige la fiche (étapes, attendu, obtenu, reproductibilité), propose la sévérité selon les quatre niveaux de la stratégie et une priorité selon la portée, puis un script contrôle la fiche (champs obligatoires, priorité recalculée, données personnelles). Le script lint_anomalie rend un verdict calculé (publiable, à compléter, à corriger), la complétude, la reproductibilité et la priorité issue de la matrice portée x sévérité ; l'échelle de sévérité est celle du projet. Après accord de la QC, il crée le bug dans Azure DevOps, joint la capture et le lie à l'US et au cas de test. À fournir : le modèle de fiche KPMG et la convention de liens. Une capture peut contenir des données de CAC : uniquement dans l'outil autorisé par KPMG. Agent Playwright : ce n'est pas une IA de plus, c'est Claude Code équipé couche par couche. Couche 1, voir : le serveur Playwright MCP donne un vrai navigateur, l'agent explore avant d'écrire au lieu de deviner les locators. Couche 2, ranger : Page Objects pour l'UI, clients API typés pour l'API, un locator ne vit qu'à un endroit. Couche 3, règles : un CLAUDE.md court toujours chargé, et des règles par dossier (garde-fous d'environnement, conventions Page Objects, données de test) chargées seulement quand l'agent touche ces fichiers. Couche 4, forcer : les hooks transforment une règle écrite en vérification automatique (blocage de test.skip et de waitForTimeout, lint et typage avant commit). Couche 5, tracer : chaque test relié à son cas Test Plans. Les agents planner, generator et healer de Playwright s'appuient sur la même base ; le triage des échecs et l'audit des locators reprennent les méthodes de mes projets Kalisto Autopsy et Kalisto Preflight, sans y faire passer de donnée KPMG. Le healer est lancé à la demande sur le poste, chaque réparation relue en pull request. Agent data testing : proposition, voir la slide suivante ; il interroge la base en lecture seule. Conditions du POC : ITG joignable, comptes de test par rôle, accord KPMG sur l'outil d'agents.</a:t>
+              <a:t>« L'humain valide » devient vérifiable : la liste du bas dit ce qu'aucun agent ne décide seul. Ce sont des décisions coûteuses et difficiles à voir après coup : un test accepté sans relecture, une CI modifiée, un échec ignoré, un test supprimé pour obtenir un pipeline vert. L'IA accélère le reste : premier jet des cas et des tests, résumé d'un échec, suggestion de cas limites. Casser la règle exprès : un test généré peut passer au vert sans rien vérifier (assertion sur la présence d'un élément au lieu de sa valeur, attendu recopié depuis l'écran). Avant de l'accepter, on modifie volontairement l'attendu ou la donnée, on relance, et le test doit échouer avec un message qui désigne la règle. Les deux exécutions sont jointes à la pull request. Agent QC : son Gherkin produisait des cas même quand l'US était ambiguë. Correction : la porte de rédaction calculée par script, puis une couverture obligatoire (nominal, négatif, valeurs limites, cas aux bords) avec les techniques ISTQB, vérifiée par un script ; l'agent écrit les cas, il ne les propose pas. L'agent ne crée jamais de plan de test par US : la création de plan lui est interdite par sa configuration, les cas vont dans la suite indiquée. Agent anomalies, repris du module Bug Analysis de Kalisto (qualité du ticket reçu, rédaction sans invention avec « à préciser par le rapporteur », triage avec causes probables et périmètre de non-régression) et adapté à InfoCAC : la QC lui donne la capture d'écran, le cas de test en échec et le modèle de fiche ; il rédige la fiche (étapes, attendu, obtenu, reproductibilité), propose la sévérité selon les quatre niveaux de la stratégie et une priorité selon la portée, puis un script contrôle la fiche (champs obligatoires, priorité recalculée, données personnelles). Le script lint_anomalie rend un verdict calculé (publiable, à compléter, à corriger), la complétude, la reproductibilité et la priorité issue de la matrice portée x sévérité ; l'échelle de sévérité est celle du projet. Après accord de la QC, il crée le bug dans Azure DevOps, joint la capture et le lie à l'US et au cas de test. À fournir : le modèle de fiche KPMG et la convention de liens. Une capture peut contenir des données de CAC : uniquement dans l'outil autorisé par KPMG. Agent Playwright : ce n'est pas une IA de plus, c'est Claude Code équipé couche par couche. Couche 1, voir : le serveur Playwright MCP donne un vrai navigateur, l'agent explore avant d'écrire au lieu de deviner les locators. Couche 2, ranger : Page Objects pour l'UI, clients API typés pour l'API, un locator ne vit qu'à un endroit. Couche 3, règles : un CLAUDE.md court toujours chargé, et des règles par dossier (garde-fous d'environnement, conventions Page Objects, données de test) chargées seulement quand l'agent touche ces fichiers. Couche 4, forcer : les hooks transforment une règle écrite en vérification automatique (blocage de test.skip et de waitForTimeout, lint et typage avant commit). Couche 5, tracer : chaque test relié à son cas Test Plans. Les agents planner, generator et healer de Playwright s'appuient sur la même base ; le triage des échecs et l'audit des locators reprennent les méthodes de mes projets Kalisto Autopsy et Kalisto Preflight, sans y faire passer de donnée KPMG. Le healer est lancé à la demande sur le poste, chaque réparation relue en pull request. Agent data testing : proposition, voir la slide suivante ; il interroge la base en lecture seule. Conditions du POC : ITG joignable, comptes de test par rôle, accord KPMG sur l'outil d'agents.</a:t>
             </a:r>
             <a:endParaRPr lang="en-US" dirty="0"/>
           </a:p>
@@ -3752,6 +4115,1874 @@
                   <a:schemeClr val="tx2"/>
                 </a:solidFill>
               </a:rPr>
+              <a:t>Objectifs et indicateurs : compter la confiance, pas les tests</a:t>
+            </a:r>
+            <a:endParaRPr lang="en-US" sz="2800" dirty="0"/>
+          </a:p>
+        </p:txBody>
+      </p:sp>
+      <p:sp>
+        <p:nvSpPr>
+          <p:cNvPr id="3" name="Text 0"/>
+          <p:cNvSpPr/>
+          <p:nvPr>
+            <p:ph idx="101" type="body" hasCustomPrompt="1"/>
+          </p:nvPr>
+        </p:nvSpPr>
+        <p:spPr>
+          <a:xfrm>
+            <a:off x="548640" y="960120"/>
+            <a:ext cx="11064240" cy="502920"/>
+          </a:xfrm>
+          <a:prstGeom prst="rect">
+            <a:avLst/>
+          </a:prstGeom>
+          <a:noFill/>
+          <a:ln/>
+        </p:spPr>
+        <p:txBody>
+          <a:bodyPr wrap="square" lIns="0" tIns="0" rIns="0" bIns="0" rtlCol="0" anchor="t"/>
+          <a:lstStyle/>
+          <a:p>
+            <a:pPr algn="l" indent="0" marL="0">
+              <a:buNone/>
+            </a:pPr>
+            <a:r>
+              <a:rPr lang="en-US" sz="1600" i="1" dirty="0">
+                <a:solidFill>
+                  <a:schemeClr val="accent1"/>
+                </a:solidFill>
+              </a:rPr>
+              <a:t>Aucune cible en nombre de tests ou en pourcentage automatisé : on mesure ce que la suite protège et ce qu'elle coûte.</a:t>
+            </a:r>
+            <a:endParaRPr lang="en-US" sz="1600" dirty="0"/>
+          </a:p>
+        </p:txBody>
+      </p:sp>
+      <p:sp>
+        <p:nvSpPr>
+          <p:cNvPr id="4" name="card"/>
+          <p:cNvSpPr/>
+          <p:nvPr/>
+        </p:nvSpPr>
+        <p:spPr>
+          <a:xfrm>
+            <a:off x="548640" y="1645920"/>
+            <a:ext cx="3291840" cy="4206240"/>
+          </a:xfrm>
+          <a:prstGeom prst="roundRect">
+            <a:avLst>
+              <a:gd name="adj" fmla="val 2778"/>
+            </a:avLst>
+          </a:prstGeom>
+          <a:solidFill>
+            <a:schemeClr val="tx2"/>
+          </a:solidFill>
+          <a:ln/>
+        </p:spPr>
+      </p:sp>
+      <p:sp>
+        <p:nvSpPr>
+          <p:cNvPr id="5" name="Text 3"/>
+          <p:cNvSpPr txBox="1"/>
+          <p:nvPr/>
+        </p:nvSpPr>
+        <p:spPr>
+          <a:xfrm>
+            <a:off x="777240" y="1783080"/>
+            <a:ext cx="2834640" cy="365760"/>
+          </a:xfrm>
+          <a:prstGeom prst="rect">
+            <a:avLst/>
+          </a:prstGeom>
+          <a:noFill/>
+          <a:ln/>
+        </p:spPr>
+        <p:txBody>
+          <a:bodyPr wrap="square" lIns="0" tIns="0" rIns="0" bIns="0" rtlCol="0" anchor="t"/>
+          <a:lstStyle/>
+          <a:p>
+            <a:pPr indent="0" marL="0">
+              <a:buNone/>
+            </a:pPr>
+            <a:r>
+              <a:rPr lang="en-US" sz="1600" b="1" dirty="0">
+                <a:solidFill>
+                  <a:schemeClr val="bg1"/>
+                </a:solidFill>
+              </a:rPr>
+              <a:t>L'objectif</a:t>
+            </a:r>
+            <a:endParaRPr lang="en-US" sz="1600" dirty="0"/>
+          </a:p>
+        </p:txBody>
+      </p:sp>
+      <p:sp>
+        <p:nvSpPr>
+          <p:cNvPr id="6" name="Text 4"/>
+          <p:cNvSpPr txBox="1"/>
+          <p:nvPr/>
+        </p:nvSpPr>
+        <p:spPr>
+          <a:xfrm>
+            <a:off x="777240" y="2240280"/>
+            <a:ext cx="2880360" cy="1737360"/>
+          </a:xfrm>
+          <a:prstGeom prst="rect">
+            <a:avLst/>
+          </a:prstGeom>
+          <a:noFill/>
+          <a:ln/>
+        </p:spPr>
+        <p:txBody>
+          <a:bodyPr wrap="square" lIns="0" tIns="0" rIns="0" bIns="0" rtlCol="0" anchor="t"/>
+          <a:lstStyle/>
+          <a:p>
+            <a:pPr indent="0" marL="0">
+              <a:buNone/>
+            </a:pPr>
+            <a:r>
+              <a:rPr lang="en-US" sz="1600" dirty="0">
+                <a:solidFill>
+                  <a:schemeClr val="bg1"/>
+                </a:solidFill>
+              </a:rPr>
+              <a:t>Une régression sur les droits, les statuts ou les formulaires est vue le lendemain de la livraison, pas en recette métier.</a:t>
+            </a:r>
+            <a:endParaRPr lang="en-US" sz="1600" dirty="0"/>
+          </a:p>
+        </p:txBody>
+      </p:sp>
+      <p:sp>
+        <p:nvSpPr>
+          <p:cNvPr id="7" name="separateur"/>
+          <p:cNvSpPr/>
+          <p:nvPr/>
+        </p:nvSpPr>
+        <p:spPr>
+          <a:xfrm>
+            <a:off x="777240" y="4114800"/>
+            <a:ext cx="2834640" cy="0"/>
+          </a:xfrm>
+          <a:prstGeom prst="line">
+            <a:avLst/>
+          </a:prstGeom>
+          <a:noFill/>
+          <a:ln w="9525">
+            <a:solidFill>
+              <a:srgbClr val="B8D4F0"/>
+            </a:solidFill>
+            <a:prstDash val="solid"/>
+          </a:ln>
+        </p:spPr>
+      </p:sp>
+      <p:sp>
+        <p:nvSpPr>
+          <p:cNvPr id="8" name="Text 6"/>
+          <p:cNvSpPr txBox="1"/>
+          <p:nvPr/>
+        </p:nvSpPr>
+        <p:spPr>
+          <a:xfrm>
+            <a:off x="777240" y="4297680"/>
+            <a:ext cx="2880360" cy="1280160"/>
+          </a:xfrm>
+          <a:prstGeom prst="rect">
+            <a:avLst/>
+          </a:prstGeom>
+          <a:noFill/>
+          <a:ln/>
+        </p:spPr>
+        <p:txBody>
+          <a:bodyPr wrap="square" lIns="0" tIns="0" rIns="0" bIns="0" rtlCol="0" anchor="t"/>
+          <a:lstStyle/>
+          <a:p>
+            <a:pPr indent="0" marL="0">
+              <a:buNone/>
+            </a:pPr>
+            <a:r>
+              <a:rPr lang="en-US" sz="1350" dirty="0">
+                <a:solidFill>
+                  <a:schemeClr val="accent3"/>
+                </a:solidFill>
+              </a:rPr>
+              <a:t>Pour un coût de maintenance mesuré, et une suite qu'un propriétaire nommé peut reprendre après le 31/12.</a:t>
+            </a:r>
+            <a:endParaRPr lang="en-US" sz="1350" dirty="0"/>
+          </a:p>
+        </p:txBody>
+      </p:sp>
+      <p:graphicFrame>
+        <p:nvGraphicFramePr>
+          <p:cNvPr id="12" name="table-indicateurs"/>
+          <p:cNvGraphicFramePr>
+            <a:graphicFrameLocks noGrp="1"/>
+          </p:cNvGraphicFramePr>
+          <p:nvPr>
+            <p:extLst>
+              <p:ext uri="{D42A27DB-BD31-4B8C-83A1-F6EECF244321}">
+                <p14:modId xmlns:p14="http://schemas.microsoft.com/office/powerpoint/2010/main" val="1579011935"/>
+              </p:ext>
+            </p:extLst>
+          </p:nvPr>
+        </p:nvGraphicFramePr>
+        <p:xfrm>
+          <a:off x="4069080" y="1645920"/>
+          <a:ext cx="7543800" cy="914400"/>
+        </p:xfrm>
+        <a:graphic>
+          <a:graphicData uri="http://schemas.openxmlformats.org/drawingml/2006/table">
+            <a:tbl>
+              <a:tblPr/>
+              <a:tblGrid>
+                <a:gridCol w="2148840"/>
+                <a:gridCol w="3931920"/>
+                <a:gridCol w="1463040"/>
+              </a:tblGrid>
+              <a:tr h="475488">
+                <a:tc>
+                  <a:txBody>
+                    <a:bodyPr/>
+                    <a:lstStyle/>
+                    <a:p>
+                      <a:pPr indent="0" marL="0">
+                        <a:buNone/>
+                      </a:pPr>
+                      <a:r>
+                        <a:rPr lang="en-US" sz="1200" b="1" dirty="0">
+                          <a:solidFill>
+                            <a:srgbClr val="FFFFFF"/>
+                          </a:solidFill>
+                        </a:rPr>
+                        <a:t>Indicateur</a:t>
+                      </a:r>
+                      <a:endParaRPr lang="en-US" sz="1200" dirty="0"/>
+                    </a:p>
+                  </a:txBody>
+                  <a:tcPr marL="73152" marR="73152" marT="36576" marB="36576" anchor="ctr">
+                    <a:lnL w="6350" cap="flat" cmpd="sng" algn="ctr">
+                      <a:solidFill>
+                        <a:srgbClr val="B8D4F0"/>
+                      </a:solidFill>
+                      <a:prstDash val="solid"/>
+                      <a:round/>
+                      <a:headEnd type="none" w="med" len="med"/>
+                      <a:tailEnd type="none" w="med" len="med"/>
+                    </a:lnL>
+                    <a:lnR w="6350" cap="flat" cmpd="sng" algn="ctr">
+                      <a:solidFill>
+                        <a:srgbClr val="B8D4F0"/>
+                      </a:solidFill>
+                      <a:prstDash val="solid"/>
+                      <a:round/>
+                      <a:headEnd type="none" w="med" len="med"/>
+                      <a:tailEnd type="none" w="med" len="med"/>
+                    </a:lnR>
+                    <a:lnT w="6350" cap="flat" cmpd="sng" algn="ctr">
+                      <a:solidFill>
+                        <a:srgbClr val="B8D4F0"/>
+                      </a:solidFill>
+                      <a:prstDash val="solid"/>
+                      <a:round/>
+                      <a:headEnd type="none" w="med" len="med"/>
+                      <a:tailEnd type="none" w="med" len="med"/>
+                    </a:lnT>
+                    <a:lnB w="6350" cap="flat" cmpd="sng" algn="ctr">
+                      <a:solidFill>
+                        <a:srgbClr val="B8D4F0"/>
+                      </a:solidFill>
+                      <a:prstDash val="solid"/>
+                      <a:round/>
+                      <a:headEnd type="none" w="med" len="med"/>
+                      <a:tailEnd type="none" w="med" len="med"/>
+                    </a:lnB>
+                    <a:solidFill>
+                      <a:srgbClr val="00338D"/>
+                    </a:solidFill>
+                  </a:tcPr>
+                </a:tc>
+                <a:tc>
+                  <a:txBody>
+                    <a:bodyPr/>
+                    <a:lstStyle/>
+                    <a:p>
+                      <a:pPr indent="0" marL="0">
+                        <a:buNone/>
+                      </a:pPr>
+                      <a:r>
+                        <a:rPr lang="en-US" sz="1200" b="1" dirty="0">
+                          <a:solidFill>
+                            <a:srgbClr val="FFFFFF"/>
+                          </a:solidFill>
+                        </a:rPr>
+                        <a:t>Cible proposée</a:t>
+                      </a:r>
+                      <a:endParaRPr lang="en-US" sz="1200" dirty="0"/>
+                    </a:p>
+                  </a:txBody>
+                  <a:tcPr marL="73152" marR="73152" marT="36576" marB="36576" anchor="ctr">
+                    <a:lnL w="6350" cap="flat" cmpd="sng" algn="ctr">
+                      <a:solidFill>
+                        <a:srgbClr val="B8D4F0"/>
+                      </a:solidFill>
+                      <a:prstDash val="solid"/>
+                      <a:round/>
+                      <a:headEnd type="none" w="med" len="med"/>
+                      <a:tailEnd type="none" w="med" len="med"/>
+                    </a:lnL>
+                    <a:lnR w="6350" cap="flat" cmpd="sng" algn="ctr">
+                      <a:solidFill>
+                        <a:srgbClr val="B8D4F0"/>
+                      </a:solidFill>
+                      <a:prstDash val="solid"/>
+                      <a:round/>
+                      <a:headEnd type="none" w="med" len="med"/>
+                      <a:tailEnd type="none" w="med" len="med"/>
+                    </a:lnR>
+                    <a:lnT w="6350" cap="flat" cmpd="sng" algn="ctr">
+                      <a:solidFill>
+                        <a:srgbClr val="B8D4F0"/>
+                      </a:solidFill>
+                      <a:prstDash val="solid"/>
+                      <a:round/>
+                      <a:headEnd type="none" w="med" len="med"/>
+                      <a:tailEnd type="none" w="med" len="med"/>
+                    </a:lnT>
+                    <a:lnB w="6350" cap="flat" cmpd="sng" algn="ctr">
+                      <a:solidFill>
+                        <a:srgbClr val="B8D4F0"/>
+                      </a:solidFill>
+                      <a:prstDash val="solid"/>
+                      <a:round/>
+                      <a:headEnd type="none" w="med" len="med"/>
+                      <a:tailEnd type="none" w="med" len="med"/>
+                    </a:lnB>
+                    <a:solidFill>
+                      <a:srgbClr val="00338D"/>
+                    </a:solidFill>
+                  </a:tcPr>
+                </a:tc>
+                <a:tc>
+                  <a:txBody>
+                    <a:bodyPr/>
+                    <a:lstStyle/>
+                    <a:p>
+                      <a:pPr indent="0" marL="0">
+                        <a:buNone/>
+                      </a:pPr>
+                      <a:r>
+                        <a:rPr lang="en-US" sz="1200" b="1" dirty="0">
+                          <a:solidFill>
+                            <a:srgbClr val="FFFFFF"/>
+                          </a:solidFill>
+                        </a:rPr>
+                        <a:t>Où on le lit</a:t>
+                      </a:r>
+                      <a:endParaRPr lang="en-US" sz="1200" dirty="0"/>
+                    </a:p>
+                  </a:txBody>
+                  <a:tcPr marL="73152" marR="73152" marT="36576" marB="36576" anchor="ctr">
+                    <a:lnL w="6350" cap="flat" cmpd="sng" algn="ctr">
+                      <a:solidFill>
+                        <a:srgbClr val="B8D4F0"/>
+                      </a:solidFill>
+                      <a:prstDash val="solid"/>
+                      <a:round/>
+                      <a:headEnd type="none" w="med" len="med"/>
+                      <a:tailEnd type="none" w="med" len="med"/>
+                    </a:lnL>
+                    <a:lnR w="6350" cap="flat" cmpd="sng" algn="ctr">
+                      <a:solidFill>
+                        <a:srgbClr val="B8D4F0"/>
+                      </a:solidFill>
+                      <a:prstDash val="solid"/>
+                      <a:round/>
+                      <a:headEnd type="none" w="med" len="med"/>
+                      <a:tailEnd type="none" w="med" len="med"/>
+                    </a:lnR>
+                    <a:lnT w="6350" cap="flat" cmpd="sng" algn="ctr">
+                      <a:solidFill>
+                        <a:srgbClr val="B8D4F0"/>
+                      </a:solidFill>
+                      <a:prstDash val="solid"/>
+                      <a:round/>
+                      <a:headEnd type="none" w="med" len="med"/>
+                      <a:tailEnd type="none" w="med" len="med"/>
+                    </a:lnT>
+                    <a:lnB w="6350" cap="flat" cmpd="sng" algn="ctr">
+                      <a:solidFill>
+                        <a:srgbClr val="B8D4F0"/>
+                      </a:solidFill>
+                      <a:prstDash val="solid"/>
+                      <a:round/>
+                      <a:headEnd type="none" w="med" len="med"/>
+                      <a:tailEnd type="none" w="med" len="med"/>
+                    </a:lnB>
+                    <a:solidFill>
+                      <a:srgbClr val="00338D"/>
+                    </a:solidFill>
+                  </a:tcPr>
+                </a:tc>
+              </a:tr>
+              <a:tr h="475488">
+                <a:tc>
+                  <a:txBody>
+                    <a:bodyPr/>
+                    <a:lstStyle/>
+                    <a:p>
+                      <a:pPr indent="0" marL="0">
+                        <a:buNone/>
+                      </a:pPr>
+                      <a:r>
+                        <a:rPr lang="en-US" sz="1150" b="1" dirty="0">
+                          <a:solidFill>
+                            <a:srgbClr val="1A1A2E"/>
+                          </a:solidFill>
+                        </a:rPr>
+                        <a:t>Smoke à chaque déploiement</a:t>
+                      </a:r>
+                      <a:endParaRPr lang="en-US" sz="1150" dirty="0"/>
+                    </a:p>
+                  </a:txBody>
+                  <a:tcPr marL="73152" marR="73152" marT="36576" marB="36576" anchor="ctr">
+                    <a:lnL w="6350" cap="flat" cmpd="sng" algn="ctr">
+                      <a:solidFill>
+                        <a:srgbClr val="B8D4F0"/>
+                      </a:solidFill>
+                      <a:prstDash val="solid"/>
+                      <a:round/>
+                      <a:headEnd type="none" w="med" len="med"/>
+                      <a:tailEnd type="none" w="med" len="med"/>
+                    </a:lnL>
+                    <a:lnR w="6350" cap="flat" cmpd="sng" algn="ctr">
+                      <a:solidFill>
+                        <a:srgbClr val="B8D4F0"/>
+                      </a:solidFill>
+                      <a:prstDash val="solid"/>
+                      <a:round/>
+                      <a:headEnd type="none" w="med" len="med"/>
+                      <a:tailEnd type="none" w="med" len="med"/>
+                    </a:lnR>
+                    <a:lnT w="6350" cap="flat" cmpd="sng" algn="ctr">
+                      <a:solidFill>
+                        <a:srgbClr val="B8D4F0"/>
+                      </a:solidFill>
+                      <a:prstDash val="solid"/>
+                      <a:round/>
+                      <a:headEnd type="none" w="med" len="med"/>
+                      <a:tailEnd type="none" w="med" len="med"/>
+                    </a:lnT>
+                    <a:lnB w="6350" cap="flat" cmpd="sng" algn="ctr">
+                      <a:solidFill>
+                        <a:srgbClr val="B8D4F0"/>
+                      </a:solidFill>
+                      <a:prstDash val="solid"/>
+                      <a:round/>
+                      <a:headEnd type="none" w="med" len="med"/>
+                      <a:tailEnd type="none" w="med" len="med"/>
+                    </a:lnB>
+                    <a:solidFill>
+                      <a:srgbClr val="EEF3FA"/>
+                    </a:solidFill>
+                  </a:tcPr>
+                </a:tc>
+                <a:tc>
+                  <a:txBody>
+                    <a:bodyPr/>
+                    <a:lstStyle/>
+                    <a:p>
+                      <a:pPr indent="0" marL="0">
+                        <a:buNone/>
+                      </a:pPr>
+                      <a:r>
+                        <a:rPr lang="en-US" sz="1150" dirty="0">
+                          <a:solidFill>
+                            <a:srgbClr val="1A1A2E"/>
+                          </a:solidFill>
+                        </a:rPr>
+                        <a:t>Sur 100 % des déploiements ITG et PREPROD, en quelques minutes</a:t>
+                      </a:r>
+                      <a:endParaRPr lang="en-US" sz="1150" dirty="0"/>
+                    </a:p>
+                  </a:txBody>
+                  <a:tcPr marL="73152" marR="73152" marT="36576" marB="36576" anchor="ctr">
+                    <a:lnL w="6350" cap="flat" cmpd="sng" algn="ctr">
+                      <a:solidFill>
+                        <a:srgbClr val="B8D4F0"/>
+                      </a:solidFill>
+                      <a:prstDash val="solid"/>
+                      <a:round/>
+                      <a:headEnd type="none" w="med" len="med"/>
+                      <a:tailEnd type="none" w="med" len="med"/>
+                    </a:lnL>
+                    <a:lnR w="6350" cap="flat" cmpd="sng" algn="ctr">
+                      <a:solidFill>
+                        <a:srgbClr val="B8D4F0"/>
+                      </a:solidFill>
+                      <a:prstDash val="solid"/>
+                      <a:round/>
+                      <a:headEnd type="none" w="med" len="med"/>
+                      <a:tailEnd type="none" w="med" len="med"/>
+                    </a:lnR>
+                    <a:lnT w="6350" cap="flat" cmpd="sng" algn="ctr">
+                      <a:solidFill>
+                        <a:srgbClr val="B8D4F0"/>
+                      </a:solidFill>
+                      <a:prstDash val="solid"/>
+                      <a:round/>
+                      <a:headEnd type="none" w="med" len="med"/>
+                      <a:tailEnd type="none" w="med" len="med"/>
+                    </a:lnT>
+                    <a:lnB w="6350" cap="flat" cmpd="sng" algn="ctr">
+                      <a:solidFill>
+                        <a:srgbClr val="B8D4F0"/>
+                      </a:solidFill>
+                      <a:prstDash val="solid"/>
+                      <a:round/>
+                      <a:headEnd type="none" w="med" len="med"/>
+                      <a:tailEnd type="none" w="med" len="med"/>
+                    </a:lnB>
+                    <a:solidFill>
+                      <a:srgbClr val="EEF3FA"/>
+                    </a:solidFill>
+                  </a:tcPr>
+                </a:tc>
+                <a:tc>
+                  <a:txBody>
+                    <a:bodyPr/>
+                    <a:lstStyle/>
+                    <a:p>
+                      <a:pPr indent="0" marL="0">
+                        <a:buNone/>
+                      </a:pPr>
+                      <a:r>
+                        <a:rPr lang="en-US" sz="1150" dirty="0">
+                          <a:solidFill>
+                            <a:srgbClr val="5F6B7A"/>
+                          </a:solidFill>
+                        </a:rPr>
+                        <a:t>Azure Pipelines</a:t>
+                      </a:r>
+                      <a:endParaRPr lang="en-US" sz="1150" dirty="0"/>
+                    </a:p>
+                  </a:txBody>
+                  <a:tcPr marL="73152" marR="73152" marT="36576" marB="36576" anchor="ctr">
+                    <a:lnL w="6350" cap="flat" cmpd="sng" algn="ctr">
+                      <a:solidFill>
+                        <a:srgbClr val="B8D4F0"/>
+                      </a:solidFill>
+                      <a:prstDash val="solid"/>
+                      <a:round/>
+                      <a:headEnd type="none" w="med" len="med"/>
+                      <a:tailEnd type="none" w="med" len="med"/>
+                    </a:lnL>
+                    <a:lnR w="6350" cap="flat" cmpd="sng" algn="ctr">
+                      <a:solidFill>
+                        <a:srgbClr val="B8D4F0"/>
+                      </a:solidFill>
+                      <a:prstDash val="solid"/>
+                      <a:round/>
+                      <a:headEnd type="none" w="med" len="med"/>
+                      <a:tailEnd type="none" w="med" len="med"/>
+                    </a:lnR>
+                    <a:lnT w="6350" cap="flat" cmpd="sng" algn="ctr">
+                      <a:solidFill>
+                        <a:srgbClr val="B8D4F0"/>
+                      </a:solidFill>
+                      <a:prstDash val="solid"/>
+                      <a:round/>
+                      <a:headEnd type="none" w="med" len="med"/>
+                      <a:tailEnd type="none" w="med" len="med"/>
+                    </a:lnT>
+                    <a:lnB w="6350" cap="flat" cmpd="sng" algn="ctr">
+                      <a:solidFill>
+                        <a:srgbClr val="B8D4F0"/>
+                      </a:solidFill>
+                      <a:prstDash val="solid"/>
+                      <a:round/>
+                      <a:headEnd type="none" w="med" len="med"/>
+                      <a:tailEnd type="none" w="med" len="med"/>
+                    </a:lnB>
+                    <a:solidFill>
+                      <a:srgbClr val="EEF3FA"/>
+                    </a:solidFill>
+                  </a:tcPr>
+                </a:tc>
+              </a:tr>
+              <a:tr h="475488">
+                <a:tc>
+                  <a:txBody>
+                    <a:bodyPr/>
+                    <a:lstStyle/>
+                    <a:p>
+                      <a:pPr indent="0" marL="0">
+                        <a:buNone/>
+                      </a:pPr>
+                      <a:r>
+                        <a:rPr lang="en-US" sz="1150" b="1" dirty="0">
+                          <a:solidFill>
+                            <a:srgbClr val="1A1A2E"/>
+                          </a:solidFill>
+                        </a:rPr>
+                        <a:t>Tests instables</a:t>
+                      </a:r>
+                      <a:endParaRPr lang="en-US" sz="1150" dirty="0"/>
+                    </a:p>
+                  </a:txBody>
+                  <a:tcPr marL="73152" marR="73152" marT="36576" marB="36576" anchor="ctr">
+                    <a:lnL w="6350" cap="flat" cmpd="sng" algn="ctr">
+                      <a:solidFill>
+                        <a:srgbClr val="B8D4F0"/>
+                      </a:solidFill>
+                      <a:prstDash val="solid"/>
+                      <a:round/>
+                      <a:headEnd type="none" w="med" len="med"/>
+                      <a:tailEnd type="none" w="med" len="med"/>
+                    </a:lnL>
+                    <a:lnR w="6350" cap="flat" cmpd="sng" algn="ctr">
+                      <a:solidFill>
+                        <a:srgbClr val="B8D4F0"/>
+                      </a:solidFill>
+                      <a:prstDash val="solid"/>
+                      <a:round/>
+                      <a:headEnd type="none" w="med" len="med"/>
+                      <a:tailEnd type="none" w="med" len="med"/>
+                    </a:lnR>
+                    <a:lnT w="6350" cap="flat" cmpd="sng" algn="ctr">
+                      <a:solidFill>
+                        <a:srgbClr val="B8D4F0"/>
+                      </a:solidFill>
+                      <a:prstDash val="solid"/>
+                      <a:round/>
+                      <a:headEnd type="none" w="med" len="med"/>
+                      <a:tailEnd type="none" w="med" len="med"/>
+                    </a:lnT>
+                    <a:lnB w="6350" cap="flat" cmpd="sng" algn="ctr">
+                      <a:solidFill>
+                        <a:srgbClr val="B8D4F0"/>
+                      </a:solidFill>
+                      <a:prstDash val="solid"/>
+                      <a:round/>
+                      <a:headEnd type="none" w="med" len="med"/>
+                      <a:tailEnd type="none" w="med" len="med"/>
+                    </a:lnB>
+                    <a:solidFill>
+                      <a:srgbClr val="FFFFFF"/>
+                    </a:solidFill>
+                  </a:tcPr>
+                </a:tc>
+                <a:tc>
+                  <a:txBody>
+                    <a:bodyPr/>
+                    <a:lstStyle/>
+                    <a:p>
+                      <a:pPr indent="0" marL="0">
+                        <a:buNone/>
+                      </a:pPr>
+                      <a:r>
+                        <a:rPr lang="en-US" sz="1150" dirty="0">
+                          <a:solidFill>
+                            <a:srgbClr val="1A1A2E"/>
+                          </a:solidFill>
+                        </a:rPr>
+                        <a:t>Sous 2 % des exécutions sur les 10 dernières nuits</a:t>
+                      </a:r>
+                      <a:endParaRPr lang="en-US" sz="1150" dirty="0"/>
+                    </a:p>
+                  </a:txBody>
+                  <a:tcPr marL="73152" marR="73152" marT="36576" marB="36576" anchor="ctr">
+                    <a:lnL w="6350" cap="flat" cmpd="sng" algn="ctr">
+                      <a:solidFill>
+                        <a:srgbClr val="B8D4F0"/>
+                      </a:solidFill>
+                      <a:prstDash val="solid"/>
+                      <a:round/>
+                      <a:headEnd type="none" w="med" len="med"/>
+                      <a:tailEnd type="none" w="med" len="med"/>
+                    </a:lnL>
+                    <a:lnR w="6350" cap="flat" cmpd="sng" algn="ctr">
+                      <a:solidFill>
+                        <a:srgbClr val="B8D4F0"/>
+                      </a:solidFill>
+                      <a:prstDash val="solid"/>
+                      <a:round/>
+                      <a:headEnd type="none" w="med" len="med"/>
+                      <a:tailEnd type="none" w="med" len="med"/>
+                    </a:lnR>
+                    <a:lnT w="6350" cap="flat" cmpd="sng" algn="ctr">
+                      <a:solidFill>
+                        <a:srgbClr val="B8D4F0"/>
+                      </a:solidFill>
+                      <a:prstDash val="solid"/>
+                      <a:round/>
+                      <a:headEnd type="none" w="med" len="med"/>
+                      <a:tailEnd type="none" w="med" len="med"/>
+                    </a:lnT>
+                    <a:lnB w="6350" cap="flat" cmpd="sng" algn="ctr">
+                      <a:solidFill>
+                        <a:srgbClr val="B8D4F0"/>
+                      </a:solidFill>
+                      <a:prstDash val="solid"/>
+                      <a:round/>
+                      <a:headEnd type="none" w="med" len="med"/>
+                      <a:tailEnd type="none" w="med" len="med"/>
+                    </a:lnB>
+                    <a:solidFill>
+                      <a:srgbClr val="FFFFFF"/>
+                    </a:solidFill>
+                  </a:tcPr>
+                </a:tc>
+                <a:tc>
+                  <a:txBody>
+                    <a:bodyPr/>
+                    <a:lstStyle/>
+                    <a:p>
+                      <a:pPr indent="0" marL="0">
+                        <a:buNone/>
+                      </a:pPr>
+                      <a:r>
+                        <a:rPr lang="en-US" sz="1150" dirty="0">
+                          <a:solidFill>
+                            <a:srgbClr val="5F6B7A"/>
+                          </a:solidFill>
+                        </a:rPr>
+                        <a:t>Rapport Playwright</a:t>
+                      </a:r>
+                      <a:endParaRPr lang="en-US" sz="1150" dirty="0"/>
+                    </a:p>
+                  </a:txBody>
+                  <a:tcPr marL="73152" marR="73152" marT="36576" marB="36576" anchor="ctr">
+                    <a:lnL w="6350" cap="flat" cmpd="sng" algn="ctr">
+                      <a:solidFill>
+                        <a:srgbClr val="B8D4F0"/>
+                      </a:solidFill>
+                      <a:prstDash val="solid"/>
+                      <a:round/>
+                      <a:headEnd type="none" w="med" len="med"/>
+                      <a:tailEnd type="none" w="med" len="med"/>
+                    </a:lnL>
+                    <a:lnR w="6350" cap="flat" cmpd="sng" algn="ctr">
+                      <a:solidFill>
+                        <a:srgbClr val="B8D4F0"/>
+                      </a:solidFill>
+                      <a:prstDash val="solid"/>
+                      <a:round/>
+                      <a:headEnd type="none" w="med" len="med"/>
+                      <a:tailEnd type="none" w="med" len="med"/>
+                    </a:lnR>
+                    <a:lnT w="6350" cap="flat" cmpd="sng" algn="ctr">
+                      <a:solidFill>
+                        <a:srgbClr val="B8D4F0"/>
+                      </a:solidFill>
+                      <a:prstDash val="solid"/>
+                      <a:round/>
+                      <a:headEnd type="none" w="med" len="med"/>
+                      <a:tailEnd type="none" w="med" len="med"/>
+                    </a:lnT>
+                    <a:lnB w="6350" cap="flat" cmpd="sng" algn="ctr">
+                      <a:solidFill>
+                        <a:srgbClr val="B8D4F0"/>
+                      </a:solidFill>
+                      <a:prstDash val="solid"/>
+                      <a:round/>
+                      <a:headEnd type="none" w="med" len="med"/>
+                      <a:tailEnd type="none" w="med" len="med"/>
+                    </a:lnB>
+                    <a:solidFill>
+                      <a:srgbClr val="FFFFFF"/>
+                    </a:solidFill>
+                  </a:tcPr>
+                </a:tc>
+              </a:tr>
+              <a:tr h="475488">
+                <a:tc>
+                  <a:txBody>
+                    <a:bodyPr/>
+                    <a:lstStyle/>
+                    <a:p>
+                      <a:pPr indent="0" marL="0">
+                        <a:buNone/>
+                      </a:pPr>
+                      <a:r>
+                        <a:rPr lang="en-US" sz="1150" b="1" dirty="0">
+                          <a:solidFill>
+                            <a:srgbClr val="1A1A2E"/>
+                          </a:solidFill>
+                        </a:rPr>
+                        <a:t>Défauts trouvés par la suite</a:t>
+                      </a:r>
+                      <a:endParaRPr lang="en-US" sz="1150" dirty="0"/>
+                    </a:p>
+                  </a:txBody>
+                  <a:tcPr marL="73152" marR="73152" marT="36576" marB="36576" anchor="ctr">
+                    <a:lnL w="6350" cap="flat" cmpd="sng" algn="ctr">
+                      <a:solidFill>
+                        <a:srgbClr val="B8D4F0"/>
+                      </a:solidFill>
+                      <a:prstDash val="solid"/>
+                      <a:round/>
+                      <a:headEnd type="none" w="med" len="med"/>
+                      <a:tailEnd type="none" w="med" len="med"/>
+                    </a:lnL>
+                    <a:lnR w="6350" cap="flat" cmpd="sng" algn="ctr">
+                      <a:solidFill>
+                        <a:srgbClr val="B8D4F0"/>
+                      </a:solidFill>
+                      <a:prstDash val="solid"/>
+                      <a:round/>
+                      <a:headEnd type="none" w="med" len="med"/>
+                      <a:tailEnd type="none" w="med" len="med"/>
+                    </a:lnR>
+                    <a:lnT w="6350" cap="flat" cmpd="sng" algn="ctr">
+                      <a:solidFill>
+                        <a:srgbClr val="B8D4F0"/>
+                      </a:solidFill>
+                      <a:prstDash val="solid"/>
+                      <a:round/>
+                      <a:headEnd type="none" w="med" len="med"/>
+                      <a:tailEnd type="none" w="med" len="med"/>
+                    </a:lnT>
+                    <a:lnB w="6350" cap="flat" cmpd="sng" algn="ctr">
+                      <a:solidFill>
+                        <a:srgbClr val="B8D4F0"/>
+                      </a:solidFill>
+                      <a:prstDash val="solid"/>
+                      <a:round/>
+                      <a:headEnd type="none" w="med" len="med"/>
+                      <a:tailEnd type="none" w="med" len="med"/>
+                    </a:lnB>
+                    <a:solidFill>
+                      <a:srgbClr val="EEF3FA"/>
+                    </a:solidFill>
+                  </a:tcPr>
+                </a:tc>
+                <a:tc>
+                  <a:txBody>
+                    <a:bodyPr/>
+                    <a:lstStyle/>
+                    <a:p>
+                      <a:pPr indent="0" marL="0">
+                        <a:buNone/>
+                      </a:pPr>
+                      <a:r>
+                        <a:rPr lang="en-US" sz="1150" dirty="0">
+                          <a:solidFill>
+                            <a:srgbClr val="1A1A2E"/>
+                          </a:solidFill>
+                        </a:rPr>
+                        <a:t>Suivis par sprint ; rien sur plusieurs sprints : on réoriente</a:t>
+                      </a:r>
+                      <a:endParaRPr lang="en-US" sz="1150" dirty="0"/>
+                    </a:p>
+                  </a:txBody>
+                  <a:tcPr marL="73152" marR="73152" marT="36576" marB="36576" anchor="ctr">
+                    <a:lnL w="6350" cap="flat" cmpd="sng" algn="ctr">
+                      <a:solidFill>
+                        <a:srgbClr val="B8D4F0"/>
+                      </a:solidFill>
+                      <a:prstDash val="solid"/>
+                      <a:round/>
+                      <a:headEnd type="none" w="med" len="med"/>
+                      <a:tailEnd type="none" w="med" len="med"/>
+                    </a:lnL>
+                    <a:lnR w="6350" cap="flat" cmpd="sng" algn="ctr">
+                      <a:solidFill>
+                        <a:srgbClr val="B8D4F0"/>
+                      </a:solidFill>
+                      <a:prstDash val="solid"/>
+                      <a:round/>
+                      <a:headEnd type="none" w="med" len="med"/>
+                      <a:tailEnd type="none" w="med" len="med"/>
+                    </a:lnR>
+                    <a:lnT w="6350" cap="flat" cmpd="sng" algn="ctr">
+                      <a:solidFill>
+                        <a:srgbClr val="B8D4F0"/>
+                      </a:solidFill>
+                      <a:prstDash val="solid"/>
+                      <a:round/>
+                      <a:headEnd type="none" w="med" len="med"/>
+                      <a:tailEnd type="none" w="med" len="med"/>
+                    </a:lnT>
+                    <a:lnB w="6350" cap="flat" cmpd="sng" algn="ctr">
+                      <a:solidFill>
+                        <a:srgbClr val="B8D4F0"/>
+                      </a:solidFill>
+                      <a:prstDash val="solid"/>
+                      <a:round/>
+                      <a:headEnd type="none" w="med" len="med"/>
+                      <a:tailEnd type="none" w="med" len="med"/>
+                    </a:lnB>
+                    <a:solidFill>
+                      <a:srgbClr val="EEF3FA"/>
+                    </a:solidFill>
+                  </a:tcPr>
+                </a:tc>
+                <a:tc>
+                  <a:txBody>
+                    <a:bodyPr/>
+                    <a:lstStyle/>
+                    <a:p>
+                      <a:pPr indent="0" marL="0">
+                        <a:buNone/>
+                      </a:pPr>
+                      <a:r>
+                        <a:rPr lang="en-US" sz="1150" dirty="0">
+                          <a:solidFill>
+                            <a:srgbClr val="5F6B7A"/>
+                          </a:solidFill>
+                        </a:rPr>
+                        <a:t>Bugs Azure DevOps</a:t>
+                      </a:r>
+                      <a:endParaRPr lang="en-US" sz="1150" dirty="0"/>
+                    </a:p>
+                  </a:txBody>
+                  <a:tcPr marL="73152" marR="73152" marT="36576" marB="36576" anchor="ctr">
+                    <a:lnL w="6350" cap="flat" cmpd="sng" algn="ctr">
+                      <a:solidFill>
+                        <a:srgbClr val="B8D4F0"/>
+                      </a:solidFill>
+                      <a:prstDash val="solid"/>
+                      <a:round/>
+                      <a:headEnd type="none" w="med" len="med"/>
+                      <a:tailEnd type="none" w="med" len="med"/>
+                    </a:lnL>
+                    <a:lnR w="6350" cap="flat" cmpd="sng" algn="ctr">
+                      <a:solidFill>
+                        <a:srgbClr val="B8D4F0"/>
+                      </a:solidFill>
+                      <a:prstDash val="solid"/>
+                      <a:round/>
+                      <a:headEnd type="none" w="med" len="med"/>
+                      <a:tailEnd type="none" w="med" len="med"/>
+                    </a:lnR>
+                    <a:lnT w="6350" cap="flat" cmpd="sng" algn="ctr">
+                      <a:solidFill>
+                        <a:srgbClr val="B8D4F0"/>
+                      </a:solidFill>
+                      <a:prstDash val="solid"/>
+                      <a:round/>
+                      <a:headEnd type="none" w="med" len="med"/>
+                      <a:tailEnd type="none" w="med" len="med"/>
+                    </a:lnT>
+                    <a:lnB w="6350" cap="flat" cmpd="sng" algn="ctr">
+                      <a:solidFill>
+                        <a:srgbClr val="B8D4F0"/>
+                      </a:solidFill>
+                      <a:prstDash val="solid"/>
+                      <a:round/>
+                      <a:headEnd type="none" w="med" len="med"/>
+                      <a:tailEnd type="none" w="med" len="med"/>
+                    </a:lnB>
+                    <a:solidFill>
+                      <a:srgbClr val="EEF3FA"/>
+                    </a:solidFill>
+                  </a:tcPr>
+                </a:tc>
+              </a:tr>
+              <a:tr h="475488">
+                <a:tc>
+                  <a:txBody>
+                    <a:bodyPr/>
+                    <a:lstStyle/>
+                    <a:p>
+                      <a:pPr indent="0" marL="0">
+                        <a:buNone/>
+                      </a:pPr>
+                      <a:r>
+                        <a:rPr lang="en-US" sz="1150" b="1" dirty="0">
+                          <a:solidFill>
+                            <a:srgbClr val="1A1A2E"/>
+                          </a:solidFill>
+                        </a:rPr>
+                        <a:t>Défauts échappés</a:t>
+                      </a:r>
+                      <a:endParaRPr lang="en-US" sz="1150" dirty="0"/>
+                    </a:p>
+                  </a:txBody>
+                  <a:tcPr marL="73152" marR="73152" marT="36576" marB="36576" anchor="ctr">
+                    <a:lnL w="6350" cap="flat" cmpd="sng" algn="ctr">
+                      <a:solidFill>
+                        <a:srgbClr val="B8D4F0"/>
+                      </a:solidFill>
+                      <a:prstDash val="solid"/>
+                      <a:round/>
+                      <a:headEnd type="none" w="med" len="med"/>
+                      <a:tailEnd type="none" w="med" len="med"/>
+                    </a:lnL>
+                    <a:lnR w="6350" cap="flat" cmpd="sng" algn="ctr">
+                      <a:solidFill>
+                        <a:srgbClr val="B8D4F0"/>
+                      </a:solidFill>
+                      <a:prstDash val="solid"/>
+                      <a:round/>
+                      <a:headEnd type="none" w="med" len="med"/>
+                      <a:tailEnd type="none" w="med" len="med"/>
+                    </a:lnR>
+                    <a:lnT w="6350" cap="flat" cmpd="sng" algn="ctr">
+                      <a:solidFill>
+                        <a:srgbClr val="B8D4F0"/>
+                      </a:solidFill>
+                      <a:prstDash val="solid"/>
+                      <a:round/>
+                      <a:headEnd type="none" w="med" len="med"/>
+                      <a:tailEnd type="none" w="med" len="med"/>
+                    </a:lnT>
+                    <a:lnB w="6350" cap="flat" cmpd="sng" algn="ctr">
+                      <a:solidFill>
+                        <a:srgbClr val="B8D4F0"/>
+                      </a:solidFill>
+                      <a:prstDash val="solid"/>
+                      <a:round/>
+                      <a:headEnd type="none" w="med" len="med"/>
+                      <a:tailEnd type="none" w="med" len="med"/>
+                    </a:lnB>
+                    <a:solidFill>
+                      <a:srgbClr val="FFFFFF"/>
+                    </a:solidFill>
+                  </a:tcPr>
+                </a:tc>
+                <a:tc>
+                  <a:txBody>
+                    <a:bodyPr/>
+                    <a:lstStyle/>
+                    <a:p>
+                      <a:pPr indent="0" marL="0">
+                        <a:buNone/>
+                      </a:pPr>
+                      <a:r>
+                        <a:rPr lang="en-US" sz="1150" dirty="0">
+                          <a:solidFill>
+                            <a:srgbClr val="1A1A2E"/>
+                          </a:solidFill>
+                        </a:rPr>
+                        <a:t>Aucun en recette métier sur une règle couverte par la suite</a:t>
+                      </a:r>
+                      <a:endParaRPr lang="en-US" sz="1150" dirty="0"/>
+                    </a:p>
+                  </a:txBody>
+                  <a:tcPr marL="73152" marR="73152" marT="36576" marB="36576" anchor="ctr">
+                    <a:lnL w="6350" cap="flat" cmpd="sng" algn="ctr">
+                      <a:solidFill>
+                        <a:srgbClr val="B8D4F0"/>
+                      </a:solidFill>
+                      <a:prstDash val="solid"/>
+                      <a:round/>
+                      <a:headEnd type="none" w="med" len="med"/>
+                      <a:tailEnd type="none" w="med" len="med"/>
+                    </a:lnL>
+                    <a:lnR w="6350" cap="flat" cmpd="sng" algn="ctr">
+                      <a:solidFill>
+                        <a:srgbClr val="B8D4F0"/>
+                      </a:solidFill>
+                      <a:prstDash val="solid"/>
+                      <a:round/>
+                      <a:headEnd type="none" w="med" len="med"/>
+                      <a:tailEnd type="none" w="med" len="med"/>
+                    </a:lnR>
+                    <a:lnT w="6350" cap="flat" cmpd="sng" algn="ctr">
+                      <a:solidFill>
+                        <a:srgbClr val="B8D4F0"/>
+                      </a:solidFill>
+                      <a:prstDash val="solid"/>
+                      <a:round/>
+                      <a:headEnd type="none" w="med" len="med"/>
+                      <a:tailEnd type="none" w="med" len="med"/>
+                    </a:lnT>
+                    <a:lnB w="6350" cap="flat" cmpd="sng" algn="ctr">
+                      <a:solidFill>
+                        <a:srgbClr val="B8D4F0"/>
+                      </a:solidFill>
+                      <a:prstDash val="solid"/>
+                      <a:round/>
+                      <a:headEnd type="none" w="med" len="med"/>
+                      <a:tailEnd type="none" w="med" len="med"/>
+                    </a:lnB>
+                    <a:solidFill>
+                      <a:srgbClr val="FFFFFF"/>
+                    </a:solidFill>
+                  </a:tcPr>
+                </a:tc>
+                <a:tc>
+                  <a:txBody>
+                    <a:bodyPr/>
+                    <a:lstStyle/>
+                    <a:p>
+                      <a:pPr indent="0" marL="0">
+                        <a:buNone/>
+                      </a:pPr>
+                      <a:r>
+                        <a:rPr lang="en-US" sz="1150" dirty="0">
+                          <a:solidFill>
+                            <a:srgbClr val="5F6B7A"/>
+                          </a:solidFill>
+                        </a:rPr>
+                        <a:t>Bugs Azure DevOps</a:t>
+                      </a:r>
+                      <a:endParaRPr lang="en-US" sz="1150" dirty="0"/>
+                    </a:p>
+                  </a:txBody>
+                  <a:tcPr marL="73152" marR="73152" marT="36576" marB="36576" anchor="ctr">
+                    <a:lnL w="6350" cap="flat" cmpd="sng" algn="ctr">
+                      <a:solidFill>
+                        <a:srgbClr val="B8D4F0"/>
+                      </a:solidFill>
+                      <a:prstDash val="solid"/>
+                      <a:round/>
+                      <a:headEnd type="none" w="med" len="med"/>
+                      <a:tailEnd type="none" w="med" len="med"/>
+                    </a:lnL>
+                    <a:lnR w="6350" cap="flat" cmpd="sng" algn="ctr">
+                      <a:solidFill>
+                        <a:srgbClr val="B8D4F0"/>
+                      </a:solidFill>
+                      <a:prstDash val="solid"/>
+                      <a:round/>
+                      <a:headEnd type="none" w="med" len="med"/>
+                      <a:tailEnd type="none" w="med" len="med"/>
+                    </a:lnR>
+                    <a:lnT w="6350" cap="flat" cmpd="sng" algn="ctr">
+                      <a:solidFill>
+                        <a:srgbClr val="B8D4F0"/>
+                      </a:solidFill>
+                      <a:prstDash val="solid"/>
+                      <a:round/>
+                      <a:headEnd type="none" w="med" len="med"/>
+                      <a:tailEnd type="none" w="med" len="med"/>
+                    </a:lnT>
+                    <a:lnB w="6350" cap="flat" cmpd="sng" algn="ctr">
+                      <a:solidFill>
+                        <a:srgbClr val="B8D4F0"/>
+                      </a:solidFill>
+                      <a:prstDash val="solid"/>
+                      <a:round/>
+                      <a:headEnd type="none" w="med" len="med"/>
+                      <a:tailEnd type="none" w="med" len="med"/>
+                    </a:lnB>
+                    <a:solidFill>
+                      <a:srgbClr val="FFFFFF"/>
+                    </a:solidFill>
+                  </a:tcPr>
+                </a:tc>
+              </a:tr>
+              <a:tr h="475488">
+                <a:tc>
+                  <a:txBody>
+                    <a:bodyPr/>
+                    <a:lstStyle/>
+                    <a:p>
+                      <a:pPr indent="0" marL="0">
+                        <a:buNone/>
+                      </a:pPr>
+                      <a:r>
+                        <a:rPr lang="en-US" sz="1150" b="1" dirty="0">
+                          <a:solidFill>
+                            <a:srgbClr val="1A1A2E"/>
+                          </a:solidFill>
+                        </a:rPr>
+                        <a:t>Temps de diagnostic d'un échec</a:t>
+                      </a:r>
+                      <a:endParaRPr lang="en-US" sz="1150" dirty="0"/>
+                    </a:p>
+                  </a:txBody>
+                  <a:tcPr marL="73152" marR="73152" marT="36576" marB="36576" anchor="ctr">
+                    <a:lnL w="6350" cap="flat" cmpd="sng" algn="ctr">
+                      <a:solidFill>
+                        <a:srgbClr val="B8D4F0"/>
+                      </a:solidFill>
+                      <a:prstDash val="solid"/>
+                      <a:round/>
+                      <a:headEnd type="none" w="med" len="med"/>
+                      <a:tailEnd type="none" w="med" len="med"/>
+                    </a:lnL>
+                    <a:lnR w="6350" cap="flat" cmpd="sng" algn="ctr">
+                      <a:solidFill>
+                        <a:srgbClr val="B8D4F0"/>
+                      </a:solidFill>
+                      <a:prstDash val="solid"/>
+                      <a:round/>
+                      <a:headEnd type="none" w="med" len="med"/>
+                      <a:tailEnd type="none" w="med" len="med"/>
+                    </a:lnR>
+                    <a:lnT w="6350" cap="flat" cmpd="sng" algn="ctr">
+                      <a:solidFill>
+                        <a:srgbClr val="B8D4F0"/>
+                      </a:solidFill>
+                      <a:prstDash val="solid"/>
+                      <a:round/>
+                      <a:headEnd type="none" w="med" len="med"/>
+                      <a:tailEnd type="none" w="med" len="med"/>
+                    </a:lnT>
+                    <a:lnB w="6350" cap="flat" cmpd="sng" algn="ctr">
+                      <a:solidFill>
+                        <a:srgbClr val="B8D4F0"/>
+                      </a:solidFill>
+                      <a:prstDash val="solid"/>
+                      <a:round/>
+                      <a:headEnd type="none" w="med" len="med"/>
+                      <a:tailEnd type="none" w="med" len="med"/>
+                    </a:lnB>
+                    <a:solidFill>
+                      <a:srgbClr val="EEF3FA"/>
+                    </a:solidFill>
+                  </a:tcPr>
+                </a:tc>
+                <a:tc>
+                  <a:txBody>
+                    <a:bodyPr/>
+                    <a:lstStyle/>
+                    <a:p>
+                      <a:pPr indent="0" marL="0">
+                        <a:buNone/>
+                      </a:pPr>
+                      <a:r>
+                        <a:rPr lang="en-US" sz="1150" dirty="0">
+                          <a:solidFill>
+                            <a:srgbClr val="1A1A2E"/>
+                          </a:solidFill>
+                        </a:rPr>
+                        <a:t>Mesuré au pilote ; trace et identifiant App Insights joints</a:t>
+                      </a:r>
+                      <a:endParaRPr lang="en-US" sz="1150" dirty="0"/>
+                    </a:p>
+                  </a:txBody>
+                  <a:tcPr marL="73152" marR="73152" marT="36576" marB="36576" anchor="ctr">
+                    <a:lnL w="6350" cap="flat" cmpd="sng" algn="ctr">
+                      <a:solidFill>
+                        <a:srgbClr val="B8D4F0"/>
+                      </a:solidFill>
+                      <a:prstDash val="solid"/>
+                      <a:round/>
+                      <a:headEnd type="none" w="med" len="med"/>
+                      <a:tailEnd type="none" w="med" len="med"/>
+                    </a:lnL>
+                    <a:lnR w="6350" cap="flat" cmpd="sng" algn="ctr">
+                      <a:solidFill>
+                        <a:srgbClr val="B8D4F0"/>
+                      </a:solidFill>
+                      <a:prstDash val="solid"/>
+                      <a:round/>
+                      <a:headEnd type="none" w="med" len="med"/>
+                      <a:tailEnd type="none" w="med" len="med"/>
+                    </a:lnR>
+                    <a:lnT w="6350" cap="flat" cmpd="sng" algn="ctr">
+                      <a:solidFill>
+                        <a:srgbClr val="B8D4F0"/>
+                      </a:solidFill>
+                      <a:prstDash val="solid"/>
+                      <a:round/>
+                      <a:headEnd type="none" w="med" len="med"/>
+                      <a:tailEnd type="none" w="med" len="med"/>
+                    </a:lnT>
+                    <a:lnB w="6350" cap="flat" cmpd="sng" algn="ctr">
+                      <a:solidFill>
+                        <a:srgbClr val="B8D4F0"/>
+                      </a:solidFill>
+                      <a:prstDash val="solid"/>
+                      <a:round/>
+                      <a:headEnd type="none" w="med" len="med"/>
+                      <a:tailEnd type="none" w="med" len="med"/>
+                    </a:lnB>
+                    <a:solidFill>
+                      <a:srgbClr val="EEF3FA"/>
+                    </a:solidFill>
+                  </a:tcPr>
+                </a:tc>
+                <a:tc>
+                  <a:txBody>
+                    <a:bodyPr/>
+                    <a:lstStyle/>
+                    <a:p>
+                      <a:pPr indent="0" marL="0">
+                        <a:buNone/>
+                      </a:pPr>
+                      <a:r>
+                        <a:rPr lang="en-US" sz="1150" dirty="0">
+                          <a:solidFill>
+                            <a:srgbClr val="5F6B7A"/>
+                          </a:solidFill>
+                        </a:rPr>
+                        <a:t>Pilote</a:t>
+                      </a:r>
+                      <a:endParaRPr lang="en-US" sz="1150" dirty="0"/>
+                    </a:p>
+                  </a:txBody>
+                  <a:tcPr marL="73152" marR="73152" marT="36576" marB="36576" anchor="ctr">
+                    <a:lnL w="6350" cap="flat" cmpd="sng" algn="ctr">
+                      <a:solidFill>
+                        <a:srgbClr val="B8D4F0"/>
+                      </a:solidFill>
+                      <a:prstDash val="solid"/>
+                      <a:round/>
+                      <a:headEnd type="none" w="med" len="med"/>
+                      <a:tailEnd type="none" w="med" len="med"/>
+                    </a:lnL>
+                    <a:lnR w="6350" cap="flat" cmpd="sng" algn="ctr">
+                      <a:solidFill>
+                        <a:srgbClr val="B8D4F0"/>
+                      </a:solidFill>
+                      <a:prstDash val="solid"/>
+                      <a:round/>
+                      <a:headEnd type="none" w="med" len="med"/>
+                      <a:tailEnd type="none" w="med" len="med"/>
+                    </a:lnR>
+                    <a:lnT w="6350" cap="flat" cmpd="sng" algn="ctr">
+                      <a:solidFill>
+                        <a:srgbClr val="B8D4F0"/>
+                      </a:solidFill>
+                      <a:prstDash val="solid"/>
+                      <a:round/>
+                      <a:headEnd type="none" w="med" len="med"/>
+                      <a:tailEnd type="none" w="med" len="med"/>
+                    </a:lnT>
+                    <a:lnB w="6350" cap="flat" cmpd="sng" algn="ctr">
+                      <a:solidFill>
+                        <a:srgbClr val="B8D4F0"/>
+                      </a:solidFill>
+                      <a:prstDash val="solid"/>
+                      <a:round/>
+                      <a:headEnd type="none" w="med" len="med"/>
+                      <a:tailEnd type="none" w="med" len="med"/>
+                    </a:lnB>
+                    <a:solidFill>
+                      <a:srgbClr val="EEF3FA"/>
+                    </a:solidFill>
+                  </a:tcPr>
+                </a:tc>
+              </a:tr>
+              <a:tr h="475488">
+                <a:tc>
+                  <a:txBody>
+                    <a:bodyPr/>
+                    <a:lstStyle/>
+                    <a:p>
+                      <a:pPr indent="0" marL="0">
+                        <a:buNone/>
+                      </a:pPr>
+                      <a:r>
+                        <a:rPr lang="en-US" sz="1150" b="1" dirty="0">
+                          <a:solidFill>
+                            <a:srgbClr val="1A1A2E"/>
+                          </a:solidFill>
+                        </a:rPr>
+                        <a:t>Maintenance</a:t>
+                      </a:r>
+                      <a:endParaRPr lang="en-US" sz="1150" dirty="0"/>
+                    </a:p>
+                  </a:txBody>
+                  <a:tcPr marL="73152" marR="73152" marT="36576" marB="36576" anchor="ctr">
+                    <a:lnL w="6350" cap="flat" cmpd="sng" algn="ctr">
+                      <a:solidFill>
+                        <a:srgbClr val="B8D4F0"/>
+                      </a:solidFill>
+                      <a:prstDash val="solid"/>
+                      <a:round/>
+                      <a:headEnd type="none" w="med" len="med"/>
+                      <a:tailEnd type="none" w="med" len="med"/>
+                    </a:lnL>
+                    <a:lnR w="6350" cap="flat" cmpd="sng" algn="ctr">
+                      <a:solidFill>
+                        <a:srgbClr val="B8D4F0"/>
+                      </a:solidFill>
+                      <a:prstDash val="solid"/>
+                      <a:round/>
+                      <a:headEnd type="none" w="med" len="med"/>
+                      <a:tailEnd type="none" w="med" len="med"/>
+                    </a:lnR>
+                    <a:lnT w="6350" cap="flat" cmpd="sng" algn="ctr">
+                      <a:solidFill>
+                        <a:srgbClr val="B8D4F0"/>
+                      </a:solidFill>
+                      <a:prstDash val="solid"/>
+                      <a:round/>
+                      <a:headEnd type="none" w="med" len="med"/>
+                      <a:tailEnd type="none" w="med" len="med"/>
+                    </a:lnT>
+                    <a:lnB w="6350" cap="flat" cmpd="sng" algn="ctr">
+                      <a:solidFill>
+                        <a:srgbClr val="B8D4F0"/>
+                      </a:solidFill>
+                      <a:prstDash val="solid"/>
+                      <a:round/>
+                      <a:headEnd type="none" w="med" len="med"/>
+                      <a:tailEnd type="none" w="med" len="med"/>
+                    </a:lnB>
+                    <a:solidFill>
+                      <a:srgbClr val="FFFFFF"/>
+                    </a:solidFill>
+                  </a:tcPr>
+                </a:tc>
+                <a:tc>
+                  <a:txBody>
+                    <a:bodyPr/>
+                    <a:lstStyle/>
+                    <a:p>
+                      <a:pPr indent="0" marL="0">
+                        <a:buNone/>
+                      </a:pPr>
+                      <a:r>
+                        <a:rPr lang="en-US" sz="1150" dirty="0">
+                          <a:solidFill>
+                            <a:srgbClr val="1A1A2E"/>
+                          </a:solidFill>
+                        </a:rPr>
+                        <a:t>Heures par sprint, comparées à l'estimation du ROI</a:t>
+                      </a:r>
+                      <a:endParaRPr lang="en-US" sz="1150" dirty="0"/>
+                    </a:p>
+                  </a:txBody>
+                  <a:tcPr marL="73152" marR="73152" marT="36576" marB="36576" anchor="ctr">
+                    <a:lnL w="6350" cap="flat" cmpd="sng" algn="ctr">
+                      <a:solidFill>
+                        <a:srgbClr val="B8D4F0"/>
+                      </a:solidFill>
+                      <a:prstDash val="solid"/>
+                      <a:round/>
+                      <a:headEnd type="none" w="med" len="med"/>
+                      <a:tailEnd type="none" w="med" len="med"/>
+                    </a:lnL>
+                    <a:lnR w="6350" cap="flat" cmpd="sng" algn="ctr">
+                      <a:solidFill>
+                        <a:srgbClr val="B8D4F0"/>
+                      </a:solidFill>
+                      <a:prstDash val="solid"/>
+                      <a:round/>
+                      <a:headEnd type="none" w="med" len="med"/>
+                      <a:tailEnd type="none" w="med" len="med"/>
+                    </a:lnR>
+                    <a:lnT w="6350" cap="flat" cmpd="sng" algn="ctr">
+                      <a:solidFill>
+                        <a:srgbClr val="B8D4F0"/>
+                      </a:solidFill>
+                      <a:prstDash val="solid"/>
+                      <a:round/>
+                      <a:headEnd type="none" w="med" len="med"/>
+                      <a:tailEnd type="none" w="med" len="med"/>
+                    </a:lnT>
+                    <a:lnB w="6350" cap="flat" cmpd="sng" algn="ctr">
+                      <a:solidFill>
+                        <a:srgbClr val="B8D4F0"/>
+                      </a:solidFill>
+                      <a:prstDash val="solid"/>
+                      <a:round/>
+                      <a:headEnd type="none" w="med" len="med"/>
+                      <a:tailEnd type="none" w="med" len="med"/>
+                    </a:lnB>
+                    <a:solidFill>
+                      <a:srgbClr val="FFFFFF"/>
+                    </a:solidFill>
+                  </a:tcPr>
+                </a:tc>
+                <a:tc>
+                  <a:txBody>
+                    <a:bodyPr/>
+                    <a:lstStyle/>
+                    <a:p>
+                      <a:pPr indent="0" marL="0">
+                        <a:buNone/>
+                      </a:pPr>
+                      <a:r>
+                        <a:rPr lang="en-US" sz="1150" dirty="0">
+                          <a:solidFill>
+                            <a:srgbClr val="5F6B7A"/>
+                          </a:solidFill>
+                        </a:rPr>
+                        <a:t>Pilote</a:t>
+                      </a:r>
+                      <a:endParaRPr lang="en-US" sz="1150" dirty="0"/>
+                    </a:p>
+                  </a:txBody>
+                  <a:tcPr marL="73152" marR="73152" marT="36576" marB="36576" anchor="ctr">
+                    <a:lnL w="6350" cap="flat" cmpd="sng" algn="ctr">
+                      <a:solidFill>
+                        <a:srgbClr val="B8D4F0"/>
+                      </a:solidFill>
+                      <a:prstDash val="solid"/>
+                      <a:round/>
+                      <a:headEnd type="none" w="med" len="med"/>
+                      <a:tailEnd type="none" w="med" len="med"/>
+                    </a:lnL>
+                    <a:lnR w="6350" cap="flat" cmpd="sng" algn="ctr">
+                      <a:solidFill>
+                        <a:srgbClr val="B8D4F0"/>
+                      </a:solidFill>
+                      <a:prstDash val="solid"/>
+                      <a:round/>
+                      <a:headEnd type="none" w="med" len="med"/>
+                      <a:tailEnd type="none" w="med" len="med"/>
+                    </a:lnR>
+                    <a:lnT w="6350" cap="flat" cmpd="sng" algn="ctr">
+                      <a:solidFill>
+                        <a:srgbClr val="B8D4F0"/>
+                      </a:solidFill>
+                      <a:prstDash val="solid"/>
+                      <a:round/>
+                      <a:headEnd type="none" w="med" len="med"/>
+                      <a:tailEnd type="none" w="med" len="med"/>
+                    </a:lnT>
+                    <a:lnB w="6350" cap="flat" cmpd="sng" algn="ctr">
+                      <a:solidFill>
+                        <a:srgbClr val="B8D4F0"/>
+                      </a:solidFill>
+                      <a:prstDash val="solid"/>
+                      <a:round/>
+                      <a:headEnd type="none" w="med" len="med"/>
+                      <a:tailEnd type="none" w="med" len="med"/>
+                    </a:lnB>
+                    <a:solidFill>
+                      <a:srgbClr val="FFFFFF"/>
+                    </a:solidFill>
+                  </a:tcPr>
+                </a:tc>
+              </a:tr>
+              <a:tr h="475488">
+                <a:tc>
+                  <a:txBody>
+                    <a:bodyPr/>
+                    <a:lstStyle/>
+                    <a:p>
+                      <a:pPr indent="0" marL="0">
+                        <a:buNone/>
+                      </a:pPr>
+                      <a:r>
+                        <a:rPr lang="en-US" sz="1150" b="1" dirty="0">
+                          <a:solidFill>
+                            <a:srgbClr val="1A1A2E"/>
+                          </a:solidFill>
+                        </a:rPr>
+                        <a:t>Traçabilité</a:t>
+                      </a:r>
+                      <a:endParaRPr lang="en-US" sz="1150" dirty="0"/>
+                    </a:p>
+                  </a:txBody>
+                  <a:tcPr marL="73152" marR="73152" marT="36576" marB="36576" anchor="ctr">
+                    <a:lnL w="6350" cap="flat" cmpd="sng" algn="ctr">
+                      <a:solidFill>
+                        <a:srgbClr val="B8D4F0"/>
+                      </a:solidFill>
+                      <a:prstDash val="solid"/>
+                      <a:round/>
+                      <a:headEnd type="none" w="med" len="med"/>
+                      <a:tailEnd type="none" w="med" len="med"/>
+                    </a:lnL>
+                    <a:lnR w="6350" cap="flat" cmpd="sng" algn="ctr">
+                      <a:solidFill>
+                        <a:srgbClr val="B8D4F0"/>
+                      </a:solidFill>
+                      <a:prstDash val="solid"/>
+                      <a:round/>
+                      <a:headEnd type="none" w="med" len="med"/>
+                      <a:tailEnd type="none" w="med" len="med"/>
+                    </a:lnR>
+                    <a:lnT w="6350" cap="flat" cmpd="sng" algn="ctr">
+                      <a:solidFill>
+                        <a:srgbClr val="B8D4F0"/>
+                      </a:solidFill>
+                      <a:prstDash val="solid"/>
+                      <a:round/>
+                      <a:headEnd type="none" w="med" len="med"/>
+                      <a:tailEnd type="none" w="med" len="med"/>
+                    </a:lnT>
+                    <a:lnB w="6350" cap="flat" cmpd="sng" algn="ctr">
+                      <a:solidFill>
+                        <a:srgbClr val="B8D4F0"/>
+                      </a:solidFill>
+                      <a:prstDash val="solid"/>
+                      <a:round/>
+                      <a:headEnd type="none" w="med" len="med"/>
+                      <a:tailEnd type="none" w="med" len="med"/>
+                    </a:lnB>
+                    <a:solidFill>
+                      <a:srgbClr val="EEF3FA"/>
+                    </a:solidFill>
+                  </a:tcPr>
+                </a:tc>
+                <a:tc>
+                  <a:txBody>
+                    <a:bodyPr/>
+                    <a:lstStyle/>
+                    <a:p>
+                      <a:pPr indent="0" marL="0">
+                        <a:buNone/>
+                      </a:pPr>
+                      <a:r>
+                        <a:rPr lang="en-US" sz="1150" dirty="0">
+                          <a:solidFill>
+                            <a:srgbClr val="1A1A2E"/>
+                          </a:solidFill>
+                        </a:rPr>
+                        <a:t>100 % des cas automatisés marqués et liés dans Test Plans</a:t>
+                      </a:r>
+                      <a:endParaRPr lang="en-US" sz="1150" dirty="0"/>
+                    </a:p>
+                  </a:txBody>
+                  <a:tcPr marL="73152" marR="73152" marT="36576" marB="36576" anchor="ctr">
+                    <a:lnL w="6350" cap="flat" cmpd="sng" algn="ctr">
+                      <a:solidFill>
+                        <a:srgbClr val="B8D4F0"/>
+                      </a:solidFill>
+                      <a:prstDash val="solid"/>
+                      <a:round/>
+                      <a:headEnd type="none" w="med" len="med"/>
+                      <a:tailEnd type="none" w="med" len="med"/>
+                    </a:lnL>
+                    <a:lnR w="6350" cap="flat" cmpd="sng" algn="ctr">
+                      <a:solidFill>
+                        <a:srgbClr val="B8D4F0"/>
+                      </a:solidFill>
+                      <a:prstDash val="solid"/>
+                      <a:round/>
+                      <a:headEnd type="none" w="med" len="med"/>
+                      <a:tailEnd type="none" w="med" len="med"/>
+                    </a:lnR>
+                    <a:lnT w="6350" cap="flat" cmpd="sng" algn="ctr">
+                      <a:solidFill>
+                        <a:srgbClr val="B8D4F0"/>
+                      </a:solidFill>
+                      <a:prstDash val="solid"/>
+                      <a:round/>
+                      <a:headEnd type="none" w="med" len="med"/>
+                      <a:tailEnd type="none" w="med" len="med"/>
+                    </a:lnT>
+                    <a:lnB w="6350" cap="flat" cmpd="sng" algn="ctr">
+                      <a:solidFill>
+                        <a:srgbClr val="B8D4F0"/>
+                      </a:solidFill>
+                      <a:prstDash val="solid"/>
+                      <a:round/>
+                      <a:headEnd type="none" w="med" len="med"/>
+                      <a:tailEnd type="none" w="med" len="med"/>
+                    </a:lnB>
+                    <a:solidFill>
+                      <a:srgbClr val="EEF3FA"/>
+                    </a:solidFill>
+                  </a:tcPr>
+                </a:tc>
+                <a:tc>
+                  <a:txBody>
+                    <a:bodyPr/>
+                    <a:lstStyle/>
+                    <a:p>
+                      <a:pPr indent="0" marL="0">
+                        <a:buNone/>
+                      </a:pPr>
+                      <a:r>
+                        <a:rPr lang="en-US" sz="1150" dirty="0">
+                          <a:solidFill>
+                            <a:srgbClr val="5F6B7A"/>
+                          </a:solidFill>
+                        </a:rPr>
+                        <a:t>Test Plans</a:t>
+                      </a:r>
+                      <a:endParaRPr lang="en-US" sz="1150" dirty="0"/>
+                    </a:p>
+                  </a:txBody>
+                  <a:tcPr marL="73152" marR="73152" marT="36576" marB="36576" anchor="ctr">
+                    <a:lnL w="6350" cap="flat" cmpd="sng" algn="ctr">
+                      <a:solidFill>
+                        <a:srgbClr val="B8D4F0"/>
+                      </a:solidFill>
+                      <a:prstDash val="solid"/>
+                      <a:round/>
+                      <a:headEnd type="none" w="med" len="med"/>
+                      <a:tailEnd type="none" w="med" len="med"/>
+                    </a:lnL>
+                    <a:lnR w="6350" cap="flat" cmpd="sng" algn="ctr">
+                      <a:solidFill>
+                        <a:srgbClr val="B8D4F0"/>
+                      </a:solidFill>
+                      <a:prstDash val="solid"/>
+                      <a:round/>
+                      <a:headEnd type="none" w="med" len="med"/>
+                      <a:tailEnd type="none" w="med" len="med"/>
+                    </a:lnR>
+                    <a:lnT w="6350" cap="flat" cmpd="sng" algn="ctr">
+                      <a:solidFill>
+                        <a:srgbClr val="B8D4F0"/>
+                      </a:solidFill>
+                      <a:prstDash val="solid"/>
+                      <a:round/>
+                      <a:headEnd type="none" w="med" len="med"/>
+                      <a:tailEnd type="none" w="med" len="med"/>
+                    </a:lnT>
+                    <a:lnB w="6350" cap="flat" cmpd="sng" algn="ctr">
+                      <a:solidFill>
+                        <a:srgbClr val="B8D4F0"/>
+                      </a:solidFill>
+                      <a:prstDash val="solid"/>
+                      <a:round/>
+                      <a:headEnd type="none" w="med" len="med"/>
+                      <a:tailEnd type="none" w="med" len="med"/>
+                    </a:lnB>
+                    <a:solidFill>
+                      <a:srgbClr val="EEF3FA"/>
+                    </a:solidFill>
+                  </a:tcPr>
+                </a:tc>
+              </a:tr>
+            </a:tbl>
+          </a:graphicData>
+        </a:graphic>
+      </p:graphicFrame>
+      <p:sp>
+        <p:nvSpPr>
+          <p:cNvPr id="10" name="box"/>
+          <p:cNvSpPr/>
+          <p:nvPr/>
+        </p:nvSpPr>
+        <p:spPr>
+          <a:xfrm>
+            <a:off x="4069080" y="5486400"/>
+            <a:ext cx="7543800" cy="365760"/>
+          </a:xfrm>
+          <a:prstGeom prst="roundRect">
+            <a:avLst>
+              <a:gd name="adj" fmla="val 15000"/>
+            </a:avLst>
+          </a:prstGeom>
+          <a:solidFill>
+            <a:srgbClr val="E6E9ED"/>
+          </a:solidFill>
+          <a:ln/>
+        </p:spPr>
+      </p:sp>
+      <p:sp>
+        <p:nvSpPr>
+          <p:cNvPr id="11" name="Text 8"/>
+          <p:cNvSpPr txBox="1"/>
+          <p:nvPr/>
+        </p:nvSpPr>
+        <p:spPr>
+          <a:xfrm>
+            <a:off x="4206240" y="5486400"/>
+            <a:ext cx="7315200" cy="365760"/>
+          </a:xfrm>
+          <a:prstGeom prst="rect">
+            <a:avLst/>
+          </a:prstGeom>
+          <a:noFill/>
+          <a:ln/>
+        </p:spPr>
+        <p:txBody>
+          <a:bodyPr wrap="square" lIns="0" tIns="0" rIns="0" bIns="0" rtlCol="0" anchor="ctr"/>
+          <a:lstStyle/>
+          <a:p>
+            <a:pPr indent="0" marL="0">
+              <a:buNone/>
+            </a:pPr>
+            <a:r>
+              <a:rPr lang="en-US" sz="1150" i="1" dirty="0">
+                <a:solidFill>
+                  <a:schemeClr val="accent4"/>
+                </a:solidFill>
+              </a:rPr>
+              <a:t>Cibles proposées, à valider ensemble ; les seuils définitifs se fixent avec les mesures du pilote.</a:t>
+            </a:r>
+            <a:endParaRPr lang="en-US" sz="1150" dirty="0"/>
+          </a:p>
+        </p:txBody>
+      </p:sp>
+      <p:sp>
+        <p:nvSpPr>
+          <p:cNvPr id="25" name="Slide Number Placeholder 0"/>
+          <p:cNvSpPr>
+            <a:spLocks noGrp="1"/>
+          </p:cNvSpPr>
+          <p:nvPr>
+            <p:ph type="sldNum" sz="quarter" idx="4294967295"/>
+          </p:nvPr>
+        </p:nvSpPr>
+        <p:spPr>
+          <a:xfrm>
+            <a:off x="11155680" y="6446520"/>
+            <a:ext cx="457200" cy="274320"/>
+          </a:xfrm>
+          <a:prstGeom prst="rect">
+            <a:avLst/>
+          </a:prstGeom>
+          <a:extLst>
+            <a:ext uri="{C572A759-6A51-4108-AA02-DFA0A04FC94B}">
+              <ma14:wrappingTextBoxFlag xmlns:ma14="http://schemas.microsoft.com/office/mac/drawingml/2011/main" val="0"/>
+            </a:ext>
+          </a:extLst>
+        </p:spPr>
+        <p:txBody>
+          <a:bodyPr/>
+          <a:lstStyle>
+            <a:lvl1pPr>
+              <a:defRPr sz="1000">
+                <a:solidFill>
+                  <a:schemeClr val="accent4"/>
+                </a:solidFill>
+              </a:defRPr>
+            </a:lvl1pPr>
+          </a:lstStyle>
+          <a:p>
+            <a:pPr algn="r"/>
+            <a:fld id="{F7021451-1387-4CA6-816F-3879F97B5CBC}" type="slidenum">
+              <a:rPr b="0" lang="en-US"/>
+              <a:t>11</a:t>
+            </a:fld>
+            <a:endParaRPr lang="en-US"/>
+          </a:p>
+        </p:txBody>
+      </p:sp>
+    </p:spTree>
+  </p:cSld>
+  <p:clrMapOvr>
+    <a:masterClrMapping/>
+  </p:clrMapOvr>
+</p:sld>
+</file>
+
+<file path=ppt/slides/slide12.xml><?xml version="1.0" encoding="utf-8"?>
+<p:sld xmlns:a="http://schemas.openxmlformats.org/drawingml/2006/main" xmlns:r="http://schemas.openxmlformats.org/officeDocument/2006/relationships" xmlns:p="http://schemas.openxmlformats.org/presentationml/2006/main">
+  <p:cSld name="Slide 12">
+    <p:spTree>
+      <p:nvGrpSpPr>
+        <p:cNvPr id="1" name=""/>
+        <p:cNvGrpSpPr/>
+        <p:nvPr/>
+      </p:nvGrpSpPr>
+      <p:grpSpPr>
+        <a:xfrm>
+          <a:off x="0" y="0"/>
+          <a:ext cx="0" cy="0"/>
+          <a:chOff x="0" y="0"/>
+          <a:chExt cx="0" cy="0"/>
+        </a:xfrm>
+      </p:grpSpPr>
+      <p:sp>
+        <p:nvSpPr>
+          <p:cNvPr id="2" name="Text 0"/>
+          <p:cNvSpPr/>
+          <p:nvPr>
+            <p:ph idx="100" type="title" hasCustomPrompt="1"/>
+          </p:nvPr>
+        </p:nvSpPr>
+        <p:spPr>
+          <a:xfrm>
+            <a:off x="548640" y="320040"/>
+            <a:ext cx="11064240" cy="640080"/>
+          </a:xfrm>
+          <a:prstGeom prst="rect">
+            <a:avLst/>
+          </a:prstGeom>
+          <a:noFill/>
+          <a:ln/>
+        </p:spPr>
+        <p:txBody>
+          <a:bodyPr wrap="square" lIns="0" tIns="0" rIns="0" bIns="0" rtlCol="0" anchor="ctr"/>
+          <a:lstStyle/>
+          <a:p>
+            <a:pPr algn="l" indent="0" marL="0">
+              <a:buNone/>
+            </a:pPr>
+            <a:r>
+              <a:rPr lang="en-US" sz="2800" b="1" dirty="0">
+                <a:solidFill>
+                  <a:schemeClr val="tx2"/>
+                </a:solidFill>
+              </a:rPr>
               <a:t>Suivre les livraisons, transmettre avant fin 2026</a:t>
             </a:r>
             <a:endParaRPr lang="en-US" sz="2800" dirty="0"/>
@@ -5524,7 +7755,3790 @@
             <a:pPr algn="r"/>
             <a:fld id="{F7021451-1387-4CA6-816F-3879F97B5CBC}" type="slidenum">
               <a:rPr b="0" lang="en-US"/>
-              <a:t>11</a:t>
+              <a:t>12</a:t>
+            </a:fld>
+            <a:endParaRPr lang="en-US"/>
+          </a:p>
+        </p:txBody>
+      </p:sp>
+    </p:spTree>
+  </p:cSld>
+  <p:clrMapOvr>
+    <a:masterClrMapping/>
+  </p:clrMapOvr>
+</p:sld>
+</file>
+
+<file path=ppt/slides/slide13.xml><?xml version="1.0" encoding="utf-8"?>
+<p:sld xmlns:a="http://schemas.openxmlformats.org/drawingml/2006/main" xmlns:r="http://schemas.openxmlformats.org/officeDocument/2006/relationships" xmlns:p="http://schemas.openxmlformats.org/presentationml/2006/main">
+  <p:cSld name="Slide 13">
+    <p:spTree>
+      <p:nvGrpSpPr>
+        <p:cNvPr id="1" name=""/>
+        <p:cNvGrpSpPr/>
+        <p:nvPr/>
+      </p:nvGrpSpPr>
+      <p:grpSpPr>
+        <a:xfrm>
+          <a:off x="0" y="0"/>
+          <a:ext cx="0" cy="0"/>
+          <a:chOff x="0" y="0"/>
+          <a:chExt cx="0" cy="0"/>
+        </a:xfrm>
+      </p:grpSpPr>
+      <p:sp>
+        <p:nvSpPr>
+          <p:cNvPr id="2" name="Text 0"/>
+          <p:cNvSpPr/>
+          <p:nvPr>
+            <p:ph idx="100" type="title" hasCustomPrompt="1"/>
+          </p:nvPr>
+        </p:nvSpPr>
+        <p:spPr>
+          <a:xfrm>
+            <a:off x="548640" y="320040"/>
+            <a:ext cx="11064240" cy="640080"/>
+          </a:xfrm>
+          <a:prstGeom prst="rect">
+            <a:avLst/>
+          </a:prstGeom>
+          <a:noFill/>
+          <a:ln/>
+        </p:spPr>
+        <p:txBody>
+          <a:bodyPr wrap="square" lIns="0" tIns="0" rIns="0" bIns="0" rtlCol="0" anchor="ctr"/>
+          <a:lstStyle/>
+          <a:p>
+            <a:pPr algn="l" indent="0" marL="0">
+              <a:buNone/>
+            </a:pPr>
+            <a:r>
+              <a:rPr lang="en-US" sz="2800" b="1" dirty="0">
+                <a:solidFill>
+                  <a:schemeClr val="tx2"/>
+                </a:solidFill>
+              </a:rPr>
+              <a:t>Annexe : processus de test et livrables attendus</a:t>
+            </a:r>
+            <a:endParaRPr lang="en-US" sz="2800" dirty="0"/>
+          </a:p>
+        </p:txBody>
+      </p:sp>
+      <p:sp>
+        <p:nvSpPr>
+          <p:cNvPr id="3" name="Text 0"/>
+          <p:cNvSpPr/>
+          <p:nvPr>
+            <p:ph idx="101" type="body" hasCustomPrompt="1"/>
+          </p:nvPr>
+        </p:nvSpPr>
+        <p:spPr>
+          <a:xfrm>
+            <a:off x="548640" y="960120"/>
+            <a:ext cx="11064240" cy="502920"/>
+          </a:xfrm>
+          <a:prstGeom prst="rect">
+            <a:avLst/>
+          </a:prstGeom>
+          <a:noFill/>
+          <a:ln/>
+        </p:spPr>
+        <p:txBody>
+          <a:bodyPr wrap="square" lIns="0" tIns="0" rIns="0" bIns="0" rtlCol="0" anchor="t"/>
+          <a:lstStyle/>
+          <a:p>
+            <a:pPr algn="l" indent="0" marL="0">
+              <a:buNone/>
+            </a:pPr>
+            <a:r>
+              <a:rPr lang="en-US" sz="1600" i="1" dirty="0">
+                <a:solidFill>
+                  <a:schemeClr val="accent1"/>
+                </a:solidFill>
+              </a:rPr>
+              <a:t>Chaque tâche est suivie et approuvée par une ou plusieurs personnes de l'équipe, à nommer.</a:t>
+            </a:r>
+            <a:endParaRPr lang="en-US" sz="1600" dirty="0"/>
+          </a:p>
+        </p:txBody>
+      </p:sp>
+      <p:sp>
+        <p:nvSpPr>
+          <p:cNvPr id="4" name="num"/>
+          <p:cNvSpPr/>
+          <p:nvPr/>
+        </p:nvSpPr>
+        <p:spPr>
+          <a:xfrm>
+            <a:off x="548640" y="1719072"/>
+            <a:ext cx="420624" cy="420624"/>
+          </a:xfrm>
+          <a:prstGeom prst="ellipse">
+            <a:avLst/>
+          </a:prstGeom>
+          <a:solidFill>
+            <a:schemeClr val="accent1"/>
+          </a:solidFill>
+          <a:ln/>
+        </p:spPr>
+      </p:sp>
+      <p:sp>
+        <p:nvSpPr>
+          <p:cNvPr id="5" name="Text 3"/>
+          <p:cNvSpPr txBox="1"/>
+          <p:nvPr/>
+        </p:nvSpPr>
+        <p:spPr>
+          <a:xfrm>
+            <a:off x="548640" y="1719072"/>
+            <a:ext cx="420624" cy="420624"/>
+          </a:xfrm>
+          <a:prstGeom prst="rect">
+            <a:avLst/>
+          </a:prstGeom>
+          <a:noFill/>
+          <a:ln/>
+        </p:spPr>
+        <p:txBody>
+          <a:bodyPr wrap="square" lIns="0" tIns="0" rIns="0" bIns="0" rtlCol="0" anchor="ctr"/>
+          <a:lstStyle/>
+          <a:p>
+            <a:pPr algn="ctr" indent="0" marL="0">
+              <a:buNone/>
+            </a:pPr>
+            <a:r>
+              <a:rPr lang="en-US" sz="1400" b="1" dirty="0">
+                <a:solidFill>
+                  <a:schemeClr val="bg1"/>
+                </a:solidFill>
+              </a:rPr>
+              <a:t>1</a:t>
+            </a:r>
+            <a:endParaRPr lang="en-US" sz="1400" dirty="0"/>
+          </a:p>
+        </p:txBody>
+      </p:sp>
+      <p:sp>
+        <p:nvSpPr>
+          <p:cNvPr id="6" name="Text 4"/>
+          <p:cNvSpPr txBox="1"/>
+          <p:nvPr/>
+        </p:nvSpPr>
+        <p:spPr>
+          <a:xfrm>
+            <a:off x="1097280" y="1645920"/>
+            <a:ext cx="5669280" cy="640080"/>
+          </a:xfrm>
+          <a:prstGeom prst="rect">
+            <a:avLst/>
+          </a:prstGeom>
+          <a:noFill/>
+          <a:ln/>
+        </p:spPr>
+        <p:txBody>
+          <a:bodyPr wrap="square" lIns="0" tIns="0" rIns="0" bIns="0" rtlCol="0" anchor="ctr"/>
+          <a:lstStyle/>
+          <a:p>
+            <a:pPr indent="0" marL="0">
+              <a:buNone/>
+            </a:pPr>
+            <a:r>
+              <a:rPr lang="en-US" sz="1150" b="1" dirty="0">
+                <a:solidFill>
+                  <a:srgbClr val="00338D"/>
+                </a:solidFill>
+              </a:rPr>
+              <a:t>Planification</a:t>
+            </a:r>
+            <a:endParaRPr lang="en-US" sz="1150" dirty="0"/>
+          </a:p>
+          <a:p>
+            <a:pPr indent="0" marL="0">
+              <a:buNone/>
+            </a:pPr>
+            <a:r>
+              <a:rPr lang="en-US" sz="1150" dirty="0">
+                <a:solidFill>
+                  <a:schemeClr val="tx1"/>
+                </a:solidFill>
+              </a:rPr>
+              <a:t>Compléter la stratégie de test ; définir la démarche d'automatisation et les solutions à mettre en œuvre</a:t>
+            </a:r>
+            <a:endParaRPr lang="en-US" sz="1150" dirty="0"/>
+          </a:p>
+        </p:txBody>
+      </p:sp>
+      <p:sp>
+        <p:nvSpPr>
+          <p:cNvPr id="7" name="num"/>
+          <p:cNvSpPr/>
+          <p:nvPr/>
+        </p:nvSpPr>
+        <p:spPr>
+          <a:xfrm>
+            <a:off x="548640" y="2404872"/>
+            <a:ext cx="420624" cy="420624"/>
+          </a:xfrm>
+          <a:prstGeom prst="ellipse">
+            <a:avLst/>
+          </a:prstGeom>
+          <a:solidFill>
+            <a:schemeClr val="accent1"/>
+          </a:solidFill>
+          <a:ln/>
+        </p:spPr>
+      </p:sp>
+      <p:sp>
+        <p:nvSpPr>
+          <p:cNvPr id="8" name="Text 6"/>
+          <p:cNvSpPr txBox="1"/>
+          <p:nvPr/>
+        </p:nvSpPr>
+        <p:spPr>
+          <a:xfrm>
+            <a:off x="548640" y="2404872"/>
+            <a:ext cx="420624" cy="420624"/>
+          </a:xfrm>
+          <a:prstGeom prst="rect">
+            <a:avLst/>
+          </a:prstGeom>
+          <a:noFill/>
+          <a:ln/>
+        </p:spPr>
+        <p:txBody>
+          <a:bodyPr wrap="square" lIns="0" tIns="0" rIns="0" bIns="0" rtlCol="0" anchor="ctr"/>
+          <a:lstStyle/>
+          <a:p>
+            <a:pPr algn="ctr" indent="0" marL="0">
+              <a:buNone/>
+            </a:pPr>
+            <a:r>
+              <a:rPr lang="en-US" sz="1400" b="1" dirty="0">
+                <a:solidFill>
+                  <a:schemeClr val="bg1"/>
+                </a:solidFill>
+              </a:rPr>
+              <a:t>2</a:t>
+            </a:r>
+            <a:endParaRPr lang="en-US" sz="1400" dirty="0"/>
+          </a:p>
+        </p:txBody>
+      </p:sp>
+      <p:sp>
+        <p:nvSpPr>
+          <p:cNvPr id="9" name="Text 7"/>
+          <p:cNvSpPr txBox="1"/>
+          <p:nvPr/>
+        </p:nvSpPr>
+        <p:spPr>
+          <a:xfrm>
+            <a:off x="1097280" y="2331720"/>
+            <a:ext cx="5669280" cy="640080"/>
+          </a:xfrm>
+          <a:prstGeom prst="rect">
+            <a:avLst/>
+          </a:prstGeom>
+          <a:noFill/>
+          <a:ln/>
+        </p:spPr>
+        <p:txBody>
+          <a:bodyPr wrap="square" lIns="0" tIns="0" rIns="0" bIns="0" rtlCol="0" anchor="ctr"/>
+          <a:lstStyle/>
+          <a:p>
+            <a:pPr indent="0" marL="0">
+              <a:buNone/>
+            </a:pPr>
+            <a:r>
+              <a:rPr lang="en-US" sz="1150" b="1" dirty="0">
+                <a:solidFill>
+                  <a:srgbClr val="00338D"/>
+                </a:solidFill>
+              </a:rPr>
+              <a:t>Analyse</a:t>
+            </a:r>
+            <a:endParaRPr lang="en-US" sz="1150" dirty="0"/>
+          </a:p>
+          <a:p>
+            <a:pPr indent="0" marL="0">
+              <a:buNone/>
+            </a:pPr>
+            <a:r>
+              <a:rPr lang="en-US" sz="1150" dirty="0">
+                <a:solidFill>
+                  <a:schemeClr val="tx1"/>
+                </a:solidFill>
+              </a:rPr>
+              <a:t>Affiner les US à partir des critères d'acceptation ; identifier au plus tôt les jeux de données</a:t>
+            </a:r>
+            <a:endParaRPr lang="en-US" sz="1150" dirty="0"/>
+          </a:p>
+        </p:txBody>
+      </p:sp>
+      <p:sp>
+        <p:nvSpPr>
+          <p:cNvPr id="10" name="num"/>
+          <p:cNvSpPr/>
+          <p:nvPr/>
+        </p:nvSpPr>
+        <p:spPr>
+          <a:xfrm>
+            <a:off x="548640" y="3090672"/>
+            <a:ext cx="420624" cy="420624"/>
+          </a:xfrm>
+          <a:prstGeom prst="ellipse">
+            <a:avLst/>
+          </a:prstGeom>
+          <a:solidFill>
+            <a:schemeClr val="accent1"/>
+          </a:solidFill>
+          <a:ln/>
+        </p:spPr>
+      </p:sp>
+      <p:sp>
+        <p:nvSpPr>
+          <p:cNvPr id="11" name="Text 9"/>
+          <p:cNvSpPr txBox="1"/>
+          <p:nvPr/>
+        </p:nvSpPr>
+        <p:spPr>
+          <a:xfrm>
+            <a:off x="548640" y="3090672"/>
+            <a:ext cx="420624" cy="420624"/>
+          </a:xfrm>
+          <a:prstGeom prst="rect">
+            <a:avLst/>
+          </a:prstGeom>
+          <a:noFill/>
+          <a:ln/>
+        </p:spPr>
+        <p:txBody>
+          <a:bodyPr wrap="square" lIns="0" tIns="0" rIns="0" bIns="0" rtlCol="0" anchor="ctr"/>
+          <a:lstStyle/>
+          <a:p>
+            <a:pPr algn="ctr" indent="0" marL="0">
+              <a:buNone/>
+            </a:pPr>
+            <a:r>
+              <a:rPr lang="en-US" sz="1400" b="1" dirty="0">
+                <a:solidFill>
+                  <a:schemeClr val="bg1"/>
+                </a:solidFill>
+              </a:rPr>
+              <a:t>3</a:t>
+            </a:r>
+            <a:endParaRPr lang="en-US" sz="1400" dirty="0"/>
+          </a:p>
+        </p:txBody>
+      </p:sp>
+      <p:sp>
+        <p:nvSpPr>
+          <p:cNvPr id="12" name="Text 10"/>
+          <p:cNvSpPr txBox="1"/>
+          <p:nvPr/>
+        </p:nvSpPr>
+        <p:spPr>
+          <a:xfrm>
+            <a:off x="1097280" y="3017520"/>
+            <a:ext cx="5669280" cy="640080"/>
+          </a:xfrm>
+          <a:prstGeom prst="rect">
+            <a:avLst/>
+          </a:prstGeom>
+          <a:noFill/>
+          <a:ln/>
+        </p:spPr>
+        <p:txBody>
+          <a:bodyPr wrap="square" lIns="0" tIns="0" rIns="0" bIns="0" rtlCol="0" anchor="ctr"/>
+          <a:lstStyle/>
+          <a:p>
+            <a:pPr indent="0" marL="0">
+              <a:buNone/>
+            </a:pPr>
+            <a:r>
+              <a:rPr lang="en-US" sz="1150" b="1" dirty="0">
+                <a:solidFill>
+                  <a:srgbClr val="00338D"/>
+                </a:solidFill>
+              </a:rPr>
+              <a:t>Conception et implémentation</a:t>
+            </a:r>
+            <a:endParaRPr lang="en-US" sz="1150" dirty="0"/>
+          </a:p>
+          <a:p>
+            <a:pPr indent="0" marL="0">
+              <a:buNone/>
+            </a:pPr>
+            <a:r>
+              <a:rPr lang="en-US" sz="1150" dirty="0">
+                <a:solidFill>
+                  <a:schemeClr val="tx1"/>
+                </a:solidFill>
+              </a:rPr>
+              <a:t>Concevoir les tests, structurés dans une suite dédiée InfoCAC dans Azure Test Plans</a:t>
+            </a:r>
+            <a:endParaRPr lang="en-US" sz="1150" dirty="0"/>
+          </a:p>
+        </p:txBody>
+      </p:sp>
+      <p:sp>
+        <p:nvSpPr>
+          <p:cNvPr id="13" name="num"/>
+          <p:cNvSpPr/>
+          <p:nvPr/>
+        </p:nvSpPr>
+        <p:spPr>
+          <a:xfrm>
+            <a:off x="548640" y="3776472"/>
+            <a:ext cx="420624" cy="420624"/>
+          </a:xfrm>
+          <a:prstGeom prst="ellipse">
+            <a:avLst/>
+          </a:prstGeom>
+          <a:solidFill>
+            <a:schemeClr val="accent1"/>
+          </a:solidFill>
+          <a:ln/>
+        </p:spPr>
+      </p:sp>
+      <p:sp>
+        <p:nvSpPr>
+          <p:cNvPr id="14" name="Text 12"/>
+          <p:cNvSpPr txBox="1"/>
+          <p:nvPr/>
+        </p:nvSpPr>
+        <p:spPr>
+          <a:xfrm>
+            <a:off x="548640" y="3776472"/>
+            <a:ext cx="420624" cy="420624"/>
+          </a:xfrm>
+          <a:prstGeom prst="rect">
+            <a:avLst/>
+          </a:prstGeom>
+          <a:noFill/>
+          <a:ln/>
+        </p:spPr>
+        <p:txBody>
+          <a:bodyPr wrap="square" lIns="0" tIns="0" rIns="0" bIns="0" rtlCol="0" anchor="ctr"/>
+          <a:lstStyle/>
+          <a:p>
+            <a:pPr algn="ctr" indent="0" marL="0">
+              <a:buNone/>
+            </a:pPr>
+            <a:r>
+              <a:rPr lang="en-US" sz="1400" b="1" dirty="0">
+                <a:solidFill>
+                  <a:schemeClr val="bg1"/>
+                </a:solidFill>
+              </a:rPr>
+              <a:t>4</a:t>
+            </a:r>
+            <a:endParaRPr lang="en-US" sz="1400" dirty="0"/>
+          </a:p>
+        </p:txBody>
+      </p:sp>
+      <p:sp>
+        <p:nvSpPr>
+          <p:cNvPr id="15" name="Text 13"/>
+          <p:cNvSpPr txBox="1"/>
+          <p:nvPr/>
+        </p:nvSpPr>
+        <p:spPr>
+          <a:xfrm>
+            <a:off x="1097280" y="3703320"/>
+            <a:ext cx="5669280" cy="640080"/>
+          </a:xfrm>
+          <a:prstGeom prst="rect">
+            <a:avLst/>
+          </a:prstGeom>
+          <a:noFill/>
+          <a:ln/>
+        </p:spPr>
+        <p:txBody>
+          <a:bodyPr wrap="square" lIns="0" tIns="0" rIns="0" bIns="0" rtlCol="0" anchor="ctr"/>
+          <a:lstStyle/>
+          <a:p>
+            <a:pPr indent="0" marL="0">
+              <a:buNone/>
+            </a:pPr>
+            <a:r>
+              <a:rPr lang="en-US" sz="1150" b="1" dirty="0">
+                <a:solidFill>
+                  <a:srgbClr val="00338D"/>
+                </a:solidFill>
+              </a:rPr>
+              <a:t>Exécution et anomalies</a:t>
+            </a:r>
+            <a:endParaRPr lang="en-US" sz="1150" dirty="0"/>
+          </a:p>
+          <a:p>
+            <a:pPr indent="0" marL="0">
+              <a:buNone/>
+            </a:pPr>
+            <a:r>
+              <a:rPr lang="en-US" sz="1150" dirty="0">
+                <a:solidFill>
+                  <a:schemeClr val="tx1"/>
+                </a:solidFill>
+              </a:rPr>
+              <a:t>Suivre l'avancement sur un tableau de bord Azure DevOps ; exécuter les tests des US et identifier les tests de régression</a:t>
+            </a:r>
+            <a:endParaRPr lang="en-US" sz="1150" dirty="0"/>
+          </a:p>
+        </p:txBody>
+      </p:sp>
+      <p:sp>
+        <p:nvSpPr>
+          <p:cNvPr id="16" name="num"/>
+          <p:cNvSpPr/>
+          <p:nvPr/>
+        </p:nvSpPr>
+        <p:spPr>
+          <a:xfrm>
+            <a:off x="548640" y="4462272"/>
+            <a:ext cx="420624" cy="420624"/>
+          </a:xfrm>
+          <a:prstGeom prst="ellipse">
+            <a:avLst/>
+          </a:prstGeom>
+          <a:solidFill>
+            <a:schemeClr val="accent1"/>
+          </a:solidFill>
+          <a:ln/>
+        </p:spPr>
+      </p:sp>
+      <p:sp>
+        <p:nvSpPr>
+          <p:cNvPr id="17" name="Text 15"/>
+          <p:cNvSpPr txBox="1"/>
+          <p:nvPr/>
+        </p:nvSpPr>
+        <p:spPr>
+          <a:xfrm>
+            <a:off x="548640" y="4462272"/>
+            <a:ext cx="420624" cy="420624"/>
+          </a:xfrm>
+          <a:prstGeom prst="rect">
+            <a:avLst/>
+          </a:prstGeom>
+          <a:noFill/>
+          <a:ln/>
+        </p:spPr>
+        <p:txBody>
+          <a:bodyPr wrap="square" lIns="0" tIns="0" rIns="0" bIns="0" rtlCol="0" anchor="ctr"/>
+          <a:lstStyle/>
+          <a:p>
+            <a:pPr algn="ctr" indent="0" marL="0">
+              <a:buNone/>
+            </a:pPr>
+            <a:r>
+              <a:rPr lang="en-US" sz="1400" b="1" dirty="0">
+                <a:solidFill>
+                  <a:schemeClr val="bg1"/>
+                </a:solidFill>
+              </a:rPr>
+              <a:t>5</a:t>
+            </a:r>
+            <a:endParaRPr lang="en-US" sz="1400" dirty="0"/>
+          </a:p>
+        </p:txBody>
+      </p:sp>
+      <p:sp>
+        <p:nvSpPr>
+          <p:cNvPr id="18" name="Text 16"/>
+          <p:cNvSpPr txBox="1"/>
+          <p:nvPr/>
+        </p:nvSpPr>
+        <p:spPr>
+          <a:xfrm>
+            <a:off x="1097280" y="4389120"/>
+            <a:ext cx="5669280" cy="640080"/>
+          </a:xfrm>
+          <a:prstGeom prst="rect">
+            <a:avLst/>
+          </a:prstGeom>
+          <a:noFill/>
+          <a:ln/>
+        </p:spPr>
+        <p:txBody>
+          <a:bodyPr wrap="square" lIns="0" tIns="0" rIns="0" bIns="0" rtlCol="0" anchor="ctr"/>
+          <a:lstStyle/>
+          <a:p>
+            <a:pPr indent="0" marL="0">
+              <a:buNone/>
+            </a:pPr>
+            <a:r>
+              <a:rPr lang="en-US" sz="1150" b="1" dirty="0">
+                <a:solidFill>
+                  <a:srgbClr val="00338D"/>
+                </a:solidFill>
+              </a:rPr>
+              <a:t>Clôture</a:t>
+            </a:r>
+            <a:endParaRPr lang="en-US" sz="1150" dirty="0"/>
+          </a:p>
+          <a:p>
+            <a:pPr indent="0" marL="0">
+              <a:buNone/>
+            </a:pPr>
+            <a:r>
+              <a:rPr lang="en-US" sz="1150" dirty="0">
+                <a:solidFill>
+                  <a:schemeClr val="tx1"/>
+                </a:solidFill>
+              </a:rPr>
+              <a:t>Produire le bilan de test avant chaque release</a:t>
+            </a:r>
+            <a:endParaRPr lang="en-US" sz="1150" dirty="0"/>
+          </a:p>
+        </p:txBody>
+      </p:sp>
+      <p:sp>
+        <p:nvSpPr>
+          <p:cNvPr id="19" name="num"/>
+          <p:cNvSpPr/>
+          <p:nvPr/>
+        </p:nvSpPr>
+        <p:spPr>
+          <a:xfrm>
+            <a:off x="548640" y="5148072"/>
+            <a:ext cx="420624" cy="420624"/>
+          </a:xfrm>
+          <a:prstGeom prst="ellipse">
+            <a:avLst/>
+          </a:prstGeom>
+          <a:solidFill>
+            <a:schemeClr val="accent1"/>
+          </a:solidFill>
+          <a:ln/>
+        </p:spPr>
+      </p:sp>
+      <p:sp>
+        <p:nvSpPr>
+          <p:cNvPr id="20" name="Text 18"/>
+          <p:cNvSpPr txBox="1"/>
+          <p:nvPr/>
+        </p:nvSpPr>
+        <p:spPr>
+          <a:xfrm>
+            <a:off x="548640" y="5148072"/>
+            <a:ext cx="420624" cy="420624"/>
+          </a:xfrm>
+          <a:prstGeom prst="rect">
+            <a:avLst/>
+          </a:prstGeom>
+          <a:noFill/>
+          <a:ln/>
+        </p:spPr>
+        <p:txBody>
+          <a:bodyPr wrap="square" lIns="0" tIns="0" rIns="0" bIns="0" rtlCol="0" anchor="ctr"/>
+          <a:lstStyle/>
+          <a:p>
+            <a:pPr algn="ctr" indent="0" marL="0">
+              <a:buNone/>
+            </a:pPr>
+            <a:r>
+              <a:rPr lang="en-US" sz="1400" b="1" dirty="0">
+                <a:solidFill>
+                  <a:schemeClr val="bg1"/>
+                </a:solidFill>
+              </a:rPr>
+              <a:t>6</a:t>
+            </a:r>
+            <a:endParaRPr lang="en-US" sz="1400" dirty="0"/>
+          </a:p>
+        </p:txBody>
+      </p:sp>
+      <p:sp>
+        <p:nvSpPr>
+          <p:cNvPr id="21" name="Text 19"/>
+          <p:cNvSpPr txBox="1"/>
+          <p:nvPr/>
+        </p:nvSpPr>
+        <p:spPr>
+          <a:xfrm>
+            <a:off x="1097280" y="5074920"/>
+            <a:ext cx="5669280" cy="640080"/>
+          </a:xfrm>
+          <a:prstGeom prst="rect">
+            <a:avLst/>
+          </a:prstGeom>
+          <a:noFill/>
+          <a:ln/>
+        </p:spPr>
+        <p:txBody>
+          <a:bodyPr wrap="square" lIns="0" tIns="0" rIns="0" bIns="0" rtlCol="0" anchor="ctr"/>
+          <a:lstStyle/>
+          <a:p>
+            <a:pPr indent="0" marL="0">
+              <a:buNone/>
+            </a:pPr>
+            <a:r>
+              <a:rPr lang="en-US" sz="1150" b="1" dirty="0">
+                <a:solidFill>
+                  <a:srgbClr val="00338D"/>
+                </a:solidFill>
+              </a:rPr>
+              <a:t>Suivi et pilotage</a:t>
+            </a:r>
+            <a:endParaRPr lang="en-US" sz="1150" dirty="0"/>
+          </a:p>
+          <a:p>
+            <a:pPr indent="0" marL="0">
+              <a:buNone/>
+            </a:pPr>
+            <a:r>
+              <a:rPr lang="en-US" sz="1150" dirty="0">
+                <a:solidFill>
+                  <a:schemeClr val="tx1"/>
+                </a:solidFill>
+              </a:rPr>
+              <a:t>Exécution des tests automatisés, anomalies ouvertes, qualité du code dans Sonar, indicateurs de fabrication : couverture des TU, vulnérabilités, au moins un test par US</a:t>
+            </a:r>
+            <a:endParaRPr lang="en-US" sz="1150" dirty="0"/>
+          </a:p>
+        </p:txBody>
+      </p:sp>
+      <p:sp>
+        <p:nvSpPr>
+          <p:cNvPr id="22" name="card"/>
+          <p:cNvSpPr/>
+          <p:nvPr/>
+        </p:nvSpPr>
+        <p:spPr>
+          <a:xfrm>
+            <a:off x="7132320" y="1645920"/>
+            <a:ext cx="4480560" cy="3291840"/>
+          </a:xfrm>
+          <a:prstGeom prst="roundRect">
+            <a:avLst>
+              <a:gd name="adj" fmla="val 2778"/>
+            </a:avLst>
+          </a:prstGeom>
+          <a:solidFill>
+            <a:schemeClr val="tx2"/>
+          </a:solidFill>
+          <a:ln/>
+        </p:spPr>
+      </p:sp>
+      <p:sp>
+        <p:nvSpPr>
+          <p:cNvPr id="23" name="Text 21"/>
+          <p:cNvSpPr txBox="1"/>
+          <p:nvPr/>
+        </p:nvSpPr>
+        <p:spPr>
+          <a:xfrm>
+            <a:off x="7360920" y="1783080"/>
+            <a:ext cx="4023360" cy="365760"/>
+          </a:xfrm>
+          <a:prstGeom prst="rect">
+            <a:avLst/>
+          </a:prstGeom>
+          <a:noFill/>
+          <a:ln/>
+        </p:spPr>
+        <p:txBody>
+          <a:bodyPr wrap="square" lIns="0" tIns="0" rIns="0" bIns="0" rtlCol="0" anchor="t"/>
+          <a:lstStyle/>
+          <a:p>
+            <a:pPr indent="0" marL="0">
+              <a:buNone/>
+            </a:pPr>
+            <a:r>
+              <a:rPr lang="en-US" sz="1600" b="1" dirty="0">
+                <a:solidFill>
+                  <a:schemeClr val="bg1"/>
+                </a:solidFill>
+              </a:rPr>
+              <a:t>Livrables attendus</a:t>
+            </a:r>
+            <a:endParaRPr lang="en-US" sz="1600" dirty="0"/>
+          </a:p>
+        </p:txBody>
+      </p:sp>
+      <p:sp>
+        <p:nvSpPr>
+          <p:cNvPr id="24" name="Text 22"/>
+          <p:cNvSpPr txBox="1"/>
+          <p:nvPr/>
+        </p:nvSpPr>
+        <p:spPr>
+          <a:xfrm>
+            <a:off x="7360920" y="2286000"/>
+            <a:ext cx="4069080" cy="3383280"/>
+          </a:xfrm>
+          <a:prstGeom prst="rect">
+            <a:avLst/>
+          </a:prstGeom>
+          <a:noFill/>
+          <a:ln/>
+        </p:spPr>
+        <p:txBody>
+          <a:bodyPr wrap="square" lIns="0" tIns="0" rIns="0" bIns="0" rtlCol="0" anchor="t"/>
+          <a:lstStyle/>
+          <a:p>
+            <a:pPr marL="342900" indent="-342900">
+              <a:spcAft>
+                <a:spcPts val="800"/>
+              </a:spcAft>
+              <a:buSzPct val="100000"/>
+              <a:buChar char="•"/>
+            </a:pPr>
+            <a:r>
+              <a:rPr lang="en-US" sz="1300" dirty="0">
+                <a:solidFill>
+                  <a:schemeClr val="bg1"/>
+                </a:solidFill>
+              </a:rPr>
+              <a:t>Stratégie de test validée et vision d'automatisation</a:t>
+            </a:r>
+            <a:endParaRPr lang="en-US" sz="1300" dirty="0"/>
+          </a:p>
+          <a:p>
+            <a:pPr marL="342900" indent="-342900">
+              <a:spcAft>
+                <a:spcPts val="800"/>
+              </a:spcAft>
+              <a:buSzPct val="100000"/>
+              <a:buChar char="•"/>
+            </a:pPr>
+            <a:r>
+              <a:rPr lang="en-US" sz="1300" dirty="0">
+                <a:solidFill>
+                  <a:schemeClr val="bg1"/>
+                </a:solidFill>
+              </a:rPr>
+              <a:t>Code des tests unitaires, par les développeurs</a:t>
+            </a:r>
+            <a:endParaRPr lang="en-US" sz="1300" dirty="0"/>
+          </a:p>
+          <a:p>
+            <a:pPr marL="342900" indent="-342900">
+              <a:spcAft>
+                <a:spcPts val="800"/>
+              </a:spcAft>
+              <a:buSzPct val="100000"/>
+              <a:buChar char="•"/>
+            </a:pPr>
+            <a:r>
+              <a:rPr lang="en-US" sz="1300" dirty="0">
+                <a:solidFill>
+                  <a:schemeClr val="bg1"/>
+                </a:solidFill>
+              </a:rPr>
+              <a:t>Tests API Playwright sur le contrat OpenAPI</a:t>
+            </a:r>
+            <a:endParaRPr lang="en-US" sz="1300" dirty="0"/>
+          </a:p>
+          <a:p>
+            <a:pPr marL="342900" indent="-342900">
+              <a:spcAft>
+                <a:spcPts val="800"/>
+              </a:spcAft>
+              <a:buSzPct val="100000"/>
+              <a:buChar char="•"/>
+            </a:pPr>
+            <a:r>
+              <a:rPr lang="en-US" sz="1300" dirty="0">
+                <a:solidFill>
+                  <a:schemeClr val="bg1"/>
+                </a:solidFill>
+              </a:rPr>
+              <a:t>Patrimoine de tests dans Azure Test Plans</a:t>
+            </a:r>
+            <a:endParaRPr lang="en-US" sz="1300" dirty="0"/>
+          </a:p>
+          <a:p>
+            <a:pPr marL="342900" indent="-342900">
+              <a:spcAft>
+                <a:spcPts val="800"/>
+              </a:spcAft>
+              <a:buSzPct val="100000"/>
+              <a:buChar char="•"/>
+            </a:pPr>
+            <a:r>
+              <a:rPr lang="en-US" sz="1300" dirty="0">
+                <a:solidFill>
+                  <a:schemeClr val="bg1"/>
+                </a:solidFill>
+              </a:rPr>
+              <a:t>Résultats d'exécution des tests manuels et automatisés dans Test Plans</a:t>
+            </a:r>
+            <a:endParaRPr lang="en-US" sz="1300" dirty="0"/>
+          </a:p>
+          <a:p>
+            <a:pPr marL="342900" indent="-342900">
+              <a:spcAft>
+                <a:spcPts val="800"/>
+              </a:spcAft>
+              <a:buSzPct val="100000"/>
+              <a:buChar char="•"/>
+            </a:pPr>
+            <a:r>
+              <a:rPr lang="en-US" sz="1300" dirty="0">
+                <a:solidFill>
+                  <a:schemeClr val="bg1"/>
+                </a:solidFill>
+              </a:rPr>
+              <a:t>Bilan de test avant une release et la mise en production</a:t>
+            </a:r>
+            <a:endParaRPr lang="en-US" sz="1300" dirty="0"/>
+          </a:p>
+        </p:txBody>
+      </p:sp>
+      <p:sp>
+        <p:nvSpPr>
+          <p:cNvPr id="25" name="Slide Number Placeholder 0"/>
+          <p:cNvSpPr>
+            <a:spLocks noGrp="1"/>
+          </p:cNvSpPr>
+          <p:nvPr>
+            <p:ph type="sldNum" sz="quarter" idx="4294967295"/>
+          </p:nvPr>
+        </p:nvSpPr>
+        <p:spPr>
+          <a:xfrm>
+            <a:off x="11155680" y="6446520"/>
+            <a:ext cx="457200" cy="274320"/>
+          </a:xfrm>
+          <a:prstGeom prst="rect">
+            <a:avLst/>
+          </a:prstGeom>
+          <a:extLst>
+            <a:ext uri="{C572A759-6A51-4108-AA02-DFA0A04FC94B}">
+              <ma14:wrappingTextBoxFlag xmlns:ma14="http://schemas.microsoft.com/office/mac/drawingml/2011/main" val="0"/>
+            </a:ext>
+          </a:extLst>
+        </p:spPr>
+        <p:txBody>
+          <a:bodyPr/>
+          <a:lstStyle>
+            <a:lvl1pPr>
+              <a:defRPr sz="1000">
+                <a:solidFill>
+                  <a:schemeClr val="accent4"/>
+                </a:solidFill>
+              </a:defRPr>
+            </a:lvl1pPr>
+          </a:lstStyle>
+          <a:p>
+            <a:pPr algn="r"/>
+            <a:fld id="{F7021451-1387-4CA6-816F-3879F97B5CBC}" type="slidenum">
+              <a:rPr b="0" lang="en-US"/>
+              <a:t>13</a:t>
+            </a:fld>
+            <a:endParaRPr lang="en-US"/>
+          </a:p>
+        </p:txBody>
+      </p:sp>
+    </p:spTree>
+  </p:cSld>
+  <p:clrMapOvr>
+    <a:masterClrMapping/>
+  </p:clrMapOvr>
+</p:sld>
+</file>
+
+<file path=ppt/slides/slide14.xml><?xml version="1.0" encoding="utf-8"?>
+<p:sld xmlns:a="http://schemas.openxmlformats.org/drawingml/2006/main" xmlns:r="http://schemas.openxmlformats.org/officeDocument/2006/relationships" xmlns:p="http://schemas.openxmlformats.org/presentationml/2006/main">
+  <p:cSld name="Slide 14">
+    <p:spTree>
+      <p:nvGrpSpPr>
+        <p:cNvPr id="1" name=""/>
+        <p:cNvGrpSpPr/>
+        <p:nvPr/>
+      </p:nvGrpSpPr>
+      <p:grpSpPr>
+        <a:xfrm>
+          <a:off x="0" y="0"/>
+          <a:ext cx="0" cy="0"/>
+          <a:chOff x="0" y="0"/>
+          <a:chExt cx="0" cy="0"/>
+        </a:xfrm>
+      </p:grpSpPr>
+      <p:sp>
+        <p:nvSpPr>
+          <p:cNvPr id="2" name="Text 0"/>
+          <p:cNvSpPr/>
+          <p:nvPr>
+            <p:ph idx="100" type="title" hasCustomPrompt="1"/>
+          </p:nvPr>
+        </p:nvSpPr>
+        <p:spPr>
+          <a:xfrm>
+            <a:off x="548640" y="320040"/>
+            <a:ext cx="11064240" cy="640080"/>
+          </a:xfrm>
+          <a:prstGeom prst="rect">
+            <a:avLst/>
+          </a:prstGeom>
+          <a:noFill/>
+          <a:ln/>
+        </p:spPr>
+        <p:txBody>
+          <a:bodyPr wrap="square" lIns="0" tIns="0" rIns="0" bIns="0" rtlCol="0" anchor="ctr"/>
+          <a:lstStyle/>
+          <a:p>
+            <a:pPr algn="l" indent="0" marL="0">
+              <a:buNone/>
+            </a:pPr>
+            <a:r>
+              <a:rPr lang="en-US" sz="2800" b="1" dirty="0">
+                <a:solidFill>
+                  <a:schemeClr val="tx2"/>
+                </a:solidFill>
+              </a:rPr>
+              <a:t>Annexe : périmètre non fonctionnel et critères de suspension</a:t>
+            </a:r>
+            <a:endParaRPr lang="en-US" sz="2800" dirty="0"/>
+          </a:p>
+        </p:txBody>
+      </p:sp>
+      <p:sp>
+        <p:nvSpPr>
+          <p:cNvPr id="3" name="Text 0"/>
+          <p:cNvSpPr/>
+          <p:nvPr>
+            <p:ph idx="101" type="body" hasCustomPrompt="1"/>
+          </p:nvPr>
+        </p:nvSpPr>
+        <p:spPr>
+          <a:xfrm>
+            <a:off x="548640" y="960120"/>
+            <a:ext cx="11064240" cy="502920"/>
+          </a:xfrm>
+          <a:prstGeom prst="rect">
+            <a:avLst/>
+          </a:prstGeom>
+          <a:noFill/>
+          <a:ln/>
+        </p:spPr>
+        <p:txBody>
+          <a:bodyPr wrap="square" lIns="0" tIns="0" rIns="0" bIns="0" rtlCol="0" anchor="t"/>
+          <a:lstStyle/>
+          <a:p>
+            <a:pPr algn="l" indent="0" marL="0">
+              <a:buNone/>
+            </a:pPr>
+            <a:r>
+              <a:rPr lang="en-US" sz="1600" i="1" dirty="0">
+                <a:solidFill>
+                  <a:schemeClr val="accent1"/>
+                </a:solidFill>
+              </a:rPr>
+              <a:t>Ce qui se teste hors fonctionnel, et quand on arrête l'activité de test.</a:t>
+            </a:r>
+            <a:endParaRPr lang="en-US" sz="1600" dirty="0"/>
+          </a:p>
+        </p:txBody>
+      </p:sp>
+      <p:graphicFrame>
+        <p:nvGraphicFramePr>
+          <p:cNvPr id="15" name="table-nf"/>
+          <p:cNvGraphicFramePr>
+            <a:graphicFrameLocks noGrp="1"/>
+          </p:cNvGraphicFramePr>
+          <p:nvPr>
+            <p:extLst>
+              <p:ext uri="{D42A27DB-BD31-4B8C-83A1-F6EECF244321}">
+                <p14:modId xmlns:p14="http://schemas.microsoft.com/office/powerpoint/2010/main" val="1579011935"/>
+              </p:ext>
+            </p:extLst>
+          </p:nvPr>
+        </p:nvGraphicFramePr>
+        <p:xfrm>
+          <a:off x="548640" y="1645920"/>
+          <a:ext cx="5943600" cy="914400"/>
+        </p:xfrm>
+        <a:graphic>
+          <a:graphicData uri="http://schemas.openxmlformats.org/drawingml/2006/table">
+            <a:tbl>
+              <a:tblPr/>
+              <a:tblGrid>
+                <a:gridCol w="1645920"/>
+                <a:gridCol w="4297680"/>
+              </a:tblGrid>
+              <a:tr h="566928">
+                <a:tc>
+                  <a:txBody>
+                    <a:bodyPr/>
+                    <a:lstStyle/>
+                    <a:p>
+                      <a:pPr indent="0" marL="0">
+                        <a:buNone/>
+                      </a:pPr>
+                      <a:r>
+                        <a:rPr lang="en-US" sz="1200" b="1" dirty="0">
+                          <a:solidFill>
+                            <a:srgbClr val="FFFFFF"/>
+                          </a:solidFill>
+                        </a:rPr>
+                        <a:t>Type de test</a:t>
+                      </a:r>
+                      <a:endParaRPr lang="en-US" sz="1200" dirty="0"/>
+                    </a:p>
+                  </a:txBody>
+                  <a:tcPr marL="73152" marR="73152" marT="36576" marB="36576" anchor="ctr">
+                    <a:lnL w="6350" cap="flat" cmpd="sng" algn="ctr">
+                      <a:solidFill>
+                        <a:srgbClr val="B8D4F0"/>
+                      </a:solidFill>
+                      <a:prstDash val="solid"/>
+                      <a:round/>
+                      <a:headEnd type="none" w="med" len="med"/>
+                      <a:tailEnd type="none" w="med" len="med"/>
+                    </a:lnL>
+                    <a:lnR w="6350" cap="flat" cmpd="sng" algn="ctr">
+                      <a:solidFill>
+                        <a:srgbClr val="B8D4F0"/>
+                      </a:solidFill>
+                      <a:prstDash val="solid"/>
+                      <a:round/>
+                      <a:headEnd type="none" w="med" len="med"/>
+                      <a:tailEnd type="none" w="med" len="med"/>
+                    </a:lnR>
+                    <a:lnT w="6350" cap="flat" cmpd="sng" algn="ctr">
+                      <a:solidFill>
+                        <a:srgbClr val="B8D4F0"/>
+                      </a:solidFill>
+                      <a:prstDash val="solid"/>
+                      <a:round/>
+                      <a:headEnd type="none" w="med" len="med"/>
+                      <a:tailEnd type="none" w="med" len="med"/>
+                    </a:lnT>
+                    <a:lnB w="6350" cap="flat" cmpd="sng" algn="ctr">
+                      <a:solidFill>
+                        <a:srgbClr val="B8D4F0"/>
+                      </a:solidFill>
+                      <a:prstDash val="solid"/>
+                      <a:round/>
+                      <a:headEnd type="none" w="med" len="med"/>
+                      <a:tailEnd type="none" w="med" len="med"/>
+                    </a:lnB>
+                    <a:solidFill>
+                      <a:srgbClr val="00338D"/>
+                    </a:solidFill>
+                  </a:tcPr>
+                </a:tc>
+                <a:tc>
+                  <a:txBody>
+                    <a:bodyPr/>
+                    <a:lstStyle/>
+                    <a:p>
+                      <a:pPr indent="0" marL="0">
+                        <a:buNone/>
+                      </a:pPr>
+                      <a:r>
+                        <a:rPr lang="en-US" sz="1200" b="1" dirty="0">
+                          <a:solidFill>
+                            <a:srgbClr val="FFFFFF"/>
+                          </a:solidFill>
+                        </a:rPr>
+                        <a:t>Pour InfoCAC</a:t>
+                      </a:r>
+                      <a:endParaRPr lang="en-US" sz="1200" dirty="0"/>
+                    </a:p>
+                  </a:txBody>
+                  <a:tcPr marL="73152" marR="73152" marT="36576" marB="36576" anchor="ctr">
+                    <a:lnL w="6350" cap="flat" cmpd="sng" algn="ctr">
+                      <a:solidFill>
+                        <a:srgbClr val="B8D4F0"/>
+                      </a:solidFill>
+                      <a:prstDash val="solid"/>
+                      <a:round/>
+                      <a:headEnd type="none" w="med" len="med"/>
+                      <a:tailEnd type="none" w="med" len="med"/>
+                    </a:lnL>
+                    <a:lnR w="6350" cap="flat" cmpd="sng" algn="ctr">
+                      <a:solidFill>
+                        <a:srgbClr val="B8D4F0"/>
+                      </a:solidFill>
+                      <a:prstDash val="solid"/>
+                      <a:round/>
+                      <a:headEnd type="none" w="med" len="med"/>
+                      <a:tailEnd type="none" w="med" len="med"/>
+                    </a:lnR>
+                    <a:lnT w="6350" cap="flat" cmpd="sng" algn="ctr">
+                      <a:solidFill>
+                        <a:srgbClr val="B8D4F0"/>
+                      </a:solidFill>
+                      <a:prstDash val="solid"/>
+                      <a:round/>
+                      <a:headEnd type="none" w="med" len="med"/>
+                      <a:tailEnd type="none" w="med" len="med"/>
+                    </a:lnT>
+                    <a:lnB w="6350" cap="flat" cmpd="sng" algn="ctr">
+                      <a:solidFill>
+                        <a:srgbClr val="B8D4F0"/>
+                      </a:solidFill>
+                      <a:prstDash val="solid"/>
+                      <a:round/>
+                      <a:headEnd type="none" w="med" len="med"/>
+                      <a:tailEnd type="none" w="med" len="med"/>
+                    </a:lnB>
+                    <a:solidFill>
+                      <a:srgbClr val="00338D"/>
+                    </a:solidFill>
+                  </a:tcPr>
+                </a:tc>
+              </a:tr>
+              <a:tr h="566928">
+                <a:tc>
+                  <a:txBody>
+                    <a:bodyPr/>
+                    <a:lstStyle/>
+                    <a:p>
+                      <a:pPr indent="0" marL="0">
+                        <a:buNone/>
+                      </a:pPr>
+                      <a:r>
+                        <a:rPr lang="en-US" sz="1150" b="1" dirty="0">
+                          <a:solidFill>
+                            <a:srgbClr val="1A1A2E"/>
+                          </a:solidFill>
+                        </a:rPr>
+                        <a:t>Sécurité</a:t>
+                      </a:r>
+                      <a:endParaRPr lang="en-US" sz="1150" dirty="0"/>
+                    </a:p>
+                  </a:txBody>
+                  <a:tcPr marL="73152" marR="73152" marT="36576" marB="36576" anchor="ctr">
+                    <a:lnL w="6350" cap="flat" cmpd="sng" algn="ctr">
+                      <a:solidFill>
+                        <a:srgbClr val="B8D4F0"/>
+                      </a:solidFill>
+                      <a:prstDash val="solid"/>
+                      <a:round/>
+                      <a:headEnd type="none" w="med" len="med"/>
+                      <a:tailEnd type="none" w="med" len="med"/>
+                    </a:lnL>
+                    <a:lnR w="6350" cap="flat" cmpd="sng" algn="ctr">
+                      <a:solidFill>
+                        <a:srgbClr val="B8D4F0"/>
+                      </a:solidFill>
+                      <a:prstDash val="solid"/>
+                      <a:round/>
+                      <a:headEnd type="none" w="med" len="med"/>
+                      <a:tailEnd type="none" w="med" len="med"/>
+                    </a:lnR>
+                    <a:lnT w="6350" cap="flat" cmpd="sng" algn="ctr">
+                      <a:solidFill>
+                        <a:srgbClr val="B8D4F0"/>
+                      </a:solidFill>
+                      <a:prstDash val="solid"/>
+                      <a:round/>
+                      <a:headEnd type="none" w="med" len="med"/>
+                      <a:tailEnd type="none" w="med" len="med"/>
+                    </a:lnT>
+                    <a:lnB w="6350" cap="flat" cmpd="sng" algn="ctr">
+                      <a:solidFill>
+                        <a:srgbClr val="B8D4F0"/>
+                      </a:solidFill>
+                      <a:prstDash val="solid"/>
+                      <a:round/>
+                      <a:headEnd type="none" w="med" len="med"/>
+                      <a:tailEnd type="none" w="med" len="med"/>
+                    </a:lnB>
+                    <a:solidFill>
+                      <a:srgbClr val="EEF3FA"/>
+                    </a:solidFill>
+                  </a:tcPr>
+                </a:tc>
+                <a:tc>
+                  <a:txBody>
+                    <a:bodyPr/>
+                    <a:lstStyle/>
+                    <a:p>
+                      <a:pPr indent="0" marL="0">
+                        <a:buNone/>
+                      </a:pPr>
+                      <a:r>
+                        <a:rPr lang="en-US" sz="1150" dirty="0">
+                          <a:solidFill>
+                            <a:srgbClr val="1A1A2E"/>
+                          </a:solidFill>
+                        </a:rPr>
+                        <a:t>Test d'intrusion en PREPROD, prévu par la stratégie</a:t>
+                      </a:r>
+                      <a:endParaRPr lang="en-US" sz="1150" dirty="0"/>
+                    </a:p>
+                  </a:txBody>
+                  <a:tcPr marL="73152" marR="73152" marT="36576" marB="36576" anchor="ctr">
+                    <a:lnL w="6350" cap="flat" cmpd="sng" algn="ctr">
+                      <a:solidFill>
+                        <a:srgbClr val="B8D4F0"/>
+                      </a:solidFill>
+                      <a:prstDash val="solid"/>
+                      <a:round/>
+                      <a:headEnd type="none" w="med" len="med"/>
+                      <a:tailEnd type="none" w="med" len="med"/>
+                    </a:lnL>
+                    <a:lnR w="6350" cap="flat" cmpd="sng" algn="ctr">
+                      <a:solidFill>
+                        <a:srgbClr val="B8D4F0"/>
+                      </a:solidFill>
+                      <a:prstDash val="solid"/>
+                      <a:round/>
+                      <a:headEnd type="none" w="med" len="med"/>
+                      <a:tailEnd type="none" w="med" len="med"/>
+                    </a:lnR>
+                    <a:lnT w="6350" cap="flat" cmpd="sng" algn="ctr">
+                      <a:solidFill>
+                        <a:srgbClr val="B8D4F0"/>
+                      </a:solidFill>
+                      <a:prstDash val="solid"/>
+                      <a:round/>
+                      <a:headEnd type="none" w="med" len="med"/>
+                      <a:tailEnd type="none" w="med" len="med"/>
+                    </a:lnT>
+                    <a:lnB w="6350" cap="flat" cmpd="sng" algn="ctr">
+                      <a:solidFill>
+                        <a:srgbClr val="B8D4F0"/>
+                      </a:solidFill>
+                      <a:prstDash val="solid"/>
+                      <a:round/>
+                      <a:headEnd type="none" w="med" len="med"/>
+                      <a:tailEnd type="none" w="med" len="med"/>
+                    </a:lnB>
+                    <a:solidFill>
+                      <a:srgbClr val="EEF3FA"/>
+                    </a:solidFill>
+                  </a:tcPr>
+                </a:tc>
+              </a:tr>
+              <a:tr h="566928">
+                <a:tc>
+                  <a:txBody>
+                    <a:bodyPr/>
+                    <a:lstStyle/>
+                    <a:p>
+                      <a:pPr indent="0" marL="0">
+                        <a:buNone/>
+                      </a:pPr>
+                      <a:r>
+                        <a:rPr lang="en-US" sz="1150" b="1" dirty="0">
+                          <a:solidFill>
+                            <a:srgbClr val="1A1A2E"/>
+                          </a:solidFill>
+                        </a:rPr>
+                        <a:t>Performance</a:t>
+                      </a:r>
+                      <a:endParaRPr lang="en-US" sz="1150" dirty="0"/>
+                    </a:p>
+                  </a:txBody>
+                  <a:tcPr marL="73152" marR="73152" marT="36576" marB="36576" anchor="ctr">
+                    <a:lnL w="6350" cap="flat" cmpd="sng" algn="ctr">
+                      <a:solidFill>
+                        <a:srgbClr val="B8D4F0"/>
+                      </a:solidFill>
+                      <a:prstDash val="solid"/>
+                      <a:round/>
+                      <a:headEnd type="none" w="med" len="med"/>
+                      <a:tailEnd type="none" w="med" len="med"/>
+                    </a:lnL>
+                    <a:lnR w="6350" cap="flat" cmpd="sng" algn="ctr">
+                      <a:solidFill>
+                        <a:srgbClr val="B8D4F0"/>
+                      </a:solidFill>
+                      <a:prstDash val="solid"/>
+                      <a:round/>
+                      <a:headEnd type="none" w="med" len="med"/>
+                      <a:tailEnd type="none" w="med" len="med"/>
+                    </a:lnR>
+                    <a:lnT w="6350" cap="flat" cmpd="sng" algn="ctr">
+                      <a:solidFill>
+                        <a:srgbClr val="B8D4F0"/>
+                      </a:solidFill>
+                      <a:prstDash val="solid"/>
+                      <a:round/>
+                      <a:headEnd type="none" w="med" len="med"/>
+                      <a:tailEnd type="none" w="med" len="med"/>
+                    </a:lnT>
+                    <a:lnB w="6350" cap="flat" cmpd="sng" algn="ctr">
+                      <a:solidFill>
+                        <a:srgbClr val="B8D4F0"/>
+                      </a:solidFill>
+                      <a:prstDash val="solid"/>
+                      <a:round/>
+                      <a:headEnd type="none" w="med" len="med"/>
+                      <a:tailEnd type="none" w="med" len="med"/>
+                    </a:lnB>
+                    <a:solidFill>
+                      <a:srgbClr val="FFFFFF"/>
+                    </a:solidFill>
+                  </a:tcPr>
+                </a:tc>
+                <a:tc>
+                  <a:txBody>
+                    <a:bodyPr/>
+                    <a:lstStyle/>
+                    <a:p>
+                      <a:pPr indent="0" marL="0">
+                        <a:buNone/>
+                      </a:pPr>
+                      <a:r>
+                        <a:rPr lang="en-US" sz="1150" dirty="0">
+                          <a:solidFill>
+                            <a:srgbClr val="1A1A2E"/>
+                          </a:solidFill>
+                        </a:rPr>
+                        <a:t>Non retenue par la stratégie</a:t>
+                      </a:r>
+                      <a:endParaRPr lang="en-US" sz="1150" dirty="0"/>
+                    </a:p>
+                  </a:txBody>
+                  <a:tcPr marL="73152" marR="73152" marT="36576" marB="36576" anchor="ctr">
+                    <a:lnL w="6350" cap="flat" cmpd="sng" algn="ctr">
+                      <a:solidFill>
+                        <a:srgbClr val="B8D4F0"/>
+                      </a:solidFill>
+                      <a:prstDash val="solid"/>
+                      <a:round/>
+                      <a:headEnd type="none" w="med" len="med"/>
+                      <a:tailEnd type="none" w="med" len="med"/>
+                    </a:lnL>
+                    <a:lnR w="6350" cap="flat" cmpd="sng" algn="ctr">
+                      <a:solidFill>
+                        <a:srgbClr val="B8D4F0"/>
+                      </a:solidFill>
+                      <a:prstDash val="solid"/>
+                      <a:round/>
+                      <a:headEnd type="none" w="med" len="med"/>
+                      <a:tailEnd type="none" w="med" len="med"/>
+                    </a:lnR>
+                    <a:lnT w="6350" cap="flat" cmpd="sng" algn="ctr">
+                      <a:solidFill>
+                        <a:srgbClr val="B8D4F0"/>
+                      </a:solidFill>
+                      <a:prstDash val="solid"/>
+                      <a:round/>
+                      <a:headEnd type="none" w="med" len="med"/>
+                      <a:tailEnd type="none" w="med" len="med"/>
+                    </a:lnT>
+                    <a:lnB w="6350" cap="flat" cmpd="sng" algn="ctr">
+                      <a:solidFill>
+                        <a:srgbClr val="B8D4F0"/>
+                      </a:solidFill>
+                      <a:prstDash val="solid"/>
+                      <a:round/>
+                      <a:headEnd type="none" w="med" len="med"/>
+                      <a:tailEnd type="none" w="med" len="med"/>
+                    </a:lnB>
+                    <a:solidFill>
+                      <a:srgbClr val="FFFFFF"/>
+                    </a:solidFill>
+                  </a:tcPr>
+                </a:tc>
+              </a:tr>
+              <a:tr h="566928">
+                <a:tc>
+                  <a:txBody>
+                    <a:bodyPr/>
+                    <a:lstStyle/>
+                    <a:p>
+                      <a:pPr indent="0" marL="0">
+                        <a:buNone/>
+                      </a:pPr>
+                      <a:r>
+                        <a:rPr lang="en-US" sz="1150" b="1" dirty="0">
+                          <a:solidFill>
+                            <a:srgbClr val="1A1A2E"/>
+                          </a:solidFill>
+                        </a:rPr>
+                        <a:t>Utilisabilité</a:t>
+                      </a:r>
+                      <a:endParaRPr lang="en-US" sz="1150" dirty="0"/>
+                    </a:p>
+                  </a:txBody>
+                  <a:tcPr marL="73152" marR="73152" marT="36576" marB="36576" anchor="ctr">
+                    <a:lnL w="6350" cap="flat" cmpd="sng" algn="ctr">
+                      <a:solidFill>
+                        <a:srgbClr val="B8D4F0"/>
+                      </a:solidFill>
+                      <a:prstDash val="solid"/>
+                      <a:round/>
+                      <a:headEnd type="none" w="med" len="med"/>
+                      <a:tailEnd type="none" w="med" len="med"/>
+                    </a:lnL>
+                    <a:lnR w="6350" cap="flat" cmpd="sng" algn="ctr">
+                      <a:solidFill>
+                        <a:srgbClr val="B8D4F0"/>
+                      </a:solidFill>
+                      <a:prstDash val="solid"/>
+                      <a:round/>
+                      <a:headEnd type="none" w="med" len="med"/>
+                      <a:tailEnd type="none" w="med" len="med"/>
+                    </a:lnR>
+                    <a:lnT w="6350" cap="flat" cmpd="sng" algn="ctr">
+                      <a:solidFill>
+                        <a:srgbClr val="B8D4F0"/>
+                      </a:solidFill>
+                      <a:prstDash val="solid"/>
+                      <a:round/>
+                      <a:headEnd type="none" w="med" len="med"/>
+                      <a:tailEnd type="none" w="med" len="med"/>
+                    </a:lnT>
+                    <a:lnB w="6350" cap="flat" cmpd="sng" algn="ctr">
+                      <a:solidFill>
+                        <a:srgbClr val="B8D4F0"/>
+                      </a:solidFill>
+                      <a:prstDash val="solid"/>
+                      <a:round/>
+                      <a:headEnd type="none" w="med" len="med"/>
+                      <a:tailEnd type="none" w="med" len="med"/>
+                    </a:lnB>
+                    <a:solidFill>
+                      <a:srgbClr val="EEF3FA"/>
+                    </a:solidFill>
+                  </a:tcPr>
+                </a:tc>
+                <a:tc>
+                  <a:txBody>
+                    <a:bodyPr/>
+                    <a:lstStyle/>
+                    <a:p>
+                      <a:pPr indent="0" marL="0">
+                        <a:buNone/>
+                      </a:pPr>
+                      <a:r>
+                        <a:rPr lang="en-US" sz="1150" dirty="0">
+                          <a:solidFill>
+                            <a:srgbClr val="1A1A2E"/>
+                          </a:solidFill>
+                        </a:rPr>
+                        <a:t>Recette métier et sessions exploratoires</a:t>
+                      </a:r>
+                      <a:endParaRPr lang="en-US" sz="1150" dirty="0"/>
+                    </a:p>
+                  </a:txBody>
+                  <a:tcPr marL="73152" marR="73152" marT="36576" marB="36576" anchor="ctr">
+                    <a:lnL w="6350" cap="flat" cmpd="sng" algn="ctr">
+                      <a:solidFill>
+                        <a:srgbClr val="B8D4F0"/>
+                      </a:solidFill>
+                      <a:prstDash val="solid"/>
+                      <a:round/>
+                      <a:headEnd type="none" w="med" len="med"/>
+                      <a:tailEnd type="none" w="med" len="med"/>
+                    </a:lnL>
+                    <a:lnR w="6350" cap="flat" cmpd="sng" algn="ctr">
+                      <a:solidFill>
+                        <a:srgbClr val="B8D4F0"/>
+                      </a:solidFill>
+                      <a:prstDash val="solid"/>
+                      <a:round/>
+                      <a:headEnd type="none" w="med" len="med"/>
+                      <a:tailEnd type="none" w="med" len="med"/>
+                    </a:lnR>
+                    <a:lnT w="6350" cap="flat" cmpd="sng" algn="ctr">
+                      <a:solidFill>
+                        <a:srgbClr val="B8D4F0"/>
+                      </a:solidFill>
+                      <a:prstDash val="solid"/>
+                      <a:round/>
+                      <a:headEnd type="none" w="med" len="med"/>
+                      <a:tailEnd type="none" w="med" len="med"/>
+                    </a:lnT>
+                    <a:lnB w="6350" cap="flat" cmpd="sng" algn="ctr">
+                      <a:solidFill>
+                        <a:srgbClr val="B8D4F0"/>
+                      </a:solidFill>
+                      <a:prstDash val="solid"/>
+                      <a:round/>
+                      <a:headEnd type="none" w="med" len="med"/>
+                      <a:tailEnd type="none" w="med" len="med"/>
+                    </a:lnB>
+                    <a:solidFill>
+                      <a:srgbClr val="EEF3FA"/>
+                    </a:solidFill>
+                  </a:tcPr>
+                </a:tc>
+              </a:tr>
+              <a:tr h="566928">
+                <a:tc>
+                  <a:txBody>
+                    <a:bodyPr/>
+                    <a:lstStyle/>
+                    <a:p>
+                      <a:pPr indent="0" marL="0">
+                        <a:buNone/>
+                      </a:pPr>
+                      <a:r>
+                        <a:rPr lang="en-US" sz="1150" b="1" dirty="0">
+                          <a:solidFill>
+                            <a:srgbClr val="1A1A2E"/>
+                          </a:solidFill>
+                        </a:rPr>
+                        <a:t>Maintenabilité</a:t>
+                      </a:r>
+                      <a:endParaRPr lang="en-US" sz="1150" dirty="0"/>
+                    </a:p>
+                  </a:txBody>
+                  <a:tcPr marL="73152" marR="73152" marT="36576" marB="36576" anchor="ctr">
+                    <a:lnL w="6350" cap="flat" cmpd="sng" algn="ctr">
+                      <a:solidFill>
+                        <a:srgbClr val="B8D4F0"/>
+                      </a:solidFill>
+                      <a:prstDash val="solid"/>
+                      <a:round/>
+                      <a:headEnd type="none" w="med" len="med"/>
+                      <a:tailEnd type="none" w="med" len="med"/>
+                    </a:lnL>
+                    <a:lnR w="6350" cap="flat" cmpd="sng" algn="ctr">
+                      <a:solidFill>
+                        <a:srgbClr val="B8D4F0"/>
+                      </a:solidFill>
+                      <a:prstDash val="solid"/>
+                      <a:round/>
+                      <a:headEnd type="none" w="med" len="med"/>
+                      <a:tailEnd type="none" w="med" len="med"/>
+                    </a:lnR>
+                    <a:lnT w="6350" cap="flat" cmpd="sng" algn="ctr">
+                      <a:solidFill>
+                        <a:srgbClr val="B8D4F0"/>
+                      </a:solidFill>
+                      <a:prstDash val="solid"/>
+                      <a:round/>
+                      <a:headEnd type="none" w="med" len="med"/>
+                      <a:tailEnd type="none" w="med" len="med"/>
+                    </a:lnT>
+                    <a:lnB w="6350" cap="flat" cmpd="sng" algn="ctr">
+                      <a:solidFill>
+                        <a:srgbClr val="B8D4F0"/>
+                      </a:solidFill>
+                      <a:prstDash val="solid"/>
+                      <a:round/>
+                      <a:headEnd type="none" w="med" len="med"/>
+                      <a:tailEnd type="none" w="med" len="med"/>
+                    </a:lnB>
+                    <a:solidFill>
+                      <a:srgbClr val="FFFFFF"/>
+                    </a:solidFill>
+                  </a:tcPr>
+                </a:tc>
+                <a:tc>
+                  <a:txBody>
+                    <a:bodyPr/>
+                    <a:lstStyle/>
+                    <a:p>
+                      <a:pPr indent="0" marL="0">
+                        <a:buNone/>
+                      </a:pPr>
+                      <a:r>
+                        <a:rPr lang="en-US" sz="1150" dirty="0">
+                          <a:solidFill>
+                            <a:srgbClr val="1A1A2E"/>
+                          </a:solidFill>
+                        </a:rPr>
+                        <a:t>Notes Sonar, seuils de la stratégie</a:t>
+                      </a:r>
+                      <a:endParaRPr lang="en-US" sz="1150" dirty="0"/>
+                    </a:p>
+                  </a:txBody>
+                  <a:tcPr marL="73152" marR="73152" marT="36576" marB="36576" anchor="ctr">
+                    <a:lnL w="6350" cap="flat" cmpd="sng" algn="ctr">
+                      <a:solidFill>
+                        <a:srgbClr val="B8D4F0"/>
+                      </a:solidFill>
+                      <a:prstDash val="solid"/>
+                      <a:round/>
+                      <a:headEnd type="none" w="med" len="med"/>
+                      <a:tailEnd type="none" w="med" len="med"/>
+                    </a:lnL>
+                    <a:lnR w="6350" cap="flat" cmpd="sng" algn="ctr">
+                      <a:solidFill>
+                        <a:srgbClr val="B8D4F0"/>
+                      </a:solidFill>
+                      <a:prstDash val="solid"/>
+                      <a:round/>
+                      <a:headEnd type="none" w="med" len="med"/>
+                      <a:tailEnd type="none" w="med" len="med"/>
+                    </a:lnR>
+                    <a:lnT w="6350" cap="flat" cmpd="sng" algn="ctr">
+                      <a:solidFill>
+                        <a:srgbClr val="B8D4F0"/>
+                      </a:solidFill>
+                      <a:prstDash val="solid"/>
+                      <a:round/>
+                      <a:headEnd type="none" w="med" len="med"/>
+                      <a:tailEnd type="none" w="med" len="med"/>
+                    </a:lnT>
+                    <a:lnB w="6350" cap="flat" cmpd="sng" algn="ctr">
+                      <a:solidFill>
+                        <a:srgbClr val="B8D4F0"/>
+                      </a:solidFill>
+                      <a:prstDash val="solid"/>
+                      <a:round/>
+                      <a:headEnd type="none" w="med" len="med"/>
+                      <a:tailEnd type="none" w="med" len="med"/>
+                    </a:lnB>
+                    <a:solidFill>
+                      <a:srgbClr val="FFFFFF"/>
+                    </a:solidFill>
+                  </a:tcPr>
+                </a:tc>
+              </a:tr>
+              <a:tr h="566928">
+                <a:tc>
+                  <a:txBody>
+                    <a:bodyPr/>
+                    <a:lstStyle/>
+                    <a:p>
+                      <a:pPr indent="0" marL="0">
+                        <a:buNone/>
+                      </a:pPr>
+                      <a:r>
+                        <a:rPr lang="en-US" sz="1150" b="1" dirty="0">
+                          <a:solidFill>
+                            <a:srgbClr val="1A1A2E"/>
+                          </a:solidFill>
+                        </a:rPr>
+                        <a:t>Compatibilité</a:t>
+                      </a:r>
+                      <a:endParaRPr lang="en-US" sz="1150" dirty="0"/>
+                    </a:p>
+                  </a:txBody>
+                  <a:tcPr marL="73152" marR="73152" marT="36576" marB="36576" anchor="ctr">
+                    <a:lnL w="6350" cap="flat" cmpd="sng" algn="ctr">
+                      <a:solidFill>
+                        <a:srgbClr val="B8D4F0"/>
+                      </a:solidFill>
+                      <a:prstDash val="solid"/>
+                      <a:round/>
+                      <a:headEnd type="none" w="med" len="med"/>
+                      <a:tailEnd type="none" w="med" len="med"/>
+                    </a:lnL>
+                    <a:lnR w="6350" cap="flat" cmpd="sng" algn="ctr">
+                      <a:solidFill>
+                        <a:srgbClr val="B8D4F0"/>
+                      </a:solidFill>
+                      <a:prstDash val="solid"/>
+                      <a:round/>
+                      <a:headEnd type="none" w="med" len="med"/>
+                      <a:tailEnd type="none" w="med" len="med"/>
+                    </a:lnR>
+                    <a:lnT w="6350" cap="flat" cmpd="sng" algn="ctr">
+                      <a:solidFill>
+                        <a:srgbClr val="B8D4F0"/>
+                      </a:solidFill>
+                      <a:prstDash val="solid"/>
+                      <a:round/>
+                      <a:headEnd type="none" w="med" len="med"/>
+                      <a:tailEnd type="none" w="med" len="med"/>
+                    </a:lnT>
+                    <a:lnB w="6350" cap="flat" cmpd="sng" algn="ctr">
+                      <a:solidFill>
+                        <a:srgbClr val="B8D4F0"/>
+                      </a:solidFill>
+                      <a:prstDash val="solid"/>
+                      <a:round/>
+                      <a:headEnd type="none" w="med" len="med"/>
+                      <a:tailEnd type="none" w="med" len="med"/>
+                    </a:lnB>
+                    <a:solidFill>
+                      <a:srgbClr val="EEF3FA"/>
+                    </a:solidFill>
+                  </a:tcPr>
+                </a:tc>
+                <a:tc>
+                  <a:txBody>
+                    <a:bodyPr/>
+                    <a:lstStyle/>
+                    <a:p>
+                      <a:pPr indent="0" marL="0">
+                        <a:buNone/>
+                      </a:pPr>
+                      <a:r>
+                        <a:rPr lang="en-US" sz="1150" dirty="0">
+                          <a:solidFill>
+                            <a:srgbClr val="1A1A2E"/>
+                          </a:solidFill>
+                        </a:rPr>
+                        <a:t>Navigateurs à confirmer</a:t>
+                      </a:r>
+                      <a:endParaRPr lang="en-US" sz="1150" dirty="0"/>
+                    </a:p>
+                  </a:txBody>
+                  <a:tcPr marL="73152" marR="73152" marT="36576" marB="36576" anchor="ctr">
+                    <a:lnL w="6350" cap="flat" cmpd="sng" algn="ctr">
+                      <a:solidFill>
+                        <a:srgbClr val="B8D4F0"/>
+                      </a:solidFill>
+                      <a:prstDash val="solid"/>
+                      <a:round/>
+                      <a:headEnd type="none" w="med" len="med"/>
+                      <a:tailEnd type="none" w="med" len="med"/>
+                    </a:lnL>
+                    <a:lnR w="6350" cap="flat" cmpd="sng" algn="ctr">
+                      <a:solidFill>
+                        <a:srgbClr val="B8D4F0"/>
+                      </a:solidFill>
+                      <a:prstDash val="solid"/>
+                      <a:round/>
+                      <a:headEnd type="none" w="med" len="med"/>
+                      <a:tailEnd type="none" w="med" len="med"/>
+                    </a:lnR>
+                    <a:lnT w="6350" cap="flat" cmpd="sng" algn="ctr">
+                      <a:solidFill>
+                        <a:srgbClr val="B8D4F0"/>
+                      </a:solidFill>
+                      <a:prstDash val="solid"/>
+                      <a:round/>
+                      <a:headEnd type="none" w="med" len="med"/>
+                      <a:tailEnd type="none" w="med" len="med"/>
+                    </a:lnT>
+                    <a:lnB w="6350" cap="flat" cmpd="sng" algn="ctr">
+                      <a:solidFill>
+                        <a:srgbClr val="B8D4F0"/>
+                      </a:solidFill>
+                      <a:prstDash val="solid"/>
+                      <a:round/>
+                      <a:headEnd type="none" w="med" len="med"/>
+                      <a:tailEnd type="none" w="med" len="med"/>
+                    </a:lnB>
+                    <a:solidFill>
+                      <a:srgbClr val="EEF3FA"/>
+                    </a:solidFill>
+                  </a:tcPr>
+                </a:tc>
+              </a:tr>
+              <a:tr h="566928">
+                <a:tc>
+                  <a:txBody>
+                    <a:bodyPr/>
+                    <a:lstStyle/>
+                    <a:p>
+                      <a:pPr indent="0" marL="0">
+                        <a:buNone/>
+                      </a:pPr>
+                      <a:r>
+                        <a:rPr lang="en-US" sz="1150" b="1" dirty="0">
+                          <a:solidFill>
+                            <a:srgbClr val="1A1A2E"/>
+                          </a:solidFill>
+                        </a:rPr>
+                        <a:t>Fiabilité</a:t>
+                      </a:r>
+                      <a:endParaRPr lang="en-US" sz="1150" dirty="0"/>
+                    </a:p>
+                  </a:txBody>
+                  <a:tcPr marL="73152" marR="73152" marT="36576" marB="36576" anchor="ctr">
+                    <a:lnL w="6350" cap="flat" cmpd="sng" algn="ctr">
+                      <a:solidFill>
+                        <a:srgbClr val="B8D4F0"/>
+                      </a:solidFill>
+                      <a:prstDash val="solid"/>
+                      <a:round/>
+                      <a:headEnd type="none" w="med" len="med"/>
+                      <a:tailEnd type="none" w="med" len="med"/>
+                    </a:lnL>
+                    <a:lnR w="6350" cap="flat" cmpd="sng" algn="ctr">
+                      <a:solidFill>
+                        <a:srgbClr val="B8D4F0"/>
+                      </a:solidFill>
+                      <a:prstDash val="solid"/>
+                      <a:round/>
+                      <a:headEnd type="none" w="med" len="med"/>
+                      <a:tailEnd type="none" w="med" len="med"/>
+                    </a:lnR>
+                    <a:lnT w="6350" cap="flat" cmpd="sng" algn="ctr">
+                      <a:solidFill>
+                        <a:srgbClr val="B8D4F0"/>
+                      </a:solidFill>
+                      <a:prstDash val="solid"/>
+                      <a:round/>
+                      <a:headEnd type="none" w="med" len="med"/>
+                      <a:tailEnd type="none" w="med" len="med"/>
+                    </a:lnT>
+                    <a:lnB w="6350" cap="flat" cmpd="sng" algn="ctr">
+                      <a:solidFill>
+                        <a:srgbClr val="B8D4F0"/>
+                      </a:solidFill>
+                      <a:prstDash val="solid"/>
+                      <a:round/>
+                      <a:headEnd type="none" w="med" len="med"/>
+                      <a:tailEnd type="none" w="med" len="med"/>
+                    </a:lnB>
+                    <a:solidFill>
+                      <a:srgbClr val="FFFFFF"/>
+                    </a:solidFill>
+                  </a:tcPr>
+                </a:tc>
+                <a:tc>
+                  <a:txBody>
+                    <a:bodyPr/>
+                    <a:lstStyle/>
+                    <a:p>
+                      <a:pPr indent="0" marL="0">
+                        <a:buNone/>
+                      </a:pPr>
+                      <a:r>
+                        <a:rPr lang="en-US" sz="1150" dirty="0">
+                          <a:solidFill>
+                            <a:srgbClr val="1A1A2E"/>
+                          </a:solidFill>
+                        </a:rPr>
+                        <a:t>Cas de dysfonctionnement : une API ne répond pas, que se passe-t-il ? Panne simulée avec Playwright</a:t>
+                      </a:r>
+                      <a:endParaRPr lang="en-US" sz="1150" dirty="0"/>
+                    </a:p>
+                  </a:txBody>
+                  <a:tcPr marL="73152" marR="73152" marT="36576" marB="36576" anchor="ctr">
+                    <a:lnL w="6350" cap="flat" cmpd="sng" algn="ctr">
+                      <a:solidFill>
+                        <a:srgbClr val="B8D4F0"/>
+                      </a:solidFill>
+                      <a:prstDash val="solid"/>
+                      <a:round/>
+                      <a:headEnd type="none" w="med" len="med"/>
+                      <a:tailEnd type="none" w="med" len="med"/>
+                    </a:lnL>
+                    <a:lnR w="6350" cap="flat" cmpd="sng" algn="ctr">
+                      <a:solidFill>
+                        <a:srgbClr val="B8D4F0"/>
+                      </a:solidFill>
+                      <a:prstDash val="solid"/>
+                      <a:round/>
+                      <a:headEnd type="none" w="med" len="med"/>
+                      <a:tailEnd type="none" w="med" len="med"/>
+                    </a:lnR>
+                    <a:lnT w="6350" cap="flat" cmpd="sng" algn="ctr">
+                      <a:solidFill>
+                        <a:srgbClr val="B8D4F0"/>
+                      </a:solidFill>
+                      <a:prstDash val="solid"/>
+                      <a:round/>
+                      <a:headEnd type="none" w="med" len="med"/>
+                      <a:tailEnd type="none" w="med" len="med"/>
+                    </a:lnT>
+                    <a:lnB w="6350" cap="flat" cmpd="sng" algn="ctr">
+                      <a:solidFill>
+                        <a:srgbClr val="B8D4F0"/>
+                      </a:solidFill>
+                      <a:prstDash val="solid"/>
+                      <a:round/>
+                      <a:headEnd type="none" w="med" len="med"/>
+                      <a:tailEnd type="none" w="med" len="med"/>
+                    </a:lnB>
+                    <a:solidFill>
+                      <a:srgbClr val="FFFFFF"/>
+                    </a:solidFill>
+                  </a:tcPr>
+                </a:tc>
+              </a:tr>
+            </a:tbl>
+          </a:graphicData>
+        </a:graphic>
+      </p:graphicFrame>
+      <p:sp>
+        <p:nvSpPr>
+          <p:cNvPr id="5" name="card"/>
+          <p:cNvSpPr/>
+          <p:nvPr/>
+        </p:nvSpPr>
+        <p:spPr>
+          <a:xfrm>
+            <a:off x="6858000" y="1645920"/>
+            <a:ext cx="4754880" cy="2697480"/>
+          </a:xfrm>
+          <a:prstGeom prst="roundRect">
+            <a:avLst>
+              <a:gd name="adj" fmla="val 3390"/>
+            </a:avLst>
+          </a:prstGeom>
+          <a:solidFill>
+            <a:schemeClr val="tx2"/>
+          </a:solidFill>
+          <a:ln/>
+        </p:spPr>
+      </p:sp>
+      <p:sp>
+        <p:nvSpPr>
+          <p:cNvPr id="6" name="Text 3"/>
+          <p:cNvSpPr txBox="1"/>
+          <p:nvPr/>
+        </p:nvSpPr>
+        <p:spPr>
+          <a:xfrm>
+            <a:off x="7086600" y="1783080"/>
+            <a:ext cx="4297680" cy="365760"/>
+          </a:xfrm>
+          <a:prstGeom prst="rect">
+            <a:avLst/>
+          </a:prstGeom>
+          <a:noFill/>
+          <a:ln/>
+        </p:spPr>
+        <p:txBody>
+          <a:bodyPr wrap="square" lIns="0" tIns="0" rIns="0" bIns="0" rtlCol="0" anchor="t"/>
+          <a:lstStyle/>
+          <a:p>
+            <a:pPr indent="0" marL="0">
+              <a:buNone/>
+            </a:pPr>
+            <a:r>
+              <a:rPr lang="en-US" sz="1600" b="1" dirty="0">
+                <a:solidFill>
+                  <a:schemeClr val="bg1"/>
+                </a:solidFill>
+              </a:rPr>
+              <a:t>On suspend les tests si</a:t>
+            </a:r>
+            <a:endParaRPr lang="en-US" sz="1600" dirty="0"/>
+          </a:p>
+        </p:txBody>
+      </p:sp>
+      <p:sp>
+        <p:nvSpPr>
+          <p:cNvPr id="7" name="Text 4"/>
+          <p:cNvSpPr txBox="1"/>
+          <p:nvPr/>
+        </p:nvSpPr>
+        <p:spPr>
+          <a:xfrm>
+            <a:off x="7086600" y="2240280"/>
+            <a:ext cx="4343400" cy="2743200"/>
+          </a:xfrm>
+          <a:prstGeom prst="rect">
+            <a:avLst/>
+          </a:prstGeom>
+          <a:noFill/>
+          <a:ln/>
+        </p:spPr>
+        <p:txBody>
+          <a:bodyPr wrap="square" lIns="0" tIns="0" rIns="0" bIns="0" rtlCol="0" anchor="t"/>
+          <a:lstStyle/>
+          <a:p>
+            <a:pPr marL="342900" indent="-342900">
+              <a:spcAft>
+                <a:spcPts val="600"/>
+              </a:spcAft>
+              <a:buSzPct val="100000"/>
+              <a:buChar char="•"/>
+            </a:pPr>
+            <a:r>
+              <a:rPr lang="en-US" sz="1300" dirty="0">
+                <a:solidFill>
+                  <a:schemeClr val="bg1"/>
+                </a:solidFill>
+              </a:rPr>
+              <a:t>Les environnements ITG ou PREPROD sont indisponibles</a:t>
+            </a:r>
+            <a:endParaRPr lang="en-US" sz="1300" dirty="0"/>
+          </a:p>
+          <a:p>
+            <a:pPr marL="342900" indent="-342900">
+              <a:spcAft>
+                <a:spcPts val="600"/>
+              </a:spcAft>
+              <a:buSzPct val="100000"/>
+              <a:buChar char="•"/>
+            </a:pPr>
+            <a:r>
+              <a:rPr lang="en-US" sz="1300" dirty="0">
+                <a:solidFill>
+                  <a:schemeClr val="bg1"/>
+                </a:solidFill>
+              </a:rPr>
+              <a:t>Un incident de production critique ou majeur survient</a:t>
+            </a:r>
+            <a:endParaRPr lang="en-US" sz="1300" dirty="0"/>
+          </a:p>
+          <a:p>
+            <a:pPr marL="342900" indent="-342900">
+              <a:spcAft>
+                <a:spcPts val="600"/>
+              </a:spcAft>
+              <a:buSzPct val="100000"/>
+              <a:buChar char="•"/>
+            </a:pPr>
+            <a:r>
+              <a:rPr lang="en-US" sz="1300" dirty="0">
+                <a:solidFill>
+                  <a:schemeClr val="bg1"/>
+                </a:solidFill>
+              </a:rPr>
+              <a:t>Le régulateur fait une demande exceptionnelle</a:t>
+            </a:r>
+            <a:endParaRPr lang="en-US" sz="1300" dirty="0"/>
+          </a:p>
+          <a:p>
+            <a:pPr marL="342900" indent="-342900">
+              <a:spcAft>
+                <a:spcPts val="600"/>
+              </a:spcAft>
+              <a:buSzPct val="100000"/>
+              <a:buChar char="•"/>
+            </a:pPr>
+            <a:r>
+              <a:rPr lang="en-US" sz="1300" dirty="0">
+                <a:solidFill>
+                  <a:schemeClr val="bg1"/>
+                </a:solidFill>
+              </a:rPr>
+              <a:t>Les BA sont absents en même temps</a:t>
+            </a:r>
+            <a:endParaRPr lang="en-US" sz="1300" dirty="0"/>
+          </a:p>
+          <a:p>
+            <a:pPr marL="342900" indent="-342900">
+              <a:spcAft>
+                <a:spcPts val="600"/>
+              </a:spcAft>
+              <a:buSzPct val="100000"/>
+              <a:buChar char="•"/>
+            </a:pPr>
+            <a:r>
+              <a:rPr lang="en-US" sz="1300" dirty="0">
+                <a:solidFill>
+                  <a:schemeClr val="bg1"/>
+                </a:solidFill>
+              </a:rPr>
+              <a:t>Une anomalie fonctionnelle bloquante est ouverte</a:t>
+            </a:r>
+            <a:endParaRPr lang="en-US" sz="1300" dirty="0"/>
+          </a:p>
+          <a:p>
+            <a:pPr marL="342900" indent="-342900">
+              <a:spcAft>
+                <a:spcPts val="600"/>
+              </a:spcAft>
+              <a:buSzPct val="100000"/>
+              <a:buChar char="•"/>
+            </a:pPr>
+            <a:r>
+              <a:rPr lang="en-US" sz="1300" dirty="0">
+                <a:solidFill>
+                  <a:schemeClr val="bg1"/>
+                </a:solidFill>
+              </a:rPr>
+              <a:t>La priorité du planning change</a:t>
+            </a:r>
+            <a:endParaRPr lang="en-US" sz="1300" dirty="0"/>
+          </a:p>
+        </p:txBody>
+      </p:sp>
+      <p:sp>
+        <p:nvSpPr>
+          <p:cNvPr id="8" name="card"/>
+          <p:cNvSpPr/>
+          <p:nvPr/>
+        </p:nvSpPr>
+        <p:spPr>
+          <a:xfrm>
+            <a:off x="6858000" y="4480560"/>
+            <a:ext cx="4754880" cy="685800"/>
+          </a:xfrm>
+          <a:prstGeom prst="roundRect">
+            <a:avLst>
+              <a:gd name="adj" fmla="val 13333"/>
+            </a:avLst>
+          </a:prstGeom>
+          <a:solidFill>
+            <a:schemeClr val="accent5"/>
+          </a:solidFill>
+          <a:ln/>
+        </p:spPr>
+      </p:sp>
+      <p:sp>
+        <p:nvSpPr>
+          <p:cNvPr id="9" name="Text 6"/>
+          <p:cNvSpPr txBox="1"/>
+          <p:nvPr/>
+        </p:nvSpPr>
+        <p:spPr>
+          <a:xfrm>
+            <a:off x="7086600" y="4480560"/>
+            <a:ext cx="4389120" cy="685800"/>
+          </a:xfrm>
+          <a:prstGeom prst="rect">
+            <a:avLst/>
+          </a:prstGeom>
+          <a:noFill/>
+          <a:ln/>
+        </p:spPr>
+        <p:txBody>
+          <a:bodyPr wrap="square" lIns="0" tIns="0" rIns="0" bIns="0" rtlCol="0" anchor="ctr"/>
+          <a:lstStyle/>
+          <a:p>
+            <a:pPr indent="0" marL="0">
+              <a:buNone/>
+            </a:pPr>
+            <a:r>
+              <a:rPr lang="en-US" sz="1250" b="1" dirty="0">
+                <a:solidFill>
+                  <a:srgbClr val="00338D"/>
+                </a:solidFill>
+              </a:rPr>
+              <a:t>Reprise : </a:t>
+            </a:r>
+            <a:pPr indent="0" marL="0">
+              <a:buNone/>
+            </a:pPr>
+            <a:r>
+              <a:rPr lang="en-US" sz="1250" dirty="0">
+                <a:solidFill>
+                  <a:schemeClr val="tx1"/>
+                </a:solidFill>
+              </a:rPr>
+              <a:t>la cause est levée et le smoke repasse au vert sur l'environnement.</a:t>
+            </a:r>
+            <a:endParaRPr lang="en-US" sz="1250" dirty="0"/>
+          </a:p>
+        </p:txBody>
+      </p:sp>
+      <p:sp>
+        <p:nvSpPr>
+          <p:cNvPr id="25" name="Slide Number Placeholder 0"/>
+          <p:cNvSpPr>
+            <a:spLocks noGrp="1"/>
+          </p:cNvSpPr>
+          <p:nvPr>
+            <p:ph type="sldNum" sz="quarter" idx="4294967295"/>
+          </p:nvPr>
+        </p:nvSpPr>
+        <p:spPr>
+          <a:xfrm>
+            <a:off x="11155680" y="6446520"/>
+            <a:ext cx="457200" cy="274320"/>
+          </a:xfrm>
+          <a:prstGeom prst="rect">
+            <a:avLst/>
+          </a:prstGeom>
+          <a:extLst>
+            <a:ext uri="{C572A759-6A51-4108-AA02-DFA0A04FC94B}">
+              <ma14:wrappingTextBoxFlag xmlns:ma14="http://schemas.microsoft.com/office/mac/drawingml/2011/main" val="0"/>
+            </a:ext>
+          </a:extLst>
+        </p:spPr>
+        <p:txBody>
+          <a:bodyPr/>
+          <a:lstStyle>
+            <a:lvl1pPr>
+              <a:defRPr sz="1000">
+                <a:solidFill>
+                  <a:schemeClr val="accent4"/>
+                </a:solidFill>
+              </a:defRPr>
+            </a:lvl1pPr>
+          </a:lstStyle>
+          <a:p>
+            <a:pPr algn="r"/>
+            <a:fld id="{F7021451-1387-4CA6-816F-3879F97B5CBC}" type="slidenum">
+              <a:rPr b="0" lang="en-US"/>
+              <a:t>14</a:t>
+            </a:fld>
+            <a:endParaRPr lang="en-US"/>
+          </a:p>
+        </p:txBody>
+      </p:sp>
+    </p:spTree>
+  </p:cSld>
+  <p:clrMapOvr>
+    <a:masterClrMapping/>
+  </p:clrMapOvr>
+</p:sld>
+</file>
+
+<file path=ppt/slides/slide15.xml><?xml version="1.0" encoding="utf-8"?>
+<p:sld xmlns:a="http://schemas.openxmlformats.org/drawingml/2006/main" xmlns:r="http://schemas.openxmlformats.org/officeDocument/2006/relationships" xmlns:p="http://schemas.openxmlformats.org/presentationml/2006/main">
+  <p:cSld name="Slide 15">
+    <p:spTree>
+      <p:nvGrpSpPr>
+        <p:cNvPr id="1" name=""/>
+        <p:cNvGrpSpPr/>
+        <p:nvPr/>
+      </p:nvGrpSpPr>
+      <p:grpSpPr>
+        <a:xfrm>
+          <a:off x="0" y="0"/>
+          <a:ext cx="0" cy="0"/>
+          <a:chOff x="0" y="0"/>
+          <a:chExt cx="0" cy="0"/>
+        </a:xfrm>
+      </p:grpSpPr>
+      <p:sp>
+        <p:nvSpPr>
+          <p:cNvPr id="2" name="Text 0"/>
+          <p:cNvSpPr/>
+          <p:nvPr>
+            <p:ph idx="100" type="title" hasCustomPrompt="1"/>
+          </p:nvPr>
+        </p:nvSpPr>
+        <p:spPr>
+          <a:xfrm>
+            <a:off x="548640" y="320040"/>
+            <a:ext cx="11064240" cy="640080"/>
+          </a:xfrm>
+          <a:prstGeom prst="rect">
+            <a:avLst/>
+          </a:prstGeom>
+          <a:noFill/>
+          <a:ln/>
+        </p:spPr>
+        <p:txBody>
+          <a:bodyPr wrap="square" lIns="0" tIns="0" rIns="0" bIns="0" rtlCol="0" anchor="ctr"/>
+          <a:lstStyle/>
+          <a:p>
+            <a:pPr algn="l" indent="0" marL="0">
+              <a:buNone/>
+            </a:pPr>
+            <a:r>
+              <a:rPr lang="en-US" sz="2800" b="1" dirty="0">
+                <a:solidFill>
+                  <a:schemeClr val="tx2"/>
+                </a:solidFill>
+              </a:rPr>
+              <a:t>Annexe : quels cas rejouer à la main à chaque livraison</a:t>
+            </a:r>
+            <a:endParaRPr lang="en-US" sz="2800" dirty="0"/>
+          </a:p>
+        </p:txBody>
+      </p:sp>
+      <p:sp>
+        <p:nvSpPr>
+          <p:cNvPr id="3" name="Text 0"/>
+          <p:cNvSpPr/>
+          <p:nvPr>
+            <p:ph idx="101" type="body" hasCustomPrompt="1"/>
+          </p:nvPr>
+        </p:nvSpPr>
+        <p:spPr>
+          <a:xfrm>
+            <a:off x="548640" y="960120"/>
+            <a:ext cx="11064240" cy="502920"/>
+          </a:xfrm>
+          <a:prstGeom prst="rect">
+            <a:avLst/>
+          </a:prstGeom>
+          <a:noFill/>
+          <a:ln/>
+        </p:spPr>
+        <p:txBody>
+          <a:bodyPr wrap="square" lIns="0" tIns="0" rIns="0" bIns="0" rtlCol="0" anchor="t"/>
+          <a:lstStyle/>
+          <a:p>
+            <a:pPr algn="l" indent="0" marL="0">
+              <a:buNone/>
+            </a:pPr>
+            <a:r>
+              <a:rPr lang="en-US" sz="1600" i="1" dirty="0">
+                <a:solidFill>
+                  <a:schemeClr val="accent1"/>
+                </a:solidFill>
+              </a:rPr>
+              <a:t>La suite automatisée couvre dix scénarios au plus ; le reste de la régression se choisit selon ce qui a changé.</a:t>
+            </a:r>
+            <a:endParaRPr lang="en-US" sz="1600" dirty="0"/>
+          </a:p>
+        </p:txBody>
+      </p:sp>
+      <p:graphicFrame>
+        <p:nvGraphicFramePr>
+          <p:cNvPr id="16" name="table-regression"/>
+          <p:cNvGraphicFramePr>
+            <a:graphicFrameLocks noGrp="1"/>
+          </p:cNvGraphicFramePr>
+          <p:nvPr>
+            <p:extLst>
+              <p:ext uri="{D42A27DB-BD31-4B8C-83A1-F6EECF244321}">
+                <p14:modId xmlns:p14="http://schemas.microsoft.com/office/powerpoint/2010/main" val="1579011935"/>
+              </p:ext>
+            </p:extLst>
+          </p:nvPr>
+        </p:nvGraphicFramePr>
+        <p:xfrm>
+          <a:off x="548640" y="1645920"/>
+          <a:ext cx="6949440" cy="914400"/>
+        </p:xfrm>
+        <a:graphic>
+          <a:graphicData uri="http://schemas.openxmlformats.org/drawingml/2006/table">
+            <a:tbl>
+              <a:tblPr/>
+              <a:tblGrid>
+                <a:gridCol w="1371600"/>
+                <a:gridCol w="2103120"/>
+                <a:gridCol w="3474720"/>
+              </a:tblGrid>
+              <a:tr h="411480">
+                <a:tc>
+                  <a:txBody>
+                    <a:bodyPr/>
+                    <a:lstStyle/>
+                    <a:p>
+                      <a:pPr indent="0" marL="0">
+                        <a:buNone/>
+                      </a:pPr>
+                      <a:r>
+                        <a:rPr lang="en-US" sz="1200" b="1" dirty="0">
+                          <a:solidFill>
+                            <a:srgbClr val="FFFFFF"/>
+                          </a:solidFill>
+                        </a:rPr>
+                        <a:t>Lot</a:t>
+                      </a:r>
+                      <a:endParaRPr lang="en-US" sz="1200" dirty="0"/>
+                    </a:p>
+                  </a:txBody>
+                  <a:tcPr marL="73152" marR="73152" marT="36576" marB="36576" anchor="ctr">
+                    <a:lnL w="6350" cap="flat" cmpd="sng" algn="ctr">
+                      <a:solidFill>
+                        <a:srgbClr val="B8D4F0"/>
+                      </a:solidFill>
+                      <a:prstDash val="solid"/>
+                      <a:round/>
+                      <a:headEnd type="none" w="med" len="med"/>
+                      <a:tailEnd type="none" w="med" len="med"/>
+                    </a:lnL>
+                    <a:lnR w="6350" cap="flat" cmpd="sng" algn="ctr">
+                      <a:solidFill>
+                        <a:srgbClr val="B8D4F0"/>
+                      </a:solidFill>
+                      <a:prstDash val="solid"/>
+                      <a:round/>
+                      <a:headEnd type="none" w="med" len="med"/>
+                      <a:tailEnd type="none" w="med" len="med"/>
+                    </a:lnR>
+                    <a:lnT w="6350" cap="flat" cmpd="sng" algn="ctr">
+                      <a:solidFill>
+                        <a:srgbClr val="B8D4F0"/>
+                      </a:solidFill>
+                      <a:prstDash val="solid"/>
+                      <a:round/>
+                      <a:headEnd type="none" w="med" len="med"/>
+                      <a:tailEnd type="none" w="med" len="med"/>
+                    </a:lnT>
+                    <a:lnB w="6350" cap="flat" cmpd="sng" algn="ctr">
+                      <a:solidFill>
+                        <a:srgbClr val="B8D4F0"/>
+                      </a:solidFill>
+                      <a:prstDash val="solid"/>
+                      <a:round/>
+                      <a:headEnd type="none" w="med" len="med"/>
+                      <a:tailEnd type="none" w="med" len="med"/>
+                    </a:lnB>
+                    <a:solidFill>
+                      <a:srgbClr val="00338D"/>
+                    </a:solidFill>
+                  </a:tcPr>
+                </a:tc>
+                <a:tc>
+                  <a:txBody>
+                    <a:bodyPr/>
+                    <a:lstStyle/>
+                    <a:p>
+                      <a:pPr indent="0" marL="0">
+                        <a:buNone/>
+                      </a:pPr>
+                      <a:r>
+                        <a:rPr lang="en-US" sz="1200" b="1" dirty="0">
+                          <a:solidFill>
+                            <a:srgbClr val="FFFFFF"/>
+                          </a:solidFill>
+                        </a:rPr>
+                        <a:t>Quand le rejouer</a:t>
+                      </a:r>
+                      <a:endParaRPr lang="en-US" sz="1200" dirty="0"/>
+                    </a:p>
+                  </a:txBody>
+                  <a:tcPr marL="73152" marR="73152" marT="36576" marB="36576" anchor="ctr">
+                    <a:lnL w="6350" cap="flat" cmpd="sng" algn="ctr">
+                      <a:solidFill>
+                        <a:srgbClr val="B8D4F0"/>
+                      </a:solidFill>
+                      <a:prstDash val="solid"/>
+                      <a:round/>
+                      <a:headEnd type="none" w="med" len="med"/>
+                      <a:tailEnd type="none" w="med" len="med"/>
+                    </a:lnL>
+                    <a:lnR w="6350" cap="flat" cmpd="sng" algn="ctr">
+                      <a:solidFill>
+                        <a:srgbClr val="B8D4F0"/>
+                      </a:solidFill>
+                      <a:prstDash val="solid"/>
+                      <a:round/>
+                      <a:headEnd type="none" w="med" len="med"/>
+                      <a:tailEnd type="none" w="med" len="med"/>
+                    </a:lnR>
+                    <a:lnT w="6350" cap="flat" cmpd="sng" algn="ctr">
+                      <a:solidFill>
+                        <a:srgbClr val="B8D4F0"/>
+                      </a:solidFill>
+                      <a:prstDash val="solid"/>
+                      <a:round/>
+                      <a:headEnd type="none" w="med" len="med"/>
+                      <a:tailEnd type="none" w="med" len="med"/>
+                    </a:lnT>
+                    <a:lnB w="6350" cap="flat" cmpd="sng" algn="ctr">
+                      <a:solidFill>
+                        <a:srgbClr val="B8D4F0"/>
+                      </a:solidFill>
+                      <a:prstDash val="solid"/>
+                      <a:round/>
+                      <a:headEnd type="none" w="med" len="med"/>
+                      <a:tailEnd type="none" w="med" len="med"/>
+                    </a:lnB>
+                    <a:solidFill>
+                      <a:srgbClr val="00338D"/>
+                    </a:solidFill>
+                  </a:tcPr>
+                </a:tc>
+                <a:tc>
+                  <a:txBody>
+                    <a:bodyPr/>
+                    <a:lstStyle/>
+                    <a:p>
+                      <a:pPr indent="0" marL="0">
+                        <a:buNone/>
+                      </a:pPr>
+                      <a:r>
+                        <a:rPr lang="en-US" sz="1200" b="1" dirty="0">
+                          <a:solidFill>
+                            <a:srgbClr val="FFFFFF"/>
+                          </a:solidFill>
+                        </a:rPr>
+                        <a:t>Exemples</a:t>
+                      </a:r>
+                      <a:endParaRPr lang="en-US" sz="1200" dirty="0"/>
+                    </a:p>
+                  </a:txBody>
+                  <a:tcPr marL="73152" marR="73152" marT="36576" marB="36576" anchor="ctr">
+                    <a:lnL w="6350" cap="flat" cmpd="sng" algn="ctr">
+                      <a:solidFill>
+                        <a:srgbClr val="B8D4F0"/>
+                      </a:solidFill>
+                      <a:prstDash val="solid"/>
+                      <a:round/>
+                      <a:headEnd type="none" w="med" len="med"/>
+                      <a:tailEnd type="none" w="med" len="med"/>
+                    </a:lnL>
+                    <a:lnR w="6350" cap="flat" cmpd="sng" algn="ctr">
+                      <a:solidFill>
+                        <a:srgbClr val="B8D4F0"/>
+                      </a:solidFill>
+                      <a:prstDash val="solid"/>
+                      <a:round/>
+                      <a:headEnd type="none" w="med" len="med"/>
+                      <a:tailEnd type="none" w="med" len="med"/>
+                    </a:lnR>
+                    <a:lnT w="6350" cap="flat" cmpd="sng" algn="ctr">
+                      <a:solidFill>
+                        <a:srgbClr val="B8D4F0"/>
+                      </a:solidFill>
+                      <a:prstDash val="solid"/>
+                      <a:round/>
+                      <a:headEnd type="none" w="med" len="med"/>
+                      <a:tailEnd type="none" w="med" len="med"/>
+                    </a:lnT>
+                    <a:lnB w="6350" cap="flat" cmpd="sng" algn="ctr">
+                      <a:solidFill>
+                        <a:srgbClr val="B8D4F0"/>
+                      </a:solidFill>
+                      <a:prstDash val="solid"/>
+                      <a:round/>
+                      <a:headEnd type="none" w="med" len="med"/>
+                      <a:tailEnd type="none" w="med" len="med"/>
+                    </a:lnB>
+                    <a:solidFill>
+                      <a:srgbClr val="00338D"/>
+                    </a:solidFill>
+                  </a:tcPr>
+                </a:tc>
+              </a:tr>
+              <a:tr h="621792">
+                <a:tc>
+                  <a:txBody>
+                    <a:bodyPr/>
+                    <a:lstStyle/>
+                    <a:p>
+                      <a:pPr indent="0" marL="0">
+                        <a:buNone/>
+                      </a:pPr>
+                      <a:r>
+                        <a:rPr lang="en-US" sz="1150" b="1" dirty="0">
+                          <a:solidFill>
+                            <a:srgbClr val="1A1A2E"/>
+                          </a:solidFill>
+                        </a:rPr>
+                        <a:t>Socle</a:t>
+                      </a:r>
+                      <a:endParaRPr lang="en-US" sz="1150" dirty="0"/>
+                    </a:p>
+                  </a:txBody>
+                  <a:tcPr marL="73152" marR="73152" marT="36576" marB="36576" anchor="ctr">
+                    <a:lnL w="6350" cap="flat" cmpd="sng" algn="ctr">
+                      <a:solidFill>
+                        <a:srgbClr val="B8D4F0"/>
+                      </a:solidFill>
+                      <a:prstDash val="solid"/>
+                      <a:round/>
+                      <a:headEnd type="none" w="med" len="med"/>
+                      <a:tailEnd type="none" w="med" len="med"/>
+                    </a:lnL>
+                    <a:lnR w="6350" cap="flat" cmpd="sng" algn="ctr">
+                      <a:solidFill>
+                        <a:srgbClr val="B8D4F0"/>
+                      </a:solidFill>
+                      <a:prstDash val="solid"/>
+                      <a:round/>
+                      <a:headEnd type="none" w="med" len="med"/>
+                      <a:tailEnd type="none" w="med" len="med"/>
+                    </a:lnR>
+                    <a:lnT w="6350" cap="flat" cmpd="sng" algn="ctr">
+                      <a:solidFill>
+                        <a:srgbClr val="B8D4F0"/>
+                      </a:solidFill>
+                      <a:prstDash val="solid"/>
+                      <a:round/>
+                      <a:headEnd type="none" w="med" len="med"/>
+                      <a:tailEnd type="none" w="med" len="med"/>
+                    </a:lnT>
+                    <a:lnB w="6350" cap="flat" cmpd="sng" algn="ctr">
+                      <a:solidFill>
+                        <a:srgbClr val="B8D4F0"/>
+                      </a:solidFill>
+                      <a:prstDash val="solid"/>
+                      <a:round/>
+                      <a:headEnd type="none" w="med" len="med"/>
+                      <a:tailEnd type="none" w="med" len="med"/>
+                    </a:lnB>
+                    <a:solidFill>
+                      <a:srgbClr val="EEF3FA"/>
+                    </a:solidFill>
+                  </a:tcPr>
+                </a:tc>
+                <a:tc>
+                  <a:txBody>
+                    <a:bodyPr/>
+                    <a:lstStyle/>
+                    <a:p>
+                      <a:pPr indent="0" marL="0">
+                        <a:buNone/>
+                      </a:pPr>
+                      <a:r>
+                        <a:rPr lang="en-US" sz="1150" dirty="0">
+                          <a:solidFill>
+                            <a:srgbClr val="1A1A2E"/>
+                          </a:solidFill>
+                        </a:rPr>
+                        <a:t>À chaque livraison</a:t>
+                      </a:r>
+                      <a:endParaRPr lang="en-US" sz="1150" dirty="0"/>
+                    </a:p>
+                  </a:txBody>
+                  <a:tcPr marL="73152" marR="73152" marT="36576" marB="36576" anchor="ctr">
+                    <a:lnL w="6350" cap="flat" cmpd="sng" algn="ctr">
+                      <a:solidFill>
+                        <a:srgbClr val="B8D4F0"/>
+                      </a:solidFill>
+                      <a:prstDash val="solid"/>
+                      <a:round/>
+                      <a:headEnd type="none" w="med" len="med"/>
+                      <a:tailEnd type="none" w="med" len="med"/>
+                    </a:lnL>
+                    <a:lnR w="6350" cap="flat" cmpd="sng" algn="ctr">
+                      <a:solidFill>
+                        <a:srgbClr val="B8D4F0"/>
+                      </a:solidFill>
+                      <a:prstDash val="solid"/>
+                      <a:round/>
+                      <a:headEnd type="none" w="med" len="med"/>
+                      <a:tailEnd type="none" w="med" len="med"/>
+                    </a:lnR>
+                    <a:lnT w="6350" cap="flat" cmpd="sng" algn="ctr">
+                      <a:solidFill>
+                        <a:srgbClr val="B8D4F0"/>
+                      </a:solidFill>
+                      <a:prstDash val="solid"/>
+                      <a:round/>
+                      <a:headEnd type="none" w="med" len="med"/>
+                      <a:tailEnd type="none" w="med" len="med"/>
+                    </a:lnT>
+                    <a:lnB w="6350" cap="flat" cmpd="sng" algn="ctr">
+                      <a:solidFill>
+                        <a:srgbClr val="B8D4F0"/>
+                      </a:solidFill>
+                      <a:prstDash val="solid"/>
+                      <a:round/>
+                      <a:headEnd type="none" w="med" len="med"/>
+                      <a:tailEnd type="none" w="med" len="med"/>
+                    </a:lnB>
+                    <a:solidFill>
+                      <a:srgbClr val="EEF3FA"/>
+                    </a:solidFill>
+                  </a:tcPr>
+                </a:tc>
+                <a:tc>
+                  <a:txBody>
+                    <a:bodyPr/>
+                    <a:lstStyle/>
+                    <a:p>
+                      <a:pPr indent="0" marL="0">
+                        <a:buNone/>
+                      </a:pPr>
+                      <a:r>
+                        <a:rPr lang="en-US" sz="1150" dirty="0">
+                          <a:solidFill>
+                            <a:srgbClr val="1A1A2E"/>
+                          </a:solidFill>
+                        </a:rPr>
+                        <a:t>Connexion par rôle, création d'une demande, passage au statut Validé, une action refusée à un User</a:t>
+                      </a:r>
+                      <a:endParaRPr lang="en-US" sz="1150" dirty="0"/>
+                    </a:p>
+                  </a:txBody>
+                  <a:tcPr marL="73152" marR="73152" marT="36576" marB="36576" anchor="ctr">
+                    <a:lnL w="6350" cap="flat" cmpd="sng" algn="ctr">
+                      <a:solidFill>
+                        <a:srgbClr val="B8D4F0"/>
+                      </a:solidFill>
+                      <a:prstDash val="solid"/>
+                      <a:round/>
+                      <a:headEnd type="none" w="med" len="med"/>
+                      <a:tailEnd type="none" w="med" len="med"/>
+                    </a:lnL>
+                    <a:lnR w="6350" cap="flat" cmpd="sng" algn="ctr">
+                      <a:solidFill>
+                        <a:srgbClr val="B8D4F0"/>
+                      </a:solidFill>
+                      <a:prstDash val="solid"/>
+                      <a:round/>
+                      <a:headEnd type="none" w="med" len="med"/>
+                      <a:tailEnd type="none" w="med" len="med"/>
+                    </a:lnR>
+                    <a:lnT w="6350" cap="flat" cmpd="sng" algn="ctr">
+                      <a:solidFill>
+                        <a:srgbClr val="B8D4F0"/>
+                      </a:solidFill>
+                      <a:prstDash val="solid"/>
+                      <a:round/>
+                      <a:headEnd type="none" w="med" len="med"/>
+                      <a:tailEnd type="none" w="med" len="med"/>
+                    </a:lnT>
+                    <a:lnB w="6350" cap="flat" cmpd="sng" algn="ctr">
+                      <a:solidFill>
+                        <a:srgbClr val="B8D4F0"/>
+                      </a:solidFill>
+                      <a:prstDash val="solid"/>
+                      <a:round/>
+                      <a:headEnd type="none" w="med" len="med"/>
+                      <a:tailEnd type="none" w="med" len="med"/>
+                    </a:lnB>
+                    <a:solidFill>
+                      <a:srgbClr val="EEF3FA"/>
+                    </a:solidFill>
+                  </a:tcPr>
+                </a:tc>
+              </a:tr>
+              <a:tr h="566928">
+                <a:tc>
+                  <a:txBody>
+                    <a:bodyPr/>
+                    <a:lstStyle/>
+                    <a:p>
+                      <a:pPr indent="0" marL="0">
+                        <a:buNone/>
+                      </a:pPr>
+                      <a:r>
+                        <a:rPr lang="en-US" sz="1150" b="1" dirty="0">
+                          <a:solidFill>
+                            <a:srgbClr val="1A1A2E"/>
+                          </a:solidFill>
+                        </a:rPr>
+                        <a:t>Formulaires</a:t>
+                      </a:r>
+                      <a:endParaRPr lang="en-US" sz="1150" dirty="0"/>
+                    </a:p>
+                  </a:txBody>
+                  <a:tcPr marL="73152" marR="73152" marT="36576" marB="36576" anchor="ctr">
+                    <a:lnL w="6350" cap="flat" cmpd="sng" algn="ctr">
+                      <a:solidFill>
+                        <a:srgbClr val="B8D4F0"/>
+                      </a:solidFill>
+                      <a:prstDash val="solid"/>
+                      <a:round/>
+                      <a:headEnd type="none" w="med" len="med"/>
+                      <a:tailEnd type="none" w="med" len="med"/>
+                    </a:lnL>
+                    <a:lnR w="6350" cap="flat" cmpd="sng" algn="ctr">
+                      <a:solidFill>
+                        <a:srgbClr val="B8D4F0"/>
+                      </a:solidFill>
+                      <a:prstDash val="solid"/>
+                      <a:round/>
+                      <a:headEnd type="none" w="med" len="med"/>
+                      <a:tailEnd type="none" w="med" len="med"/>
+                    </a:lnR>
+                    <a:lnT w="6350" cap="flat" cmpd="sng" algn="ctr">
+                      <a:solidFill>
+                        <a:srgbClr val="B8D4F0"/>
+                      </a:solidFill>
+                      <a:prstDash val="solid"/>
+                      <a:round/>
+                      <a:headEnd type="none" w="med" len="med"/>
+                      <a:tailEnd type="none" w="med" len="med"/>
+                    </a:lnT>
+                    <a:lnB w="6350" cap="flat" cmpd="sng" algn="ctr">
+                      <a:solidFill>
+                        <a:srgbClr val="B8D4F0"/>
+                      </a:solidFill>
+                      <a:prstDash val="solid"/>
+                      <a:round/>
+                      <a:headEnd type="none" w="med" len="med"/>
+                      <a:tailEnd type="none" w="med" len="med"/>
+                    </a:lnB>
+                    <a:solidFill>
+                      <a:srgbClr val="FFFFFF"/>
+                    </a:solidFill>
+                  </a:tcPr>
+                </a:tc>
+                <a:tc>
+                  <a:txBody>
+                    <a:bodyPr/>
+                    <a:lstStyle/>
+                    <a:p>
+                      <a:pPr indent="0" marL="0">
+                        <a:buNone/>
+                      </a:pPr>
+                      <a:r>
+                        <a:rPr lang="en-US" sz="1150" dirty="0">
+                          <a:solidFill>
+                            <a:srgbClr val="1A1A2E"/>
+                          </a:solidFill>
+                        </a:rPr>
+                        <a:t>Si un formulaire ou une règle de saisie change</a:t>
+                      </a:r>
+                      <a:endParaRPr lang="en-US" sz="1150" dirty="0"/>
+                    </a:p>
+                  </a:txBody>
+                  <a:tcPr marL="73152" marR="73152" marT="36576" marB="36576" anchor="ctr">
+                    <a:lnL w="6350" cap="flat" cmpd="sng" algn="ctr">
+                      <a:solidFill>
+                        <a:srgbClr val="B8D4F0"/>
+                      </a:solidFill>
+                      <a:prstDash val="solid"/>
+                      <a:round/>
+                      <a:headEnd type="none" w="med" len="med"/>
+                      <a:tailEnd type="none" w="med" len="med"/>
+                    </a:lnL>
+                    <a:lnR w="6350" cap="flat" cmpd="sng" algn="ctr">
+                      <a:solidFill>
+                        <a:srgbClr val="B8D4F0"/>
+                      </a:solidFill>
+                      <a:prstDash val="solid"/>
+                      <a:round/>
+                      <a:headEnd type="none" w="med" len="med"/>
+                      <a:tailEnd type="none" w="med" len="med"/>
+                    </a:lnR>
+                    <a:lnT w="6350" cap="flat" cmpd="sng" algn="ctr">
+                      <a:solidFill>
+                        <a:srgbClr val="B8D4F0"/>
+                      </a:solidFill>
+                      <a:prstDash val="solid"/>
+                      <a:round/>
+                      <a:headEnd type="none" w="med" len="med"/>
+                      <a:tailEnd type="none" w="med" len="med"/>
+                    </a:lnT>
+                    <a:lnB w="6350" cap="flat" cmpd="sng" algn="ctr">
+                      <a:solidFill>
+                        <a:srgbClr val="B8D4F0"/>
+                      </a:solidFill>
+                      <a:prstDash val="solid"/>
+                      <a:round/>
+                      <a:headEnd type="none" w="med" len="med"/>
+                      <a:tailEnd type="none" w="med" len="med"/>
+                    </a:lnB>
+                    <a:solidFill>
+                      <a:srgbClr val="FFFFFF"/>
+                    </a:solidFill>
+                  </a:tcPr>
+                </a:tc>
+                <a:tc>
+                  <a:txBody>
+                    <a:bodyPr/>
+                    <a:lstStyle/>
+                    <a:p>
+                      <a:pPr indent="0" marL="0">
+                        <a:buNone/>
+                      </a:pPr>
+                      <a:r>
+                        <a:rPr lang="en-US" sz="1150" dirty="0">
+                          <a:solidFill>
+                            <a:srgbClr val="1A1A2E"/>
+                          </a:solidFill>
+                        </a:rPr>
+                        <a:t>Champs obligatoires par type de mandat, contrôles de saisie</a:t>
+                      </a:r>
+                      <a:endParaRPr lang="en-US" sz="1150" dirty="0"/>
+                    </a:p>
+                  </a:txBody>
+                  <a:tcPr marL="73152" marR="73152" marT="36576" marB="36576" anchor="ctr">
+                    <a:lnL w="6350" cap="flat" cmpd="sng" algn="ctr">
+                      <a:solidFill>
+                        <a:srgbClr val="B8D4F0"/>
+                      </a:solidFill>
+                      <a:prstDash val="solid"/>
+                      <a:round/>
+                      <a:headEnd type="none" w="med" len="med"/>
+                      <a:tailEnd type="none" w="med" len="med"/>
+                    </a:lnL>
+                    <a:lnR w="6350" cap="flat" cmpd="sng" algn="ctr">
+                      <a:solidFill>
+                        <a:srgbClr val="B8D4F0"/>
+                      </a:solidFill>
+                      <a:prstDash val="solid"/>
+                      <a:round/>
+                      <a:headEnd type="none" w="med" len="med"/>
+                      <a:tailEnd type="none" w="med" len="med"/>
+                    </a:lnR>
+                    <a:lnT w="6350" cap="flat" cmpd="sng" algn="ctr">
+                      <a:solidFill>
+                        <a:srgbClr val="B8D4F0"/>
+                      </a:solidFill>
+                      <a:prstDash val="solid"/>
+                      <a:round/>
+                      <a:headEnd type="none" w="med" len="med"/>
+                      <a:tailEnd type="none" w="med" len="med"/>
+                    </a:lnT>
+                    <a:lnB w="6350" cap="flat" cmpd="sng" algn="ctr">
+                      <a:solidFill>
+                        <a:srgbClr val="B8D4F0"/>
+                      </a:solidFill>
+                      <a:prstDash val="solid"/>
+                      <a:round/>
+                      <a:headEnd type="none" w="med" len="med"/>
+                      <a:tailEnd type="none" w="med" len="med"/>
+                    </a:lnB>
+                    <a:solidFill>
+                      <a:srgbClr val="FFFFFF"/>
+                    </a:solidFill>
+                  </a:tcPr>
+                </a:tc>
+              </a:tr>
+              <a:tr h="566928">
+                <a:tc>
+                  <a:txBody>
+                    <a:bodyPr/>
+                    <a:lstStyle/>
+                    <a:p>
+                      <a:pPr indent="0" marL="0">
+                        <a:buNone/>
+                      </a:pPr>
+                      <a:r>
+                        <a:rPr lang="en-US" sz="1150" b="1" dirty="0">
+                          <a:solidFill>
+                            <a:srgbClr val="1A1A2E"/>
+                          </a:solidFill>
+                        </a:rPr>
+                        <a:t>Statuts</a:t>
+                      </a:r>
+                      <a:endParaRPr lang="en-US" sz="1150" dirty="0"/>
+                    </a:p>
+                  </a:txBody>
+                  <a:tcPr marL="73152" marR="73152" marT="36576" marB="36576" anchor="ctr">
+                    <a:lnL w="6350" cap="flat" cmpd="sng" algn="ctr">
+                      <a:solidFill>
+                        <a:srgbClr val="B8D4F0"/>
+                      </a:solidFill>
+                      <a:prstDash val="solid"/>
+                      <a:round/>
+                      <a:headEnd type="none" w="med" len="med"/>
+                      <a:tailEnd type="none" w="med" len="med"/>
+                    </a:lnL>
+                    <a:lnR w="6350" cap="flat" cmpd="sng" algn="ctr">
+                      <a:solidFill>
+                        <a:srgbClr val="B8D4F0"/>
+                      </a:solidFill>
+                      <a:prstDash val="solid"/>
+                      <a:round/>
+                      <a:headEnd type="none" w="med" len="med"/>
+                      <a:tailEnd type="none" w="med" len="med"/>
+                    </a:lnR>
+                    <a:lnT w="6350" cap="flat" cmpd="sng" algn="ctr">
+                      <a:solidFill>
+                        <a:srgbClr val="B8D4F0"/>
+                      </a:solidFill>
+                      <a:prstDash val="solid"/>
+                      <a:round/>
+                      <a:headEnd type="none" w="med" len="med"/>
+                      <a:tailEnd type="none" w="med" len="med"/>
+                    </a:lnT>
+                    <a:lnB w="6350" cap="flat" cmpd="sng" algn="ctr">
+                      <a:solidFill>
+                        <a:srgbClr val="B8D4F0"/>
+                      </a:solidFill>
+                      <a:prstDash val="solid"/>
+                      <a:round/>
+                      <a:headEnd type="none" w="med" len="med"/>
+                      <a:tailEnd type="none" w="med" len="med"/>
+                    </a:lnB>
+                    <a:solidFill>
+                      <a:srgbClr val="EEF3FA"/>
+                    </a:solidFill>
+                  </a:tcPr>
+                </a:tc>
+                <a:tc>
+                  <a:txBody>
+                    <a:bodyPr/>
+                    <a:lstStyle/>
+                    <a:p>
+                      <a:pPr indent="0" marL="0">
+                        <a:buNone/>
+                      </a:pPr>
+                      <a:r>
+                        <a:rPr lang="en-US" sz="1150" dirty="0">
+                          <a:solidFill>
+                            <a:srgbClr val="1A1A2E"/>
+                          </a:solidFill>
+                        </a:rPr>
+                        <a:t>Si l'enchaînement des statuts change</a:t>
+                      </a:r>
+                      <a:endParaRPr lang="en-US" sz="1150" dirty="0"/>
+                    </a:p>
+                  </a:txBody>
+                  <a:tcPr marL="73152" marR="73152" marT="36576" marB="36576" anchor="ctr">
+                    <a:lnL w="6350" cap="flat" cmpd="sng" algn="ctr">
+                      <a:solidFill>
+                        <a:srgbClr val="B8D4F0"/>
+                      </a:solidFill>
+                      <a:prstDash val="solid"/>
+                      <a:round/>
+                      <a:headEnd type="none" w="med" len="med"/>
+                      <a:tailEnd type="none" w="med" len="med"/>
+                    </a:lnL>
+                    <a:lnR w="6350" cap="flat" cmpd="sng" algn="ctr">
+                      <a:solidFill>
+                        <a:srgbClr val="B8D4F0"/>
+                      </a:solidFill>
+                      <a:prstDash val="solid"/>
+                      <a:round/>
+                      <a:headEnd type="none" w="med" len="med"/>
+                      <a:tailEnd type="none" w="med" len="med"/>
+                    </a:lnR>
+                    <a:lnT w="6350" cap="flat" cmpd="sng" algn="ctr">
+                      <a:solidFill>
+                        <a:srgbClr val="B8D4F0"/>
+                      </a:solidFill>
+                      <a:prstDash val="solid"/>
+                      <a:round/>
+                      <a:headEnd type="none" w="med" len="med"/>
+                      <a:tailEnd type="none" w="med" len="med"/>
+                    </a:lnT>
+                    <a:lnB w="6350" cap="flat" cmpd="sng" algn="ctr">
+                      <a:solidFill>
+                        <a:srgbClr val="B8D4F0"/>
+                      </a:solidFill>
+                      <a:prstDash val="solid"/>
+                      <a:round/>
+                      <a:headEnd type="none" w="med" len="med"/>
+                      <a:tailEnd type="none" w="med" len="med"/>
+                    </a:lnB>
+                    <a:solidFill>
+                      <a:srgbClr val="EEF3FA"/>
+                    </a:solidFill>
+                  </a:tcPr>
+                </a:tc>
+                <a:tc>
+                  <a:txBody>
+                    <a:bodyPr/>
+                    <a:lstStyle/>
+                    <a:p>
+                      <a:pPr indent="0" marL="0">
+                        <a:buNone/>
+                      </a:pPr>
+                      <a:r>
+                        <a:rPr lang="en-US" sz="1150" dirty="0">
+                          <a:solidFill>
+                            <a:srgbClr val="1A1A2E"/>
+                          </a:solidFill>
+                        </a:rPr>
+                        <a:t>Chaque transition autorisée, chaque transition interdite décrite par l'US</a:t>
+                      </a:r>
+                      <a:endParaRPr lang="en-US" sz="1150" dirty="0"/>
+                    </a:p>
+                  </a:txBody>
+                  <a:tcPr marL="73152" marR="73152" marT="36576" marB="36576" anchor="ctr">
+                    <a:lnL w="6350" cap="flat" cmpd="sng" algn="ctr">
+                      <a:solidFill>
+                        <a:srgbClr val="B8D4F0"/>
+                      </a:solidFill>
+                      <a:prstDash val="solid"/>
+                      <a:round/>
+                      <a:headEnd type="none" w="med" len="med"/>
+                      <a:tailEnd type="none" w="med" len="med"/>
+                    </a:lnL>
+                    <a:lnR w="6350" cap="flat" cmpd="sng" algn="ctr">
+                      <a:solidFill>
+                        <a:srgbClr val="B8D4F0"/>
+                      </a:solidFill>
+                      <a:prstDash val="solid"/>
+                      <a:round/>
+                      <a:headEnd type="none" w="med" len="med"/>
+                      <a:tailEnd type="none" w="med" len="med"/>
+                    </a:lnR>
+                    <a:lnT w="6350" cap="flat" cmpd="sng" algn="ctr">
+                      <a:solidFill>
+                        <a:srgbClr val="B8D4F0"/>
+                      </a:solidFill>
+                      <a:prstDash val="solid"/>
+                      <a:round/>
+                      <a:headEnd type="none" w="med" len="med"/>
+                      <a:tailEnd type="none" w="med" len="med"/>
+                    </a:lnT>
+                    <a:lnB w="6350" cap="flat" cmpd="sng" algn="ctr">
+                      <a:solidFill>
+                        <a:srgbClr val="B8D4F0"/>
+                      </a:solidFill>
+                      <a:prstDash val="solid"/>
+                      <a:round/>
+                      <a:headEnd type="none" w="med" len="med"/>
+                      <a:tailEnd type="none" w="med" len="med"/>
+                    </a:lnB>
+                    <a:solidFill>
+                      <a:srgbClr val="EEF3FA"/>
+                    </a:solidFill>
+                  </a:tcPr>
+                </a:tc>
+              </a:tr>
+              <a:tr h="566928">
+                <a:tc>
+                  <a:txBody>
+                    <a:bodyPr/>
+                    <a:lstStyle/>
+                    <a:p>
+                      <a:pPr indent="0" marL="0">
+                        <a:buNone/>
+                      </a:pPr>
+                      <a:r>
+                        <a:rPr lang="en-US" sz="1150" b="1" dirty="0">
+                          <a:solidFill>
+                            <a:srgbClr val="1A1A2E"/>
+                          </a:solidFill>
+                        </a:rPr>
+                        <a:t>Droits</a:t>
+                      </a:r>
+                      <a:endParaRPr lang="en-US" sz="1150" dirty="0"/>
+                    </a:p>
+                  </a:txBody>
+                  <a:tcPr marL="73152" marR="73152" marT="36576" marB="36576" anchor="ctr">
+                    <a:lnL w="6350" cap="flat" cmpd="sng" algn="ctr">
+                      <a:solidFill>
+                        <a:srgbClr val="B8D4F0"/>
+                      </a:solidFill>
+                      <a:prstDash val="solid"/>
+                      <a:round/>
+                      <a:headEnd type="none" w="med" len="med"/>
+                      <a:tailEnd type="none" w="med" len="med"/>
+                    </a:lnL>
+                    <a:lnR w="6350" cap="flat" cmpd="sng" algn="ctr">
+                      <a:solidFill>
+                        <a:srgbClr val="B8D4F0"/>
+                      </a:solidFill>
+                      <a:prstDash val="solid"/>
+                      <a:round/>
+                      <a:headEnd type="none" w="med" len="med"/>
+                      <a:tailEnd type="none" w="med" len="med"/>
+                    </a:lnR>
+                    <a:lnT w="6350" cap="flat" cmpd="sng" algn="ctr">
+                      <a:solidFill>
+                        <a:srgbClr val="B8D4F0"/>
+                      </a:solidFill>
+                      <a:prstDash val="solid"/>
+                      <a:round/>
+                      <a:headEnd type="none" w="med" len="med"/>
+                      <a:tailEnd type="none" w="med" len="med"/>
+                    </a:lnT>
+                    <a:lnB w="6350" cap="flat" cmpd="sng" algn="ctr">
+                      <a:solidFill>
+                        <a:srgbClr val="B8D4F0"/>
+                      </a:solidFill>
+                      <a:prstDash val="solid"/>
+                      <a:round/>
+                      <a:headEnd type="none" w="med" len="med"/>
+                      <a:tailEnd type="none" w="med" len="med"/>
+                    </a:lnB>
+                    <a:solidFill>
+                      <a:srgbClr val="FFFFFF"/>
+                    </a:solidFill>
+                  </a:tcPr>
+                </a:tc>
+                <a:tc>
+                  <a:txBody>
+                    <a:bodyPr/>
+                    <a:lstStyle/>
+                    <a:p>
+                      <a:pPr indent="0" marL="0">
+                        <a:buNone/>
+                      </a:pPr>
+                      <a:r>
+                        <a:rPr lang="en-US" sz="1150" dirty="0">
+                          <a:solidFill>
+                            <a:srgbClr val="1A1A2E"/>
+                          </a:solidFill>
+                        </a:rPr>
+                        <a:t>Si un rôle ou une habilitation change</a:t>
+                      </a:r>
+                      <a:endParaRPr lang="en-US" sz="1150" dirty="0"/>
+                    </a:p>
+                  </a:txBody>
+                  <a:tcPr marL="73152" marR="73152" marT="36576" marB="36576" anchor="ctr">
+                    <a:lnL w="6350" cap="flat" cmpd="sng" algn="ctr">
+                      <a:solidFill>
+                        <a:srgbClr val="B8D4F0"/>
+                      </a:solidFill>
+                      <a:prstDash val="solid"/>
+                      <a:round/>
+                      <a:headEnd type="none" w="med" len="med"/>
+                      <a:tailEnd type="none" w="med" len="med"/>
+                    </a:lnL>
+                    <a:lnR w="6350" cap="flat" cmpd="sng" algn="ctr">
+                      <a:solidFill>
+                        <a:srgbClr val="B8D4F0"/>
+                      </a:solidFill>
+                      <a:prstDash val="solid"/>
+                      <a:round/>
+                      <a:headEnd type="none" w="med" len="med"/>
+                      <a:tailEnd type="none" w="med" len="med"/>
+                    </a:lnR>
+                    <a:lnT w="6350" cap="flat" cmpd="sng" algn="ctr">
+                      <a:solidFill>
+                        <a:srgbClr val="B8D4F0"/>
+                      </a:solidFill>
+                      <a:prstDash val="solid"/>
+                      <a:round/>
+                      <a:headEnd type="none" w="med" len="med"/>
+                      <a:tailEnd type="none" w="med" len="med"/>
+                    </a:lnT>
+                    <a:lnB w="6350" cap="flat" cmpd="sng" algn="ctr">
+                      <a:solidFill>
+                        <a:srgbClr val="B8D4F0"/>
+                      </a:solidFill>
+                      <a:prstDash val="solid"/>
+                      <a:round/>
+                      <a:headEnd type="none" w="med" len="med"/>
+                      <a:tailEnd type="none" w="med" len="med"/>
+                    </a:lnB>
+                    <a:solidFill>
+                      <a:srgbClr val="FFFFFF"/>
+                    </a:solidFill>
+                  </a:tcPr>
+                </a:tc>
+                <a:tc>
+                  <a:txBody>
+                    <a:bodyPr/>
+                    <a:lstStyle/>
+                    <a:p>
+                      <a:pPr indent="0" marL="0">
+                        <a:buNone/>
+                      </a:pPr>
+                      <a:r>
+                        <a:rPr lang="en-US" sz="1150" dirty="0">
+                          <a:solidFill>
+                            <a:srgbClr val="1A1A2E"/>
+                          </a:solidFill>
+                        </a:rPr>
+                        <a:t>Les trois rôles, accès par URL directe, refus côté API</a:t>
+                      </a:r>
+                      <a:endParaRPr lang="en-US" sz="1150" dirty="0"/>
+                    </a:p>
+                  </a:txBody>
+                  <a:tcPr marL="73152" marR="73152" marT="36576" marB="36576" anchor="ctr">
+                    <a:lnL w="6350" cap="flat" cmpd="sng" algn="ctr">
+                      <a:solidFill>
+                        <a:srgbClr val="B8D4F0"/>
+                      </a:solidFill>
+                      <a:prstDash val="solid"/>
+                      <a:round/>
+                      <a:headEnd type="none" w="med" len="med"/>
+                      <a:tailEnd type="none" w="med" len="med"/>
+                    </a:lnL>
+                    <a:lnR w="6350" cap="flat" cmpd="sng" algn="ctr">
+                      <a:solidFill>
+                        <a:srgbClr val="B8D4F0"/>
+                      </a:solidFill>
+                      <a:prstDash val="solid"/>
+                      <a:round/>
+                      <a:headEnd type="none" w="med" len="med"/>
+                      <a:tailEnd type="none" w="med" len="med"/>
+                    </a:lnR>
+                    <a:lnT w="6350" cap="flat" cmpd="sng" algn="ctr">
+                      <a:solidFill>
+                        <a:srgbClr val="B8D4F0"/>
+                      </a:solidFill>
+                      <a:prstDash val="solid"/>
+                      <a:round/>
+                      <a:headEnd type="none" w="med" len="med"/>
+                      <a:tailEnd type="none" w="med" len="med"/>
+                    </a:lnT>
+                    <a:lnB w="6350" cap="flat" cmpd="sng" algn="ctr">
+                      <a:solidFill>
+                        <a:srgbClr val="B8D4F0"/>
+                      </a:solidFill>
+                      <a:prstDash val="solid"/>
+                      <a:round/>
+                      <a:headEnd type="none" w="med" len="med"/>
+                      <a:tailEnd type="none" w="med" len="med"/>
+                    </a:lnB>
+                    <a:solidFill>
+                      <a:srgbClr val="FFFFFF"/>
+                    </a:solidFill>
+                  </a:tcPr>
+                </a:tc>
+              </a:tr>
+              <a:tr h="566928">
+                <a:tc>
+                  <a:txBody>
+                    <a:bodyPr/>
+                    <a:lstStyle/>
+                    <a:p>
+                      <a:pPr indent="0" marL="0">
+                        <a:buNone/>
+                      </a:pPr>
+                      <a:r>
+                        <a:rPr lang="en-US" sz="1150" b="1" dirty="0">
+                          <a:solidFill>
+                            <a:srgbClr val="1A1A2E"/>
+                          </a:solidFill>
+                        </a:rPr>
+                        <a:t>Import, export, documents</a:t>
+                      </a:r>
+                      <a:endParaRPr lang="en-US" sz="1150" dirty="0"/>
+                    </a:p>
+                  </a:txBody>
+                  <a:tcPr marL="73152" marR="73152" marT="36576" marB="36576" anchor="ctr">
+                    <a:lnL w="6350" cap="flat" cmpd="sng" algn="ctr">
+                      <a:solidFill>
+                        <a:srgbClr val="B8D4F0"/>
+                      </a:solidFill>
+                      <a:prstDash val="solid"/>
+                      <a:round/>
+                      <a:headEnd type="none" w="med" len="med"/>
+                      <a:tailEnd type="none" w="med" len="med"/>
+                    </a:lnL>
+                    <a:lnR w="6350" cap="flat" cmpd="sng" algn="ctr">
+                      <a:solidFill>
+                        <a:srgbClr val="B8D4F0"/>
+                      </a:solidFill>
+                      <a:prstDash val="solid"/>
+                      <a:round/>
+                      <a:headEnd type="none" w="med" len="med"/>
+                      <a:tailEnd type="none" w="med" len="med"/>
+                    </a:lnR>
+                    <a:lnT w="6350" cap="flat" cmpd="sng" algn="ctr">
+                      <a:solidFill>
+                        <a:srgbClr val="B8D4F0"/>
+                      </a:solidFill>
+                      <a:prstDash val="solid"/>
+                      <a:round/>
+                      <a:headEnd type="none" w="med" len="med"/>
+                      <a:tailEnd type="none" w="med" len="med"/>
+                    </a:lnT>
+                    <a:lnB w="6350" cap="flat" cmpd="sng" algn="ctr">
+                      <a:solidFill>
+                        <a:srgbClr val="B8D4F0"/>
+                      </a:solidFill>
+                      <a:prstDash val="solid"/>
+                      <a:round/>
+                      <a:headEnd type="none" w="med" len="med"/>
+                      <a:tailEnd type="none" w="med" len="med"/>
+                    </a:lnB>
+                    <a:solidFill>
+                      <a:srgbClr val="EEF3FA"/>
+                    </a:solidFill>
+                  </a:tcPr>
+                </a:tc>
+                <a:tc>
+                  <a:txBody>
+                    <a:bodyPr/>
+                    <a:lstStyle/>
+                    <a:p>
+                      <a:pPr indent="0" marL="0">
+                        <a:buNone/>
+                      </a:pPr>
+                      <a:r>
+                        <a:rPr lang="en-US" sz="1150" dirty="0">
+                          <a:solidFill>
+                            <a:srgbClr val="1A1A2E"/>
+                          </a:solidFill>
+                        </a:rPr>
+                        <a:t>Si le module change</a:t>
+                      </a:r>
+                      <a:endParaRPr lang="en-US" sz="1150" dirty="0"/>
+                    </a:p>
+                  </a:txBody>
+                  <a:tcPr marL="73152" marR="73152" marT="36576" marB="36576" anchor="ctr">
+                    <a:lnL w="6350" cap="flat" cmpd="sng" algn="ctr">
+                      <a:solidFill>
+                        <a:srgbClr val="B8D4F0"/>
+                      </a:solidFill>
+                      <a:prstDash val="solid"/>
+                      <a:round/>
+                      <a:headEnd type="none" w="med" len="med"/>
+                      <a:tailEnd type="none" w="med" len="med"/>
+                    </a:lnL>
+                    <a:lnR w="6350" cap="flat" cmpd="sng" algn="ctr">
+                      <a:solidFill>
+                        <a:srgbClr val="B8D4F0"/>
+                      </a:solidFill>
+                      <a:prstDash val="solid"/>
+                      <a:round/>
+                      <a:headEnd type="none" w="med" len="med"/>
+                      <a:tailEnd type="none" w="med" len="med"/>
+                    </a:lnR>
+                    <a:lnT w="6350" cap="flat" cmpd="sng" algn="ctr">
+                      <a:solidFill>
+                        <a:srgbClr val="B8D4F0"/>
+                      </a:solidFill>
+                      <a:prstDash val="solid"/>
+                      <a:round/>
+                      <a:headEnd type="none" w="med" len="med"/>
+                      <a:tailEnd type="none" w="med" len="med"/>
+                    </a:lnT>
+                    <a:lnB w="6350" cap="flat" cmpd="sng" algn="ctr">
+                      <a:solidFill>
+                        <a:srgbClr val="B8D4F0"/>
+                      </a:solidFill>
+                      <a:prstDash val="solid"/>
+                      <a:round/>
+                      <a:headEnd type="none" w="med" len="med"/>
+                      <a:tailEnd type="none" w="med" len="med"/>
+                    </a:lnB>
+                    <a:solidFill>
+                      <a:srgbClr val="EEF3FA"/>
+                    </a:solidFill>
+                  </a:tcPr>
+                </a:tc>
+                <a:tc>
+                  <a:txBody>
+                    <a:bodyPr/>
+                    <a:lstStyle/>
+                    <a:p>
+                      <a:pPr indent="0" marL="0">
+                        <a:buNone/>
+                      </a:pPr>
+                      <a:r>
+                        <a:rPr lang="en-US" sz="1150" dirty="0">
+                          <a:solidFill>
+                            <a:srgbClr val="1A1A2E"/>
+                          </a:solidFill>
+                        </a:rPr>
+                        <a:t>Fichier exporté conforme aux filtres, document généré complet</a:t>
+                      </a:r>
+                      <a:endParaRPr lang="en-US" sz="1150" dirty="0"/>
+                    </a:p>
+                  </a:txBody>
+                  <a:tcPr marL="73152" marR="73152" marT="36576" marB="36576" anchor="ctr">
+                    <a:lnL w="6350" cap="flat" cmpd="sng" algn="ctr">
+                      <a:solidFill>
+                        <a:srgbClr val="B8D4F0"/>
+                      </a:solidFill>
+                      <a:prstDash val="solid"/>
+                      <a:round/>
+                      <a:headEnd type="none" w="med" len="med"/>
+                      <a:tailEnd type="none" w="med" len="med"/>
+                    </a:lnL>
+                    <a:lnR w="6350" cap="flat" cmpd="sng" algn="ctr">
+                      <a:solidFill>
+                        <a:srgbClr val="B8D4F0"/>
+                      </a:solidFill>
+                      <a:prstDash val="solid"/>
+                      <a:round/>
+                      <a:headEnd type="none" w="med" len="med"/>
+                      <a:tailEnd type="none" w="med" len="med"/>
+                    </a:lnR>
+                    <a:lnT w="6350" cap="flat" cmpd="sng" algn="ctr">
+                      <a:solidFill>
+                        <a:srgbClr val="B8D4F0"/>
+                      </a:solidFill>
+                      <a:prstDash val="solid"/>
+                      <a:round/>
+                      <a:headEnd type="none" w="med" len="med"/>
+                      <a:tailEnd type="none" w="med" len="med"/>
+                    </a:lnT>
+                    <a:lnB w="6350" cap="flat" cmpd="sng" algn="ctr">
+                      <a:solidFill>
+                        <a:srgbClr val="B8D4F0"/>
+                      </a:solidFill>
+                      <a:prstDash val="solid"/>
+                      <a:round/>
+                      <a:headEnd type="none" w="med" len="med"/>
+                      <a:tailEnd type="none" w="med" len="med"/>
+                    </a:lnB>
+                    <a:solidFill>
+                      <a:srgbClr val="EEF3FA"/>
+                    </a:solidFill>
+                  </a:tcPr>
+                </a:tc>
+              </a:tr>
+            </a:tbl>
+          </a:graphicData>
+        </a:graphic>
+      </p:graphicFrame>
+      <p:sp>
+        <p:nvSpPr>
+          <p:cNvPr id="5" name="card"/>
+          <p:cNvSpPr/>
+          <p:nvPr/>
+        </p:nvSpPr>
+        <p:spPr>
+          <a:xfrm>
+            <a:off x="7772400" y="1645920"/>
+            <a:ext cx="3840480" cy="4206240"/>
+          </a:xfrm>
+          <a:prstGeom prst="roundRect">
+            <a:avLst>
+              <a:gd name="adj" fmla="val 2381"/>
+            </a:avLst>
+          </a:prstGeom>
+          <a:solidFill>
+            <a:schemeClr val="tx2"/>
+          </a:solidFill>
+          <a:ln/>
+        </p:spPr>
+      </p:sp>
+      <p:sp>
+        <p:nvSpPr>
+          <p:cNvPr id="6" name="Text 3"/>
+          <p:cNvSpPr txBox="1"/>
+          <p:nvPr/>
+        </p:nvSpPr>
+        <p:spPr>
+          <a:xfrm>
+            <a:off x="8001000" y="1783080"/>
+            <a:ext cx="3383280" cy="365760"/>
+          </a:xfrm>
+          <a:prstGeom prst="rect">
+            <a:avLst/>
+          </a:prstGeom>
+          <a:noFill/>
+          <a:ln/>
+        </p:spPr>
+        <p:txBody>
+          <a:bodyPr wrap="square" lIns="0" tIns="0" rIns="0" bIns="0" rtlCol="0" anchor="t"/>
+          <a:lstStyle/>
+          <a:p>
+            <a:pPr indent="0" marL="0">
+              <a:buNone/>
+            </a:pPr>
+            <a:r>
+              <a:rPr lang="en-US" sz="1600" b="1" dirty="0">
+                <a:solidFill>
+                  <a:schemeClr val="bg1"/>
+                </a:solidFill>
+              </a:rPr>
+              <a:t>Dans Test Plans</a:t>
+            </a:r>
+            <a:endParaRPr lang="en-US" sz="1600" dirty="0"/>
+          </a:p>
+        </p:txBody>
+      </p:sp>
+      <p:sp>
+        <p:nvSpPr>
+          <p:cNvPr id="7" name="Text 4"/>
+          <p:cNvSpPr txBox="1"/>
+          <p:nvPr/>
+        </p:nvSpPr>
+        <p:spPr>
+          <a:xfrm>
+            <a:off x="8001000" y="2240280"/>
+            <a:ext cx="3429000" cy="2926080"/>
+          </a:xfrm>
+          <a:prstGeom prst="rect">
+            <a:avLst/>
+          </a:prstGeom>
+          <a:noFill/>
+          <a:ln/>
+        </p:spPr>
+        <p:txBody>
+          <a:bodyPr wrap="square" lIns="0" tIns="0" rIns="0" bIns="0" rtlCol="0" anchor="t"/>
+          <a:lstStyle/>
+          <a:p>
+            <a:pPr marL="342900" indent="-342900">
+              <a:spcAft>
+                <a:spcPts val="800"/>
+              </a:spcAft>
+              <a:buSzPct val="100000"/>
+              <a:buFont typeface="+mj-lt"/>
+              <a:buAutoNum type="arabicPeriod" startAt="1"/>
+            </a:pPr>
+            <a:r>
+              <a:rPr lang="en-US" sz="1300" dirty="0">
+                <a:solidFill>
+                  <a:schemeClr val="bg1"/>
+                </a:solidFill>
+              </a:rPr>
+              <a:t>Un tag de lot sur chaque cas de régression</a:t>
+            </a:r>
+            <a:endParaRPr lang="en-US" sz="1300" dirty="0"/>
+          </a:p>
+          <a:p>
+            <a:pPr marL="342900" indent="-342900">
+              <a:spcAft>
+                <a:spcPts val="800"/>
+              </a:spcAft>
+              <a:buSzPct val="100000"/>
+              <a:buFont typeface="+mj-lt"/>
+              <a:buAutoNum type="arabicPeriod" startAt="1"/>
+            </a:pPr>
+            <a:r>
+              <a:rPr lang="en-US" sz="1300" dirty="0">
+                <a:solidFill>
+                  <a:schemeClr val="bg1"/>
+                </a:solidFill>
+              </a:rPr>
+              <a:t>Les US livrées disent quels modules ont changé</a:t>
+            </a:r>
+            <a:endParaRPr lang="en-US" sz="1300" dirty="0"/>
+          </a:p>
+          <a:p>
+            <a:pPr marL="342900" indent="-342900">
+              <a:spcAft>
+                <a:spcPts val="800"/>
+              </a:spcAft>
+              <a:buSzPct val="100000"/>
+              <a:buFont typeface="+mj-lt"/>
+              <a:buAutoNum type="arabicPeriod" startAt="1"/>
+            </a:pPr>
+            <a:r>
+              <a:rPr lang="en-US" sz="1300" dirty="0">
+                <a:solidFill>
+                  <a:schemeClr val="bg1"/>
+                </a:solidFill>
+              </a:rPr>
+              <a:t>La campagne se construit par requête sur les tags, sans tri à la main</a:t>
+            </a:r>
+            <a:endParaRPr lang="en-US" sz="1300" dirty="0"/>
+          </a:p>
+          <a:p>
+            <a:pPr marL="342900" indent="-342900">
+              <a:spcAft>
+                <a:spcPts val="800"/>
+              </a:spcAft>
+              <a:buSzPct val="100000"/>
+              <a:buFont typeface="+mj-lt"/>
+              <a:buAutoNum type="arabicPeriod" startAt="1"/>
+            </a:pPr>
+            <a:r>
+              <a:rPr lang="en-US" sz="1300" dirty="0">
+                <a:solidFill>
+                  <a:schemeClr val="bg1"/>
+                </a:solidFill>
+              </a:rPr>
+              <a:t>Les cas déjà automatisés en sont exclus</a:t>
+            </a:r>
+            <a:endParaRPr lang="en-US" sz="1300" dirty="0"/>
+          </a:p>
+        </p:txBody>
+      </p:sp>
+      <p:sp>
+        <p:nvSpPr>
+          <p:cNvPr id="8" name="card"/>
+          <p:cNvSpPr/>
+          <p:nvPr/>
+        </p:nvSpPr>
+        <p:spPr>
+          <a:xfrm>
+            <a:off x="548640" y="5166360"/>
+            <a:ext cx="6949440" cy="685800"/>
+          </a:xfrm>
+          <a:prstGeom prst="roundRect">
+            <a:avLst>
+              <a:gd name="adj" fmla="val 13333"/>
+            </a:avLst>
+          </a:prstGeom>
+          <a:solidFill>
+            <a:schemeClr val="accent5"/>
+          </a:solidFill>
+          <a:ln/>
+        </p:spPr>
+      </p:sp>
+      <p:sp>
+        <p:nvSpPr>
+          <p:cNvPr id="9" name="Text 6"/>
+          <p:cNvSpPr txBox="1"/>
+          <p:nvPr/>
+        </p:nvSpPr>
+        <p:spPr>
+          <a:xfrm>
+            <a:off x="731520" y="5166360"/>
+            <a:ext cx="6629400" cy="685800"/>
+          </a:xfrm>
+          <a:prstGeom prst="rect">
+            <a:avLst/>
+          </a:prstGeom>
+          <a:noFill/>
+          <a:ln/>
+        </p:spPr>
+        <p:txBody>
+          <a:bodyPr wrap="square" lIns="0" tIns="0" rIns="0" bIns="0" rtlCol="0" anchor="ctr"/>
+          <a:lstStyle/>
+          <a:p>
+            <a:pPr indent="0" marL="0">
+              <a:buNone/>
+            </a:pPr>
+            <a:r>
+              <a:rPr lang="en-US" sz="1250" b="1" dirty="0">
+                <a:solidFill>
+                  <a:srgbClr val="00338D"/>
+                </a:solidFill>
+              </a:rPr>
+              <a:t>Le socle reste petit : </a:t>
+            </a:r>
+            <a:pPr indent="0" marL="0">
+              <a:buNone/>
+            </a:pPr>
+            <a:r>
+              <a:rPr lang="en-US" sz="1250" dirty="0">
+                <a:solidFill>
+                  <a:schemeClr val="tx1"/>
+                </a:solidFill>
+              </a:rPr>
+              <a:t>un cas qui ne trouve rien depuis plusieurs livraisons, sur un module qui ne bouge plus, en sort.</a:t>
+            </a:r>
+            <a:endParaRPr lang="en-US" sz="1250" dirty="0"/>
+          </a:p>
+        </p:txBody>
+      </p:sp>
+      <p:sp>
+        <p:nvSpPr>
+          <p:cNvPr id="25" name="Slide Number Placeholder 0"/>
+          <p:cNvSpPr>
+            <a:spLocks noGrp="1"/>
+          </p:cNvSpPr>
+          <p:nvPr>
+            <p:ph type="sldNum" sz="quarter" idx="4294967295"/>
+          </p:nvPr>
+        </p:nvSpPr>
+        <p:spPr>
+          <a:xfrm>
+            <a:off x="11155680" y="6446520"/>
+            <a:ext cx="457200" cy="274320"/>
+          </a:xfrm>
+          <a:prstGeom prst="rect">
+            <a:avLst/>
+          </a:prstGeom>
+          <a:extLst>
+            <a:ext uri="{C572A759-6A51-4108-AA02-DFA0A04FC94B}">
+              <ma14:wrappingTextBoxFlag xmlns:ma14="http://schemas.microsoft.com/office/mac/drawingml/2011/main" val="0"/>
+            </a:ext>
+          </a:extLst>
+        </p:spPr>
+        <p:txBody>
+          <a:bodyPr/>
+          <a:lstStyle>
+            <a:lvl1pPr>
+              <a:defRPr sz="1000">
+                <a:solidFill>
+                  <a:schemeClr val="accent4"/>
+                </a:solidFill>
+              </a:defRPr>
+            </a:lvl1pPr>
+          </a:lstStyle>
+          <a:p>
+            <a:pPr algn="r"/>
+            <a:fld id="{F7021451-1387-4CA6-816F-3879F97B5CBC}" type="slidenum">
+              <a:rPr b="0" lang="en-US"/>
+              <a:t>15</a:t>
             </a:fld>
             <a:endParaRPr lang="en-US"/>
           </a:p>
@@ -7359,7 +13373,7 @@
                   <a:schemeClr val="tx2"/>
                 </a:solidFill>
               </a:rPr>
-              <a:t>Le ROI : pourquoi on automatise peu sur InfoCAC</a:t>
+              <a:t>Une assurance ciblée, pas un gain de productivité</a:t>
             </a:r>
             <a:endParaRPr lang="en-US" sz="2800" dirty="0"/>
           </a:p>
@@ -7397,7 +13411,7 @@
                   <a:schemeClr val="accent1"/>
                 </a:solidFill>
               </a:rPr>
-              <a:t>En temps gagné, un test ne se rembourse pas sur les 8 sprints restants ; seule la détection précoce peut le rembourser.</a:t>
+              <a:t>Sur les 8 sprints restants, le temps gagné ne rembourse pas un test : seule la détection précoce le peut.</a:t>
             </a:r>
             <a:endParaRPr lang="en-US" sz="1600" dirty="0"/>
           </a:p>
@@ -7411,12 +13425,414 @@
         </p:nvSpPr>
         <p:spPr>
           <a:xfrm>
-            <a:off x="548640" y="1691640"/>
-            <a:ext cx="3474720" cy="2834640"/>
+            <a:off x="548640" y="1600200"/>
+            <a:ext cx="3474720" cy="2377440"/>
           </a:xfrm>
           <a:prstGeom prst="roundRect">
             <a:avLst>
-              <a:gd name="adj" fmla="val 3226"/>
+              <a:gd name="adj" fmla="val 3846"/>
+            </a:avLst>
+          </a:prstGeom>
+          <a:solidFill>
+            <a:schemeClr val="bg2"/>
+          </a:solidFill>
+          <a:ln/>
+        </p:spPr>
+      </p:sp>
+      <p:sp>
+        <p:nvSpPr>
+          <p:cNvPr id="5" name="Text 3"/>
+          <p:cNvSpPr txBox="1"/>
+          <p:nvPr/>
+        </p:nvSpPr>
+        <p:spPr>
+          <a:xfrm>
+            <a:off x="749808" y="1709928"/>
+            <a:ext cx="3108960" cy="365760"/>
+          </a:xfrm>
+          <a:prstGeom prst="rect">
+            <a:avLst/>
+          </a:prstGeom>
+          <a:noFill/>
+          <a:ln/>
+        </p:spPr>
+        <p:txBody>
+          <a:bodyPr wrap="square" lIns="0" tIns="0" rIns="0" bIns="0" rtlCol="0" anchor="t"/>
+          <a:lstStyle/>
+          <a:p>
+            <a:pPr indent="0" marL="0">
+              <a:buNone/>
+            </a:pPr>
+            <a:r>
+              <a:rPr lang="en-US" sz="1500" b="1" dirty="0">
+                <a:solidFill>
+                  <a:schemeClr val="tx2"/>
+                </a:solidFill>
+              </a:rPr>
+              <a:t>Ce que ça coûte</a:t>
+            </a:r>
+            <a:endParaRPr lang="en-US" sz="1500" dirty="0"/>
+          </a:p>
+        </p:txBody>
+      </p:sp>
+      <p:sp>
+        <p:nvSpPr>
+          <p:cNvPr id="6" name="box"/>
+          <p:cNvSpPr/>
+          <p:nvPr/>
+        </p:nvSpPr>
+        <p:spPr>
+          <a:xfrm>
+            <a:off x="749808" y="2121408"/>
+            <a:ext cx="1600200" cy="274320"/>
+          </a:xfrm>
+          <a:prstGeom prst="roundRect">
+            <a:avLst>
+              <a:gd name="adj" fmla="val 20000"/>
+            </a:avLst>
+          </a:prstGeom>
+          <a:solidFill>
+            <a:srgbClr val="F6DADA"/>
+          </a:solidFill>
+          <a:ln/>
+        </p:spPr>
+      </p:sp>
+      <p:sp>
+        <p:nvSpPr>
+          <p:cNvPr id="7" name="Text 5"/>
+          <p:cNvSpPr txBox="1"/>
+          <p:nvPr/>
+        </p:nvSpPr>
+        <p:spPr>
+          <a:xfrm>
+            <a:off x="749808" y="2121408"/>
+            <a:ext cx="1600200" cy="274320"/>
+          </a:xfrm>
+          <a:prstGeom prst="rect">
+            <a:avLst/>
+          </a:prstGeom>
+          <a:noFill/>
+          <a:ln/>
+        </p:spPr>
+        <p:txBody>
+          <a:bodyPr wrap="square" lIns="0" tIns="0" rIns="0" bIns="0" rtlCol="0" anchor="ctr"/>
+          <a:lstStyle/>
+          <a:p>
+            <a:pPr algn="ctr" indent="0" marL="0">
+              <a:buNone/>
+            </a:pPr>
+            <a:r>
+              <a:rPr lang="en-US" sz="1100" b="1" dirty="0">
+                <a:solidFill>
+                  <a:srgbClr val="B23B3B"/>
+                </a:solidFill>
+              </a:rPr>
+              <a:t>Plus que prévu</a:t>
+            </a:r>
+            <a:endParaRPr lang="en-US" sz="1100" dirty="0"/>
+          </a:p>
+        </p:txBody>
+      </p:sp>
+      <p:sp>
+        <p:nvSpPr>
+          <p:cNvPr id="8" name="Text 6"/>
+          <p:cNvSpPr txBox="1"/>
+          <p:nvPr/>
+        </p:nvSpPr>
+        <p:spPr>
+          <a:xfrm>
+            <a:off x="749808" y="2514600"/>
+            <a:ext cx="3154680" cy="1417320"/>
+          </a:xfrm>
+          <a:prstGeom prst="rect">
+            <a:avLst/>
+          </a:prstGeom>
+          <a:noFill/>
+          <a:ln/>
+        </p:spPr>
+        <p:txBody>
+          <a:bodyPr wrap="square" lIns="0" tIns="0" rIns="0" bIns="0" rtlCol="0" anchor="t"/>
+          <a:lstStyle/>
+          <a:p>
+            <a:pPr marL="342900" indent="-342900">
+              <a:spcAft>
+                <a:spcPts val="400"/>
+              </a:spcAft>
+              <a:buSzPct val="100000"/>
+              <a:buChar char="•"/>
+            </a:pPr>
+            <a:r>
+              <a:rPr lang="en-US" sz="1150" dirty="0">
+                <a:solidFill>
+                  <a:schemeClr val="tx1"/>
+                </a:solidFill>
+              </a:rPr>
+              <a:t>Écrire le test</a:t>
+            </a:r>
+            <a:endParaRPr lang="en-US" sz="1150" dirty="0"/>
+          </a:p>
+          <a:p>
+            <a:pPr marL="342900" indent="-342900">
+              <a:spcAft>
+                <a:spcPts val="400"/>
+              </a:spcAft>
+              <a:buSzPct val="100000"/>
+              <a:buChar char="•"/>
+            </a:pPr>
+            <a:r>
+              <a:rPr lang="en-US" sz="1150" dirty="0">
+                <a:solidFill>
+                  <a:schemeClr val="tx1"/>
+                </a:solidFill>
+              </a:rPr>
+              <a:t>Le maintenir à chaque changement d'US</a:t>
+            </a:r>
+            <a:endParaRPr lang="en-US" sz="1150" dirty="0"/>
+          </a:p>
+          <a:p>
+            <a:pPr marL="342900" indent="-342900">
+              <a:spcAft>
+                <a:spcPts val="400"/>
+              </a:spcAft>
+              <a:buSzPct val="100000"/>
+              <a:buChar char="•"/>
+            </a:pPr>
+            <a:r>
+              <a:rPr lang="en-US" sz="1150" dirty="0">
+                <a:solidFill>
+                  <a:schemeClr val="tx1"/>
+                </a:solidFill>
+              </a:rPr>
+              <a:t>Accès ITG, comptes par rôle, données fiables</a:t>
+            </a:r>
+            <a:endParaRPr lang="en-US" sz="1150" dirty="0"/>
+          </a:p>
+          <a:p>
+            <a:pPr marL="342900" indent="-342900">
+              <a:spcAft>
+                <a:spcPts val="400"/>
+              </a:spcAft>
+              <a:buSzPct val="100000"/>
+              <a:buChar char="•"/>
+            </a:pPr>
+            <a:r>
+              <a:rPr lang="en-US" sz="1150" dirty="0">
+                <a:solidFill>
+                  <a:schemeClr val="tx1"/>
+                </a:solidFill>
+              </a:rPr>
+              <a:t>Un propriétaire après le 31/12, sinon la suite meurt</a:t>
+            </a:r>
+            <a:endParaRPr lang="en-US" sz="1150" dirty="0"/>
+          </a:p>
+        </p:txBody>
+      </p:sp>
+      <p:sp>
+        <p:nvSpPr>
+          <p:cNvPr id="9" name="card"/>
+          <p:cNvSpPr/>
+          <p:nvPr/>
+        </p:nvSpPr>
+        <p:spPr>
+          <a:xfrm>
+            <a:off x="4343400" y="1600200"/>
+            <a:ext cx="3474720" cy="2377440"/>
+          </a:xfrm>
+          <a:prstGeom prst="roundRect">
+            <a:avLst>
+              <a:gd name="adj" fmla="val 3846"/>
+            </a:avLst>
+          </a:prstGeom>
+          <a:solidFill>
+            <a:schemeClr val="bg2"/>
+          </a:solidFill>
+          <a:ln/>
+        </p:spPr>
+      </p:sp>
+      <p:sp>
+        <p:nvSpPr>
+          <p:cNvPr id="10" name="Text 8"/>
+          <p:cNvSpPr txBox="1"/>
+          <p:nvPr/>
+        </p:nvSpPr>
+        <p:spPr>
+          <a:xfrm>
+            <a:off x="4544568" y="1709928"/>
+            <a:ext cx="3108960" cy="365760"/>
+          </a:xfrm>
+          <a:prstGeom prst="rect">
+            <a:avLst/>
+          </a:prstGeom>
+          <a:noFill/>
+          <a:ln/>
+        </p:spPr>
+        <p:txBody>
+          <a:bodyPr wrap="square" lIns="0" tIns="0" rIns="0" bIns="0" rtlCol="0" anchor="t"/>
+          <a:lstStyle/>
+          <a:p>
+            <a:pPr indent="0" marL="0">
+              <a:buNone/>
+            </a:pPr>
+            <a:r>
+              <a:rPr lang="en-US" sz="1500" b="1" dirty="0">
+                <a:solidFill>
+                  <a:schemeClr val="tx2"/>
+                </a:solidFill>
+              </a:rPr>
+              <a:t>Ce que ça fait gagner en temps</a:t>
+            </a:r>
+            <a:endParaRPr lang="en-US" sz="1500" dirty="0"/>
+          </a:p>
+        </p:txBody>
+      </p:sp>
+      <p:sp>
+        <p:nvSpPr>
+          <p:cNvPr id="11" name="box"/>
+          <p:cNvSpPr/>
+          <p:nvPr/>
+        </p:nvSpPr>
+        <p:spPr>
+          <a:xfrm>
+            <a:off x="4544568" y="2121408"/>
+            <a:ext cx="1600200" cy="274320"/>
+          </a:xfrm>
+          <a:prstGeom prst="roundRect">
+            <a:avLst>
+              <a:gd name="adj" fmla="val 20000"/>
+            </a:avLst>
+          </a:prstGeom>
+          <a:solidFill>
+            <a:srgbClr val="E6E9ED"/>
+          </a:solidFill>
+          <a:ln/>
+        </p:spPr>
+      </p:sp>
+      <p:sp>
+        <p:nvSpPr>
+          <p:cNvPr id="12" name="Text 10"/>
+          <p:cNvSpPr txBox="1"/>
+          <p:nvPr/>
+        </p:nvSpPr>
+        <p:spPr>
+          <a:xfrm>
+            <a:off x="4544568" y="2121408"/>
+            <a:ext cx="1600200" cy="274320"/>
+          </a:xfrm>
+          <a:prstGeom prst="rect">
+            <a:avLst/>
+          </a:prstGeom>
+          <a:noFill/>
+          <a:ln/>
+        </p:spPr>
+        <p:txBody>
+          <a:bodyPr wrap="square" lIns="0" tIns="0" rIns="0" bIns="0" rtlCol="0" anchor="ctr"/>
+          <a:lstStyle/>
+          <a:p>
+            <a:pPr algn="ctr" indent="0" marL="0">
+              <a:buNone/>
+            </a:pPr>
+            <a:r>
+              <a:rPr lang="en-US" sz="1100" b="1" dirty="0">
+                <a:solidFill>
+                  <a:srgbClr val="5F6B7A"/>
+                </a:solidFill>
+              </a:rPr>
+              <a:t>Presque rien</a:t>
+            </a:r>
+            <a:endParaRPr lang="en-US" sz="1100" dirty="0"/>
+          </a:p>
+        </p:txBody>
+      </p:sp>
+      <p:sp>
+        <p:nvSpPr>
+          <p:cNvPr id="13" name="Text 11"/>
+          <p:cNvSpPr txBox="1"/>
+          <p:nvPr/>
+        </p:nvSpPr>
+        <p:spPr>
+          <a:xfrm>
+            <a:off x="4544568" y="2514600"/>
+            <a:ext cx="3154680" cy="1417320"/>
+          </a:xfrm>
+          <a:prstGeom prst="rect">
+            <a:avLst/>
+          </a:prstGeom>
+          <a:noFill/>
+          <a:ln/>
+        </p:spPr>
+        <p:txBody>
+          <a:bodyPr wrap="square" lIns="0" tIns="0" rIns="0" bIns="0" rtlCol="0" anchor="t"/>
+          <a:lstStyle/>
+          <a:p>
+            <a:pPr marL="342900" indent="-342900">
+              <a:spcAft>
+                <a:spcPts val="400"/>
+              </a:spcAft>
+              <a:buSzPct val="100000"/>
+              <a:buChar char="•"/>
+            </a:pPr>
+            <a:r>
+              <a:rPr lang="en-US" sz="1150" dirty="0">
+                <a:solidFill>
+                  <a:schemeClr val="tx1"/>
+                </a:solidFill>
+              </a:rPr>
+              <a:t>Seules comptent les passes manuelles remplacées : le smoke, quelques non-régressions</a:t>
+            </a:r>
+            <a:endParaRPr lang="en-US" sz="1150" dirty="0"/>
+          </a:p>
+          <a:p>
+            <a:pPr marL="342900" indent="-342900">
+              <a:spcAft>
+                <a:spcPts val="400"/>
+              </a:spcAft>
+              <a:buSzPct val="100000"/>
+              <a:buChar char="•"/>
+            </a:pPr>
+            <a:r>
+              <a:rPr lang="en-US" sz="1150" dirty="0">
+                <a:solidFill>
+                  <a:schemeClr val="tx1"/>
+                </a:solidFill>
+              </a:rPr>
+              <a:t>Les exécutions de nuit ne remplacent personne</a:t>
+            </a:r>
+            <a:endParaRPr lang="en-US" sz="1150" dirty="0"/>
+          </a:p>
+          <a:p>
+            <a:pPr marL="342900" indent="-342900">
+              <a:spcAft>
+                <a:spcPts val="400"/>
+              </a:spcAft>
+              <a:buSzPct val="100000"/>
+              <a:buChar char="•"/>
+            </a:pPr>
+            <a:r>
+              <a:rPr lang="en-US" sz="1150" dirty="0">
+                <a:solidFill>
+                  <a:schemeClr val="tx1"/>
+                </a:solidFill>
+              </a:rPr>
+              <a:t>Aucune évolution après mars : pas de réemploi</a:t>
+            </a:r>
+            <a:endParaRPr lang="en-US" sz="1150" dirty="0"/>
+          </a:p>
+        </p:txBody>
+      </p:sp>
+      <p:sp>
+        <p:nvSpPr>
+          <p:cNvPr id="14" name="card"/>
+          <p:cNvSpPr/>
+          <p:nvPr/>
+        </p:nvSpPr>
+        <p:spPr>
+          <a:xfrm>
+            <a:off x="8138160" y="1600200"/>
+            <a:ext cx="3474720" cy="2377440"/>
+          </a:xfrm>
+          <a:prstGeom prst="roundRect">
+            <a:avLst>
+              <a:gd name="adj" fmla="val 3846"/>
             </a:avLst>
           </a:prstGeom>
           <a:solidFill>
@@ -7427,14 +13843,14 @@
       </p:sp>
       <p:sp>
         <p:nvSpPr>
-          <p:cNvPr id="5" name="Text 3"/>
+          <p:cNvPr id="15" name="Text 13"/>
           <p:cNvSpPr txBox="1"/>
           <p:nvPr/>
         </p:nvSpPr>
         <p:spPr>
           <a:xfrm>
-            <a:off x="777240" y="1828800"/>
-            <a:ext cx="3017520" cy="411480"/>
+            <a:off x="8339328" y="1709928"/>
+            <a:ext cx="3108960" cy="365760"/>
           </a:xfrm>
           <a:prstGeom prst="rect">
             <a:avLst/>
@@ -7450,139 +13866,49 @@
               <a:buNone/>
             </a:pPr>
             <a:r>
-              <a:rPr lang="en-US" sz="1600" b="1" dirty="0">
+              <a:rPr lang="en-US" sz="1500" b="1" dirty="0">
                 <a:solidFill>
                   <a:schemeClr val="bg1"/>
                 </a:solidFill>
               </a:rPr>
-              <a:t>Ce que coûte un test</a:t>
-            </a:r>
-            <a:endParaRPr lang="en-US" sz="1600" dirty="0"/>
-          </a:p>
-        </p:txBody>
-      </p:sp>
-      <p:sp>
-        <p:nvSpPr>
-          <p:cNvPr id="6" name="Text 4"/>
-          <p:cNvSpPr txBox="1"/>
-          <p:nvPr/>
-        </p:nvSpPr>
-        <p:spPr>
-          <a:xfrm>
-            <a:off x="777240" y="2377440"/>
-            <a:ext cx="3017520" cy="2057400"/>
-          </a:xfrm>
-          <a:prstGeom prst="rect">
-            <a:avLst/>
-          </a:prstGeom>
-          <a:noFill/>
-          <a:ln/>
-        </p:spPr>
-        <p:txBody>
-          <a:bodyPr wrap="square" lIns="0" tIns="0" rIns="0" bIns="0" rtlCol="0" anchor="t"/>
-          <a:lstStyle/>
-          <a:p>
-            <a:pPr indent="0" marL="0">
-              <a:spcAft>
-                <a:spcPts val="1200"/>
-              </a:spcAft>
-              <a:buNone/>
-            </a:pPr>
-            <a:r>
-              <a:rPr lang="en-US" sz="1350" dirty="0">
-                <a:solidFill>
-                  <a:schemeClr val="bg1"/>
-                </a:solidFill>
-              </a:rPr>
-              <a:t>L'écrire</a:t>
-            </a:r>
-            <a:endParaRPr lang="en-US" sz="1350" dirty="0"/>
-          </a:p>
-          <a:p>
-            <a:pPr indent="0" marL="0">
-              <a:spcAft>
-                <a:spcPts val="1200"/>
-              </a:spcAft>
-              <a:buNone/>
-            </a:pPr>
-            <a:r>
-              <a:rPr lang="en-US" sz="1350" dirty="0">
-                <a:solidFill>
-                  <a:schemeClr val="bg1"/>
-                </a:solidFill>
-              </a:rPr>
-              <a:t>Le maintenir à chaque changement d'US</a:t>
-            </a:r>
-            <a:endParaRPr lang="en-US" sz="1350" dirty="0"/>
-          </a:p>
-          <a:p>
-            <a:pPr indent="0" marL="0">
-              <a:spcAft>
-                <a:spcPts val="1200"/>
-              </a:spcAft>
-              <a:buNone/>
-            </a:pPr>
-            <a:r>
-              <a:rPr lang="en-US" sz="1350" dirty="0">
-                <a:solidFill>
-                  <a:schemeClr val="bg1"/>
-                </a:solidFill>
-              </a:rPr>
-              <a:t>Accès à ITG, comptes par rôle, données, tests instables</a:t>
-            </a:r>
-            <a:endParaRPr lang="en-US" sz="1350" dirty="0"/>
-          </a:p>
-          <a:p>
-            <a:pPr indent="0" marL="0">
-              <a:spcAft>
-                <a:spcPts val="1200"/>
-              </a:spcAft>
-              <a:buNone/>
-            </a:pPr>
-            <a:r>
-              <a:rPr lang="en-US" sz="1350" dirty="0">
-                <a:solidFill>
-                  <a:schemeClr val="bg1"/>
-                </a:solidFill>
-              </a:rPr>
-              <a:t>Un propriétaire après le 31/12, sinon la suite meurt</a:t>
-            </a:r>
-            <a:endParaRPr lang="en-US" sz="1350" dirty="0"/>
-          </a:p>
-        </p:txBody>
-      </p:sp>
-      <p:sp>
-        <p:nvSpPr>
-          <p:cNvPr id="7" name="card"/>
+              <a:t>Ce que ça fait gagner en risque</a:t>
+            </a:r>
+            <a:endParaRPr lang="en-US" sz="1500" dirty="0"/>
+          </a:p>
+        </p:txBody>
+      </p:sp>
+      <p:sp>
+        <p:nvSpPr>
+          <p:cNvPr id="16" name="box"/>
           <p:cNvSpPr/>
           <p:nvPr/>
         </p:nvSpPr>
         <p:spPr>
           <a:xfrm>
-            <a:off x="4343400" y="1691640"/>
-            <a:ext cx="3474720" cy="2834640"/>
+            <a:off x="8339328" y="2121408"/>
+            <a:ext cx="1600200" cy="274320"/>
           </a:xfrm>
           <a:prstGeom prst="roundRect">
             <a:avLst>
-              <a:gd name="adj" fmla="val 3226"/>
+              <a:gd name="adj" fmla="val 20000"/>
             </a:avLst>
           </a:prstGeom>
           <a:solidFill>
-            <a:srgbClr val="E6E9ED"/>
+            <a:srgbClr val="DCEFE2"/>
           </a:solidFill>
           <a:ln/>
         </p:spPr>
       </p:sp>
       <p:sp>
         <p:nvSpPr>
-          <p:cNvPr id="8" name="Text 6"/>
+          <p:cNvPr id="17" name="Text 15"/>
           <p:cNvSpPr txBox="1"/>
           <p:nvPr/>
         </p:nvSpPr>
         <p:spPr>
           <a:xfrm>
-            <a:off x="4572000" y="1828800"/>
-            <a:ext cx="3017520" cy="411480"/>
+            <a:off x="8339328" y="2121408"/>
+            <a:ext cx="1600200" cy="274320"/>
           </a:xfrm>
           <a:prstGeom prst="rect">
             <a:avLst/>
@@ -7591,34 +13917,172 @@
           <a:ln/>
         </p:spPr>
         <p:txBody>
+          <a:bodyPr wrap="square" lIns="0" tIns="0" rIns="0" bIns="0" rtlCol="0" anchor="ctr"/>
+          <a:lstStyle/>
+          <a:p>
+            <a:pPr algn="ctr" indent="0" marL="0">
+              <a:buNone/>
+            </a:pPr>
+            <a:r>
+              <a:rPr lang="en-US" sz="1100" b="1" dirty="0">
+                <a:solidFill>
+                  <a:srgbClr val="2E7D4F"/>
+                </a:solidFill>
+              </a:rPr>
+              <a:t>Le vrai bénéfice</a:t>
+            </a:r>
+            <a:endParaRPr lang="en-US" sz="1100" dirty="0"/>
+          </a:p>
+        </p:txBody>
+      </p:sp>
+      <p:sp>
+        <p:nvSpPr>
+          <p:cNvPr id="18" name="Text 16"/>
+          <p:cNvSpPr txBox="1"/>
+          <p:nvPr/>
+        </p:nvSpPr>
+        <p:spPr>
+          <a:xfrm>
+            <a:off x="8339328" y="2514600"/>
+            <a:ext cx="3154680" cy="1417320"/>
+          </a:xfrm>
+          <a:prstGeom prst="rect">
+            <a:avLst/>
+          </a:prstGeom>
+          <a:noFill/>
+          <a:ln/>
+        </p:spPr>
+        <p:txBody>
           <a:bodyPr wrap="square" lIns="0" tIns="0" rIns="0" bIns="0" rtlCol="0" anchor="t"/>
           <a:lstStyle/>
           <a:p>
+            <a:pPr marL="342900" indent="-342900">
+              <a:spcAft>
+                <a:spcPts val="400"/>
+              </a:spcAft>
+              <a:buSzPct val="100000"/>
+              <a:buChar char="•"/>
+            </a:pPr>
+            <a:r>
+              <a:rPr lang="en-US" sz="1150" dirty="0">
+                <a:solidFill>
+                  <a:schemeClr val="bg1"/>
+                </a:solidFill>
+              </a:rPr>
+              <a:t>Une régression vue le lendemain, pas en fin de sprint ni en recette métier</a:t>
+            </a:r>
+            <a:endParaRPr lang="en-US" sz="1150" dirty="0"/>
+          </a:p>
+          <a:p>
+            <a:pPr marL="342900" indent="-342900">
+              <a:spcAft>
+                <a:spcPts val="400"/>
+              </a:spcAft>
+              <a:buSzPct val="100000"/>
+              <a:buChar char="•"/>
+            </a:pPr>
+            <a:r>
+              <a:rPr lang="en-US" sz="1150" dirty="0">
+                <a:solidFill>
+                  <a:schemeClr val="bg1"/>
+                </a:solidFill>
+              </a:rPr>
+              <a:t>Seulement sur une règle stable et coûteuse à rater</a:t>
+            </a:r>
+            <a:endParaRPr lang="en-US" sz="1150" dirty="0"/>
+          </a:p>
+        </p:txBody>
+      </p:sp>
+      <p:sp>
+        <p:nvSpPr>
+          <p:cNvPr id="19" name="Text 17"/>
+          <p:cNvSpPr txBox="1"/>
+          <p:nvPr/>
+        </p:nvSpPr>
+        <p:spPr>
+          <a:xfrm>
+            <a:off x="548640" y="4114800"/>
+            <a:ext cx="7315200" cy="292608"/>
+          </a:xfrm>
+          <a:prstGeom prst="rect">
+            <a:avLst/>
+          </a:prstGeom>
+          <a:noFill/>
+          <a:ln/>
+        </p:spPr>
+        <p:txBody>
+          <a:bodyPr wrap="square" lIns="0" tIns="0" rIns="0" bIns="0" rtlCol="0" anchor="t"/>
+          <a:lstStyle/>
+          <a:p>
             <a:pPr indent="0" marL="0">
               <a:buNone/>
             </a:pPr>
             <a:r>
-              <a:rPr lang="en-US" sz="1600" b="1" dirty="0">
-                <a:solidFill>
-                  <a:schemeClr val="tx1"/>
-                </a:solidFill>
-              </a:rPr>
-              <a:t>Ce qu'il fait gagner en temps</a:t>
-            </a:r>
-            <a:endParaRPr lang="en-US" sz="1600" dirty="0"/>
-          </a:p>
-        </p:txBody>
-      </p:sp>
-      <p:sp>
-        <p:nvSpPr>
-          <p:cNvPr id="9" name="Text 7"/>
+              <a:rPr lang="en-US" sz="1300" b="1" dirty="0">
+                <a:solidFill>
+                  <a:schemeClr val="tx2"/>
+                </a:solidFill>
+              </a:rPr>
+              <a:t>Une régression introduite dans un sprint est vue…</a:t>
+            </a:r>
+            <a:endParaRPr lang="en-US" sz="1300" dirty="0"/>
+          </a:p>
+        </p:txBody>
+      </p:sp>
+      <p:sp>
+        <p:nvSpPr>
+          <p:cNvPr id="20" name="frise"/>
+          <p:cNvSpPr/>
+          <p:nvPr/>
+        </p:nvSpPr>
+        <p:spPr>
+          <a:xfrm>
+            <a:off x="914400" y="4572000"/>
+            <a:ext cx="10332720" cy="0"/>
+          </a:xfrm>
+          <a:prstGeom prst="line">
+            <a:avLst/>
+          </a:prstGeom>
+          <a:noFill/>
+          <a:ln w="19050">
+            <a:solidFill>
+              <a:srgbClr val="5F6B7A"/>
+            </a:solidFill>
+            <a:prstDash val="solid"/>
+            <a:tailEnd type="triangle"/>
+          </a:ln>
+        </p:spPr>
+      </p:sp>
+      <p:sp>
+        <p:nvSpPr>
+          <p:cNvPr id="21" name="jalon"/>
+          <p:cNvSpPr/>
+          <p:nvPr/>
+        </p:nvSpPr>
+        <p:spPr>
+          <a:xfrm>
+            <a:off x="786384" y="4443984"/>
+            <a:ext cx="256032" cy="256032"/>
+          </a:xfrm>
+          <a:prstGeom prst="ellipse">
+            <a:avLst/>
+          </a:prstGeom>
+          <a:solidFill>
+            <a:srgbClr val="2E7D4F"/>
+          </a:solidFill>
+          <a:ln/>
+        </p:spPr>
+      </p:sp>
+      <p:sp>
+        <p:nvSpPr>
+          <p:cNvPr id="22" name="Text 20"/>
           <p:cNvSpPr txBox="1"/>
           <p:nvPr/>
         </p:nvSpPr>
         <p:spPr>
           <a:xfrm>
-            <a:off x="4572000" y="2377440"/>
-            <a:ext cx="3017520" cy="2057400"/>
+            <a:off x="786384" y="4727448"/>
+            <a:ext cx="3108960" cy="457200"/>
           </a:xfrm>
           <a:prstGeom prst="rect">
             <a:avLst/>
@@ -7631,185 +14095,224 @@
           <a:lstStyle/>
           <a:p>
             <a:pPr indent="0" marL="0">
-              <a:spcAft>
-                <a:spcPts val="1200"/>
-              </a:spcAft>
-              <a:buNone/>
-            </a:pPr>
-            <a:r>
-              <a:rPr lang="en-US" sz="1350" dirty="0">
-                <a:solidFill>
-                  <a:schemeClr val="tx1"/>
-                </a:solidFill>
-              </a:rPr>
-              <a:t>Seulement les passes qu'on aurait faites à la main. Le smoke revient à chaque déploiement ; la non-régression, quelques fois avant mars</a:t>
-            </a:r>
-            <a:endParaRPr lang="en-US" sz="1350" dirty="0"/>
+              <a:buNone/>
+            </a:pPr>
+            <a:r>
+              <a:rPr lang="en-US" sz="1200" b="1" dirty="0">
+                <a:solidFill>
+                  <a:srgbClr val="2E7D4F"/>
+                </a:solidFill>
+              </a:rPr>
+              <a:t>le lendemain</a:t>
+            </a:r>
+            <a:endParaRPr lang="en-US" sz="1200" dirty="0"/>
           </a:p>
           <a:p>
             <a:pPr indent="0" marL="0">
-              <a:spcAft>
-                <a:spcPts val="1200"/>
-              </a:spcAft>
-              <a:buNone/>
-            </a:pPr>
-            <a:r>
-              <a:rPr lang="en-US" sz="1350" dirty="0">
-                <a:solidFill>
-                  <a:schemeClr val="tx1"/>
-                </a:solidFill>
-              </a:rPr>
-              <a:t>Les exécutions de nuit en plus n'économisent aucun temps</a:t>
-            </a:r>
-            <a:endParaRPr lang="en-US" sz="1350" dirty="0"/>
-          </a:p>
+              <a:buNone/>
+            </a:pPr>
+            <a:r>
+              <a:rPr lang="en-US" sz="1200" dirty="0">
+                <a:solidFill>
+                  <a:srgbClr val="5F6B7A"/>
+                </a:solidFill>
+              </a:rPr>
+              <a:t>suite automatisée</a:t>
+            </a:r>
+            <a:endParaRPr lang="en-US" sz="1200" dirty="0"/>
+          </a:p>
+        </p:txBody>
+      </p:sp>
+      <p:sp>
+        <p:nvSpPr>
+          <p:cNvPr id="23" name="jalon"/>
+          <p:cNvSpPr/>
+          <p:nvPr/>
+        </p:nvSpPr>
+        <p:spPr>
+          <a:xfrm>
+            <a:off x="4443984" y="4443984"/>
+            <a:ext cx="256032" cy="256032"/>
+          </a:xfrm>
+          <a:prstGeom prst="ellipse">
+            <a:avLst/>
+          </a:prstGeom>
+          <a:solidFill>
+            <a:srgbClr val="B7791F"/>
+          </a:solidFill>
+          <a:ln/>
+        </p:spPr>
+      </p:sp>
+      <p:sp>
+        <p:nvSpPr>
+          <p:cNvPr id="24" name="Text 22"/>
+          <p:cNvSpPr txBox="1"/>
+          <p:nvPr/>
+        </p:nvSpPr>
+        <p:spPr>
+          <a:xfrm>
+            <a:off x="4443984" y="4727448"/>
+            <a:ext cx="3108960" cy="457200"/>
+          </a:xfrm>
+          <a:prstGeom prst="rect">
+            <a:avLst/>
+          </a:prstGeom>
+          <a:noFill/>
+          <a:ln/>
+        </p:spPr>
+        <p:txBody>
+          <a:bodyPr wrap="square" lIns="0" tIns="0" rIns="0" bIns="0" rtlCol="0" anchor="t"/>
+          <a:lstStyle/>
           <a:p>
             <a:pPr indent="0" marL="0">
-              <a:spcAft>
-                <a:spcPts val="1200"/>
-              </a:spcAft>
-              <a:buNone/>
-            </a:pPr>
-            <a:r>
-              <a:rPr lang="en-US" sz="1350" dirty="0">
-                <a:solidFill>
-                  <a:schemeClr val="tx1"/>
-                </a:solidFill>
-              </a:rPr>
-              <a:t>Aucune évolution prévue après mars</a:t>
-            </a:r>
-            <a:endParaRPr lang="en-US" sz="1350" dirty="0"/>
-          </a:p>
-        </p:txBody>
-      </p:sp>
-      <p:sp>
-        <p:nvSpPr>
-          <p:cNvPr id="10" name="card"/>
+              <a:buNone/>
+            </a:pPr>
+            <a:r>
+              <a:rPr lang="en-US" sz="1200" b="1" dirty="0">
+                <a:solidFill>
+                  <a:srgbClr val="B7791F"/>
+                </a:solidFill>
+              </a:rPr>
+              <a:t>en fin de sprint</a:t>
+            </a:r>
+            <a:endParaRPr lang="en-US" sz="1200" dirty="0"/>
+          </a:p>
+          <a:p>
+            <a:pPr indent="0" marL="0">
+              <a:buNone/>
+            </a:pPr>
+            <a:r>
+              <a:rPr lang="en-US" sz="1200" dirty="0">
+                <a:solidFill>
+                  <a:srgbClr val="5F6B7A"/>
+                </a:solidFill>
+              </a:rPr>
+              <a:t>campagne manuelle</a:t>
+            </a:r>
+            <a:endParaRPr lang="en-US" sz="1200" dirty="0"/>
+          </a:p>
+        </p:txBody>
+      </p:sp>
+      <p:sp>
+        <p:nvSpPr>
+          <p:cNvPr id="25" name="jalon"/>
           <p:cNvSpPr/>
           <p:nvPr/>
         </p:nvSpPr>
         <p:spPr>
           <a:xfrm>
-            <a:off x="8138160" y="1691640"/>
-            <a:ext cx="3474720" cy="2834640"/>
+            <a:off x="8101584" y="4443984"/>
+            <a:ext cx="256032" cy="256032"/>
+          </a:xfrm>
+          <a:prstGeom prst="ellipse">
+            <a:avLst/>
+          </a:prstGeom>
+          <a:solidFill>
+            <a:srgbClr val="B23B3B"/>
+          </a:solidFill>
+          <a:ln/>
+        </p:spPr>
+      </p:sp>
+      <p:sp>
+        <p:nvSpPr>
+          <p:cNvPr id="26" name="Text 24"/>
+          <p:cNvSpPr txBox="1"/>
+          <p:nvPr/>
+        </p:nvSpPr>
+        <p:spPr>
+          <a:xfrm>
+            <a:off x="8101584" y="4727448"/>
+            <a:ext cx="3108960" cy="457200"/>
+          </a:xfrm>
+          <a:prstGeom prst="rect">
+            <a:avLst/>
+          </a:prstGeom>
+          <a:noFill/>
+          <a:ln/>
+        </p:spPr>
+        <p:txBody>
+          <a:bodyPr wrap="square" lIns="0" tIns="0" rIns="0" bIns="0" rtlCol="0" anchor="t"/>
+          <a:lstStyle/>
+          <a:p>
+            <a:pPr indent="0" marL="0">
+              <a:buNone/>
+            </a:pPr>
+            <a:r>
+              <a:rPr lang="en-US" sz="1200" b="1" dirty="0">
+                <a:solidFill>
+                  <a:srgbClr val="B23B3B"/>
+                </a:solidFill>
+              </a:rPr>
+              <a:t>en recette métier</a:t>
+            </a:r>
+            <a:endParaRPr lang="en-US" sz="1200" dirty="0"/>
+          </a:p>
+          <a:p>
+            <a:pPr indent="0" marL="0">
+              <a:buNone/>
+            </a:pPr>
+            <a:r>
+              <a:rPr lang="en-US" sz="1200" dirty="0">
+                <a:solidFill>
+                  <a:srgbClr val="5F6B7A"/>
+                </a:solidFill>
+              </a:rPr>
+              <a:t>test métiers, S6 à S11</a:t>
+            </a:r>
+            <a:endParaRPr lang="en-US" sz="1200" dirty="0"/>
+          </a:p>
+        </p:txBody>
+      </p:sp>
+      <p:sp>
+        <p:nvSpPr>
+          <p:cNvPr id="27" name="Text 25"/>
+          <p:cNvSpPr txBox="1"/>
+          <p:nvPr/>
+        </p:nvSpPr>
+        <p:spPr>
+          <a:xfrm>
+            <a:off x="786384" y="5193792"/>
+            <a:ext cx="10424160" cy="274320"/>
+          </a:xfrm>
+          <a:prstGeom prst="rect">
+            <a:avLst/>
+          </a:prstGeom>
+          <a:noFill/>
+          <a:ln/>
+        </p:spPr>
+        <p:txBody>
+          <a:bodyPr wrap="square" lIns="0" tIns="0" rIns="0" bIns="0" rtlCol="0" anchor="t"/>
+          <a:lstStyle/>
+          <a:p>
+            <a:pPr indent="0" marL="0">
+              <a:buNone/>
+            </a:pPr>
+            <a:r>
+              <a:rPr lang="en-US" sz="1150" i="1" dirty="0">
+                <a:solidFill>
+                  <a:schemeClr val="accent4"/>
+                </a:solidFill>
+              </a:rPr>
+              <a:t>Plus elle est vue tard, plus elle coûte : contexte perdu, correctifs empilés, recette bloquée.</a:t>
+            </a:r>
+            <a:endParaRPr lang="en-US" sz="1150" dirty="0"/>
+          </a:p>
+        </p:txBody>
+      </p:sp>
+      <p:sp>
+        <p:nvSpPr>
+          <p:cNvPr id="28" name="box"/>
+          <p:cNvSpPr/>
+          <p:nvPr/>
+        </p:nvSpPr>
+        <p:spPr>
+          <a:xfrm>
+            <a:off x="548640" y="5559552"/>
+            <a:ext cx="11064240" cy="502920"/>
           </a:xfrm>
           <a:prstGeom prst="roundRect">
             <a:avLst>
-              <a:gd name="adj" fmla="val 3226"/>
-            </a:avLst>
-          </a:prstGeom>
-          <a:solidFill>
-            <a:schemeClr val="accent1"/>
-          </a:solidFill>
-          <a:ln/>
-        </p:spPr>
-      </p:sp>
-      <p:sp>
-        <p:nvSpPr>
-          <p:cNvPr id="11" name="Text 9"/>
-          <p:cNvSpPr txBox="1"/>
-          <p:nvPr/>
-        </p:nvSpPr>
-        <p:spPr>
-          <a:xfrm>
-            <a:off x="8366760" y="1828800"/>
-            <a:ext cx="3017520" cy="411480"/>
-          </a:xfrm>
-          <a:prstGeom prst="rect">
-            <a:avLst/>
-          </a:prstGeom>
-          <a:noFill/>
-          <a:ln/>
-        </p:spPr>
-        <p:txBody>
-          <a:bodyPr wrap="square" lIns="0" tIns="0" rIns="0" bIns="0" rtlCol="0" anchor="t"/>
-          <a:lstStyle/>
-          <a:p>
-            <a:pPr indent="0" marL="0">
-              <a:buNone/>
-            </a:pPr>
-            <a:r>
-              <a:rPr lang="en-US" sz="1600" b="1" dirty="0">
-                <a:solidFill>
-                  <a:schemeClr val="bg1"/>
-                </a:solidFill>
-              </a:rPr>
-              <a:t>Ce qu'il fait gagner en risque</a:t>
-            </a:r>
-            <a:endParaRPr lang="en-US" sz="1600" dirty="0"/>
-          </a:p>
-        </p:txBody>
-      </p:sp>
-      <p:sp>
-        <p:nvSpPr>
-          <p:cNvPr id="12" name="Text 10"/>
-          <p:cNvSpPr txBox="1"/>
-          <p:nvPr/>
-        </p:nvSpPr>
-        <p:spPr>
-          <a:xfrm>
-            <a:off x="8366760" y="2377440"/>
-            <a:ext cx="3017520" cy="2057400"/>
-          </a:xfrm>
-          <a:prstGeom prst="rect">
-            <a:avLst/>
-          </a:prstGeom>
-          <a:noFill/>
-          <a:ln/>
-        </p:spPr>
-        <p:txBody>
-          <a:bodyPr wrap="square" lIns="0" tIns="0" rIns="0" bIns="0" rtlCol="0" anchor="t"/>
-          <a:lstStyle/>
-          <a:p>
-            <a:pPr indent="0" marL="0">
-              <a:spcAft>
-                <a:spcPts val="1200"/>
-              </a:spcAft>
-              <a:buNone/>
-            </a:pPr>
-            <a:r>
-              <a:rPr lang="en-US" sz="1350" dirty="0">
-                <a:solidFill>
-                  <a:schemeClr val="bg1"/>
-                </a:solidFill>
-              </a:rPr>
-              <a:t>Une régression trouvée le lendemain, pas en fin de sprint ni en recette métier</a:t>
-            </a:r>
-            <a:endParaRPr lang="en-US" sz="1350" dirty="0"/>
-          </a:p>
-          <a:p>
-            <a:pPr indent="0" marL="0">
-              <a:spcAft>
-                <a:spcPts val="1200"/>
-              </a:spcAft>
-              <a:buNone/>
-            </a:pPr>
-            <a:r>
-              <a:rPr lang="en-US" sz="1350" dirty="0">
-                <a:solidFill>
-                  <a:schemeClr val="bg1"/>
-                </a:solidFill>
-              </a:rPr>
-              <a:t>Utile seulement sur une règle stable et coûteuse à rater</a:t>
-            </a:r>
-            <a:endParaRPr lang="en-US" sz="1350" dirty="0"/>
-          </a:p>
-        </p:txBody>
-      </p:sp>
-      <p:sp>
-        <p:nvSpPr>
-          <p:cNvPr id="13" name="box"/>
-          <p:cNvSpPr/>
-          <p:nvPr/>
-        </p:nvSpPr>
-        <p:spPr>
-          <a:xfrm>
-            <a:off x="548640" y="4754880"/>
-            <a:ext cx="11064240" cy="548640"/>
-          </a:xfrm>
-          <a:prstGeom prst="roundRect">
-            <a:avLst>
-              <a:gd name="adj" fmla="val 10000"/>
+              <a:gd name="adj" fmla="val 10909"/>
             </a:avLst>
           </a:prstGeom>
           <a:solidFill>
@@ -7820,14 +14323,14 @@
       </p:sp>
       <p:sp>
         <p:nvSpPr>
-          <p:cNvPr id="14" name="Text 12"/>
+          <p:cNvPr id="29" name="Text 27"/>
           <p:cNvSpPr txBox="1"/>
           <p:nvPr/>
         </p:nvSpPr>
         <p:spPr>
           <a:xfrm>
-            <a:off x="731520" y="4754880"/>
-            <a:ext cx="10698480" cy="548640"/>
+            <a:off x="731520" y="5559552"/>
+            <a:ext cx="10698480" cy="502920"/>
           </a:xfrm>
           <a:prstGeom prst="rect">
             <a:avLst/>
@@ -7843,25 +14346,25 @@
               <a:buNone/>
             </a:pPr>
             <a:r>
-              <a:rPr lang="en-US" sz="1400" b="1" dirty="0">
+              <a:rPr lang="en-US" sz="1350" b="1" dirty="0">
                 <a:solidFill>
                   <a:srgbClr val="00338D"/>
                 </a:solidFill>
               </a:rPr>
-              <a:t>Conséquence : </a:t>
+              <a:t>Décision : </a:t>
             </a:r>
             <a:pPr indent="0" marL="0">
               <a:buNone/>
             </a:pPr>
             <a:r>
-              <a:rPr lang="en-US" sz="1400" dirty="0">
+              <a:rPr lang="en-US" sz="1350" dirty="0">
                 <a:solidFill>
                   <a:schemeClr val="tx1"/>
                 </a:solidFill>
               </a:rPr>
-              <a:t>peu de scénarios, sur des règles stables. Le pilote mesure les vrais coûts avant d'aller plus loin.</a:t>
-            </a:r>
-            <a:endParaRPr lang="en-US" sz="1400" dirty="0"/>
+              <a:t>peu de scénarios, uniquement sur des règles stables. Un pilote mesure les vrais coûts avant d'aller plus loin.</a:t>
+            </a:r>
+            <a:endParaRPr lang="en-US" sz="1350" dirty="0"/>
           </a:p>
         </p:txBody>
       </p:sp>
@@ -13659,8 +20162,8 @@
         </p:nvSpPr>
         <p:spPr>
           <a:xfrm>
-            <a:off x="548640" y="1645920"/>
-            <a:ext cx="2651760" cy="3291840"/>
+            <a:off x="548640" y="1600200"/>
+            <a:ext cx="2651760" cy="2834640"/>
           </a:xfrm>
           <a:prstGeom prst="roundRect">
             <a:avLst>
@@ -13681,7 +20184,7 @@
         </p:nvSpPr>
         <p:spPr>
           <a:xfrm>
-            <a:off x="685800" y="1764792"/>
+            <a:off x="685800" y="1700784"/>
             <a:ext cx="548640" cy="548640"/>
           </a:xfrm>
           <a:prstGeom prst="ellipse">
@@ -13709,7 +20212,7 @@
         </p:blipFill>
         <p:spPr>
           <a:xfrm>
-            <a:off x="806501" y="1885493"/>
+            <a:off x="806501" y="1821485"/>
             <a:ext cx="307238" cy="307238"/>
           </a:xfrm>
           <a:prstGeom prst="rect">
@@ -13725,7 +20228,7 @@
         </p:nvSpPr>
         <p:spPr>
           <a:xfrm>
-            <a:off x="1325880" y="1764792"/>
+            <a:off x="1325880" y="1700784"/>
             <a:ext cx="1828800" cy="292608"/>
           </a:xfrm>
           <a:prstGeom prst="rect">
@@ -13761,7 +20264,7 @@
         </p:nvSpPr>
         <p:spPr>
           <a:xfrm>
-            <a:off x="1325880" y="2057400"/>
+            <a:off x="1325880" y="1993392"/>
             <a:ext cx="1828800" cy="274320"/>
           </a:xfrm>
           <a:prstGeom prst="rect">
@@ -13797,8 +20300,8 @@
         </p:nvSpPr>
         <p:spPr>
           <a:xfrm>
-            <a:off x="685800" y="2514600"/>
-            <a:ext cx="2423160" cy="2377440"/>
+            <a:off x="685800" y="2395728"/>
+            <a:ext cx="2423160" cy="1993392"/>
           </a:xfrm>
           <a:prstGeom prst="rect">
             <a:avLst/>
@@ -13812,7 +20315,7 @@
           <a:p>
             <a:pPr marL="342900" indent="-342900">
               <a:spcAft>
-                <a:spcPts val="500"/>
+                <a:spcPts val="300"/>
               </a:spcAft>
               <a:buSzPct val="100000"/>
               <a:buChar char="•"/>
@@ -13830,7 +20333,7 @@
           <a:p>
             <a:pPr marL="342900" indent="-342900">
               <a:spcAft>
-                <a:spcPts val="500"/>
+                <a:spcPts val="300"/>
               </a:spcAft>
               <a:buSzPct val="100000"/>
               <a:buChar char="•"/>
@@ -13848,7 +20351,7 @@
           <a:p>
             <a:pPr marL="342900" indent="-342900">
               <a:spcAft>
-                <a:spcPts val="500"/>
+                <a:spcPts val="300"/>
               </a:spcAft>
               <a:buSzPct val="100000"/>
               <a:buChar char="•"/>
@@ -13873,8 +20376,8 @@
         </p:nvSpPr>
         <p:spPr>
           <a:xfrm>
-            <a:off x="3355848" y="1645920"/>
-            <a:ext cx="2651760" cy="3291840"/>
+            <a:off x="3355848" y="1600200"/>
+            <a:ext cx="2651760" cy="2834640"/>
           </a:xfrm>
           <a:prstGeom prst="roundRect">
             <a:avLst>
@@ -13895,7 +20398,7 @@
         </p:nvSpPr>
         <p:spPr>
           <a:xfrm>
-            <a:off x="3493008" y="1764792"/>
+            <a:off x="3493008" y="1700784"/>
             <a:ext cx="548640" cy="548640"/>
           </a:xfrm>
           <a:prstGeom prst="ellipse">
@@ -13923,7 +20426,7 @@
         </p:blipFill>
         <p:spPr>
           <a:xfrm>
-            <a:off x="3613709" y="1885493"/>
+            <a:off x="3613709" y="1821485"/>
             <a:ext cx="307238" cy="307238"/>
           </a:xfrm>
           <a:prstGeom prst="rect">
@@ -13939,7 +20442,7 @@
         </p:nvSpPr>
         <p:spPr>
           <a:xfrm>
-            <a:off x="4133088" y="1764792"/>
+            <a:off x="4133088" y="1700784"/>
             <a:ext cx="1828800" cy="292608"/>
           </a:xfrm>
           <a:prstGeom prst="rect">
@@ -13975,7 +20478,7 @@
         </p:nvSpPr>
         <p:spPr>
           <a:xfrm>
-            <a:off x="4133088" y="2057400"/>
+            <a:off x="4133088" y="1993392"/>
             <a:ext cx="1828800" cy="274320"/>
           </a:xfrm>
           <a:prstGeom prst="rect">
@@ -14011,8 +20514,8 @@
         </p:nvSpPr>
         <p:spPr>
           <a:xfrm>
-            <a:off x="3493008" y="2514600"/>
-            <a:ext cx="2423160" cy="2377440"/>
+            <a:off x="3493008" y="2395728"/>
+            <a:ext cx="2423160" cy="1993392"/>
           </a:xfrm>
           <a:prstGeom prst="rect">
             <a:avLst/>
@@ -14026,7 +20529,7 @@
           <a:p>
             <a:pPr marL="342900" indent="-342900">
               <a:spcAft>
-                <a:spcPts val="500"/>
+                <a:spcPts val="300"/>
               </a:spcAft>
               <a:buSzPct val="100000"/>
               <a:buChar char="•"/>
@@ -14044,7 +20547,7 @@
           <a:p>
             <a:pPr marL="342900" indent="-342900">
               <a:spcAft>
-                <a:spcPts val="500"/>
+                <a:spcPts val="300"/>
               </a:spcAft>
               <a:buSzPct val="100000"/>
               <a:buChar char="•"/>
@@ -14062,7 +20565,7 @@
           <a:p>
             <a:pPr marL="342900" indent="-342900">
               <a:spcAft>
-                <a:spcPts val="500"/>
+                <a:spcPts val="300"/>
               </a:spcAft>
               <a:buSzPct val="100000"/>
               <a:buChar char="•"/>
@@ -14080,7 +20583,7 @@
           <a:p>
             <a:pPr marL="342900" indent="-342900">
               <a:spcAft>
-                <a:spcPts val="500"/>
+                <a:spcPts val="300"/>
               </a:spcAft>
               <a:buSzPct val="100000"/>
               <a:buChar char="•"/>
@@ -14105,8 +20608,8 @@
         </p:nvSpPr>
         <p:spPr>
           <a:xfrm>
-            <a:off x="6163056" y="1645920"/>
-            <a:ext cx="2651760" cy="3291840"/>
+            <a:off x="6163056" y="1600200"/>
+            <a:ext cx="2651760" cy="2834640"/>
           </a:xfrm>
           <a:prstGeom prst="roundRect">
             <a:avLst>
@@ -14127,7 +20630,7 @@
         </p:nvSpPr>
         <p:spPr>
           <a:xfrm>
-            <a:off x="6300216" y="1764792"/>
+            <a:off x="6300216" y="1700784"/>
             <a:ext cx="548640" cy="548640"/>
           </a:xfrm>
           <a:prstGeom prst="ellipse">
@@ -14155,7 +20658,7 @@
         </p:blipFill>
         <p:spPr>
           <a:xfrm>
-            <a:off x="6420917" y="1885493"/>
+            <a:off x="6420917" y="1821485"/>
             <a:ext cx="307238" cy="307238"/>
           </a:xfrm>
           <a:prstGeom prst="rect">
@@ -14171,7 +20674,7 @@
         </p:nvSpPr>
         <p:spPr>
           <a:xfrm>
-            <a:off x="6940296" y="1764792"/>
+            <a:off x="6940296" y="1700784"/>
             <a:ext cx="1828800" cy="292608"/>
           </a:xfrm>
           <a:prstGeom prst="rect">
@@ -14207,7 +20710,7 @@
         </p:nvSpPr>
         <p:spPr>
           <a:xfrm>
-            <a:off x="6940296" y="2057400"/>
+            <a:off x="6940296" y="1993392"/>
             <a:ext cx="1828800" cy="274320"/>
           </a:xfrm>
           <a:prstGeom prst="rect">
@@ -14243,8 +20746,8 @@
         </p:nvSpPr>
         <p:spPr>
           <a:xfrm>
-            <a:off x="6300216" y="2514600"/>
-            <a:ext cx="2423160" cy="2377440"/>
+            <a:off x="6300216" y="2395728"/>
+            <a:ext cx="2423160" cy="1993392"/>
           </a:xfrm>
           <a:prstGeom prst="rect">
             <a:avLst/>
@@ -14258,7 +20761,7 @@
           <a:p>
             <a:pPr marL="342900" indent="-342900">
               <a:spcAft>
-                <a:spcPts val="500"/>
+                <a:spcPts val="300"/>
               </a:spcAft>
               <a:buSzPct val="100000"/>
               <a:buChar char="•"/>
@@ -14276,7 +20779,7 @@
           <a:p>
             <a:pPr marL="342900" indent="-342900">
               <a:spcAft>
-                <a:spcPts val="500"/>
+                <a:spcPts val="300"/>
               </a:spcAft>
               <a:buSzPct val="100000"/>
               <a:buChar char="•"/>
@@ -14294,7 +20797,7 @@
           <a:p>
             <a:pPr marL="342900" indent="-342900">
               <a:spcAft>
-                <a:spcPts val="500"/>
+                <a:spcPts val="300"/>
               </a:spcAft>
               <a:buSzPct val="100000"/>
               <a:buChar char="•"/>
@@ -14312,7 +20815,7 @@
           <a:p>
             <a:pPr marL="342900" indent="-342900">
               <a:spcAft>
-                <a:spcPts val="500"/>
+                <a:spcPts val="300"/>
               </a:spcAft>
               <a:buSzPct val="100000"/>
               <a:buChar char="•"/>
@@ -14337,8 +20840,8 @@
         </p:nvSpPr>
         <p:spPr>
           <a:xfrm>
-            <a:off x="8970264" y="1645920"/>
-            <a:ext cx="2651760" cy="3291840"/>
+            <a:off x="8970264" y="1600200"/>
+            <a:ext cx="2651760" cy="2834640"/>
           </a:xfrm>
           <a:prstGeom prst="roundRect">
             <a:avLst>
@@ -14359,7 +20862,7 @@
         </p:nvSpPr>
         <p:spPr>
           <a:xfrm>
-            <a:off x="9107424" y="1764792"/>
+            <a:off x="9107424" y="1700784"/>
             <a:ext cx="548640" cy="548640"/>
           </a:xfrm>
           <a:prstGeom prst="ellipse">
@@ -14387,7 +20890,7 @@
         </p:blipFill>
         <p:spPr>
           <a:xfrm>
-            <a:off x="9228125" y="1885493"/>
+            <a:off x="9228125" y="1821485"/>
             <a:ext cx="307238" cy="307238"/>
           </a:xfrm>
           <a:prstGeom prst="rect">
@@ -14403,7 +20906,7 @@
         </p:nvSpPr>
         <p:spPr>
           <a:xfrm>
-            <a:off x="9747504" y="1764792"/>
+            <a:off x="9747504" y="1700784"/>
             <a:ext cx="1828800" cy="292608"/>
           </a:xfrm>
           <a:prstGeom prst="rect">
@@ -14439,7 +20942,7 @@
         </p:nvSpPr>
         <p:spPr>
           <a:xfrm>
-            <a:off x="9747504" y="2057400"/>
+            <a:off x="9747504" y="1993392"/>
             <a:ext cx="1828800" cy="274320"/>
           </a:xfrm>
           <a:prstGeom prst="rect">
@@ -14475,8 +20978,8 @@
         </p:nvSpPr>
         <p:spPr>
           <a:xfrm>
-            <a:off x="9107424" y="2514600"/>
-            <a:ext cx="2423160" cy="2377440"/>
+            <a:off x="9107424" y="2395728"/>
+            <a:ext cx="2423160" cy="1993392"/>
           </a:xfrm>
           <a:prstGeom prst="rect">
             <a:avLst/>
@@ -14490,7 +20993,7 @@
           <a:p>
             <a:pPr marL="342900" indent="-342900">
               <a:spcAft>
-                <a:spcPts val="500"/>
+                <a:spcPts val="300"/>
               </a:spcAft>
               <a:buSzPct val="100000"/>
               <a:buChar char="•"/>
@@ -14508,7 +21011,7 @@
           <a:p>
             <a:pPr marL="342900" indent="-342900">
               <a:spcAft>
-                <a:spcPts val="500"/>
+                <a:spcPts val="300"/>
               </a:spcAft>
               <a:buSzPct val="100000"/>
               <a:buChar char="•"/>
@@ -14526,7 +21029,7 @@
           <a:p>
             <a:pPr marL="342900" indent="-342900">
               <a:spcAft>
-                <a:spcPts val="500"/>
+                <a:spcPts val="300"/>
               </a:spcAft>
               <a:buSzPct val="100000"/>
               <a:buChar char="•"/>
@@ -14551,16 +21054,16 @@
         </p:nvSpPr>
         <p:spPr>
           <a:xfrm>
-            <a:off x="548640" y="5074920"/>
-            <a:ext cx="11064240" cy="804672"/>
+            <a:off x="548640" y="4572000"/>
+            <a:ext cx="6812280" cy="896112"/>
           </a:xfrm>
           <a:prstGeom prst="roundRect">
             <a:avLst>
-              <a:gd name="adj" fmla="val 11364"/>
+              <a:gd name="adj" fmla="val 10204"/>
             </a:avLst>
           </a:prstGeom>
           <a:solidFill>
-            <a:schemeClr val="accent5"/>
+            <a:schemeClr val="tx2"/>
           </a:solidFill>
           <a:ln/>
         </p:spPr>
@@ -14573,7 +21076,7 @@
         </p:nvSpPr>
         <p:spPr>
           <a:xfrm>
-            <a:off x="713232" y="5166360"/>
+            <a:off x="685800" y="4718304"/>
             <a:ext cx="603504" cy="603504"/>
           </a:xfrm>
           <a:prstGeom prst="ellipse">
@@ -14601,7 +21104,7 @@
         </p:blipFill>
         <p:spPr>
           <a:xfrm>
-            <a:off x="846003" y="5299131"/>
+            <a:off x="818571" y="4851075"/>
             <a:ext cx="337962" cy="337962"/>
           </a:xfrm>
           <a:prstGeom prst="rect">
@@ -14617,8 +21120,8 @@
         </p:nvSpPr>
         <p:spPr>
           <a:xfrm>
-            <a:off x="1463040" y="5074920"/>
-            <a:ext cx="10012680" cy="804672"/>
+            <a:off x="1417320" y="4572000"/>
+            <a:ext cx="5806440" cy="896112"/>
           </a:xfrm>
           <a:prstGeom prst="rect">
             <a:avLst/>
@@ -14634,25 +21137,147 @@
               <a:buNone/>
             </a:pPr>
             <a:r>
-              <a:rPr lang="en-US" sz="1250" b="1" dirty="0">
+              <a:rPr lang="en-US" sz="1400" b="1" dirty="0">
+                <a:solidFill>
+                  <a:srgbClr val="FFFFFF"/>
+                </a:solidFill>
+              </a:rPr>
+              <a:t>L'humain décide seul</a:t>
+            </a:r>
+            <a:endParaRPr lang="en-US" sz="1200" dirty="0"/>
+          </a:p>
+          <a:p>
+            <a:pPr indent="0" marL="0">
+              <a:buNone/>
+            </a:pPr>
+            <a:r>
+              <a:rPr lang="en-US" sz="1200" dirty="0">
+                <a:solidFill>
+                  <a:srgbClr val="FFFFFF"/>
+                </a:solidFill>
+              </a:rPr>
+              <a:t>accepter un test écrit par un agent · modifier la CI ou un utilitaire partagé · ignorer un échec · supprimer un test</a:t>
+            </a:r>
+            <a:endParaRPr lang="en-US" sz="1200" dirty="0"/>
+          </a:p>
+        </p:txBody>
+      </p:sp>
+      <p:sp>
+        <p:nvSpPr>
+          <p:cNvPr id="32" name="card"/>
+          <p:cNvSpPr/>
+          <p:nvPr/>
+        </p:nvSpPr>
+        <p:spPr>
+          <a:xfrm>
+            <a:off x="7498080" y="4572000"/>
+            <a:ext cx="4114800" cy="896112"/>
+          </a:xfrm>
+          <a:prstGeom prst="roundRect">
+            <a:avLst>
+              <a:gd name="adj" fmla="val 10204"/>
+            </a:avLst>
+          </a:prstGeom>
+          <a:solidFill>
+            <a:schemeClr val="accent5"/>
+          </a:solidFill>
+          <a:ln/>
+        </p:spPr>
+      </p:sp>
+      <p:sp>
+        <p:nvSpPr>
+          <p:cNvPr id="33" name="Text 26"/>
+          <p:cNvSpPr txBox="1"/>
+          <p:nvPr/>
+        </p:nvSpPr>
+        <p:spPr>
+          <a:xfrm>
+            <a:off x="7680960" y="4572000"/>
+            <a:ext cx="3794760" cy="896112"/>
+          </a:xfrm>
+          <a:prstGeom prst="rect">
+            <a:avLst/>
+          </a:prstGeom>
+          <a:noFill/>
+          <a:ln/>
+        </p:spPr>
+        <p:txBody>
+          <a:bodyPr wrap="square" lIns="0" tIns="0" rIns="0" bIns="0" rtlCol="0" anchor="ctr"/>
+          <a:lstStyle/>
+          <a:p>
+            <a:pPr indent="0" marL="0">
+              <a:buNone/>
+            </a:pPr>
+            <a:r>
+              <a:rPr lang="en-US" sz="1400" b="1" dirty="0">
                 <a:solidFill>
                   <a:srgbClr val="00338D"/>
                 </a:solidFill>
               </a:rPr>
-              <a:t>Un POC sur un vrai projet : </a:t>
-            </a:r>
+              <a:t>Casser la règle exprès</a:t>
+            </a:r>
+            <a:endParaRPr lang="en-US" sz="1200" dirty="0"/>
+          </a:p>
+          <a:p>
             <a:pPr indent="0" marL="0">
               <a:buNone/>
             </a:pPr>
             <a:r>
-              <a:rPr lang="en-US" sz="1250" dirty="0">
+              <a:rPr lang="en-US" sz="1200" dirty="0">
                 <a:solidFill>
                   <a:schemeClr val="tx1"/>
                 </a:solidFill>
               </a:rPr>
-              <a:t>InfoCAC sur ITG, avec des comptes de test par rôle et le contrat OpenAPI. Aucune règle inventée, aucun test ignoré pour passer au vert, données des CAC seulement dans l'outil autorisé par KPMG.</a:t>
-            </a:r>
-            <a:endParaRPr lang="en-US" sz="1250" dirty="0"/>
+              <a:t>Avant d'accepter un test généré, on fausse l'attendu : il doit échouer, pour la bonne raison.</a:t>
+            </a:r>
+            <a:endParaRPr lang="en-US" sz="1200" dirty="0"/>
+          </a:p>
+        </p:txBody>
+      </p:sp>
+      <p:sp>
+        <p:nvSpPr>
+          <p:cNvPr id="34" name="Text 27"/>
+          <p:cNvSpPr txBox="1"/>
+          <p:nvPr/>
+        </p:nvSpPr>
+        <p:spPr>
+          <a:xfrm>
+            <a:off x="548640" y="5596128"/>
+            <a:ext cx="11064240" cy="329184"/>
+          </a:xfrm>
+          <a:prstGeom prst="rect">
+            <a:avLst/>
+          </a:prstGeom>
+          <a:noFill/>
+          <a:ln/>
+        </p:spPr>
+        <p:txBody>
+          <a:bodyPr wrap="square" lIns="0" tIns="0" rIns="0" bIns="0" rtlCol="0" anchor="ctr"/>
+          <a:lstStyle/>
+          <a:p>
+            <a:pPr indent="0" marL="0">
+              <a:buNone/>
+            </a:pPr>
+            <a:r>
+              <a:rPr lang="en-US" sz="1200" b="1" dirty="0">
+                <a:solidFill>
+                  <a:srgbClr val="00338D"/>
+                </a:solidFill>
+              </a:rPr>
+              <a:t>POC sur InfoCAC en ITG : </a:t>
+            </a:r>
+            <a:pPr indent="0" marL="0">
+              <a:buNone/>
+            </a:pPr>
+            <a:r>
+              <a:rPr lang="en-US" sz="1200" dirty="0">
+                <a:solidFill>
+                  <a:srgbClr val="5F6B7A"/>
+                </a:solidFill>
+              </a:rPr>
+              <a:t>aucune règle inventée, aucun test ignoré pour passer au vert, données des CAC seulement dans l'outil autorisé par KPMG.</a:t>
+            </a:r>
+            <a:endParaRPr lang="en-US" sz="1200" dirty="0"/>
           </a:p>
         </p:txBody>
       </p:sp>
